--- a/docs/phase2/progress/2026-09-22/Phase2_Progress_Presentation.pptx
+++ b/docs/phase2/progress/2026-09-22/Phase2_Progress_Presentation.pptx
@@ -2,18 +2,21 @@
 <file path=ppt/presentation.xml><?xml version="1.0" encoding="utf-8"?>
 <p:presentation xmlns:p="http://schemas.openxmlformats.org/presentationml/2006/main">
   <p:sldMasterIdLst>
-    <p:sldMasterId xmlns:r="http://schemas.openxmlformats.org/officeDocument/2006/relationships" id="2147483648" r:id="R3bd0f9326b8740a5"/>
+    <p:sldMasterId xmlns:r="http://schemas.openxmlformats.org/officeDocument/2006/relationships" id="2147483648" r:id="R011fd3b78f3b4cbc"/>
   </p:sldMasterIdLst>
   <p:notesMasterIdLst>
-    <p:notesMasterId xmlns:r="http://schemas.openxmlformats.org/officeDocument/2006/relationships" r:id="R640c9706de5b4166"/>
+    <p:notesMasterId xmlns:r="http://schemas.openxmlformats.org/officeDocument/2006/relationships" r:id="R6ea028759fb4435a"/>
   </p:notesMasterIdLst>
   <p:sldIdLst>
-    <p:sldId xmlns:r="http://schemas.openxmlformats.org/officeDocument/2006/relationships" id="256" r:id="R4e98c2f97e794309"/>
-    <p:sldId xmlns:r="http://schemas.openxmlformats.org/officeDocument/2006/relationships" id="257" r:id="R485f636e172f4036"/>
-    <p:sldId xmlns:r="http://schemas.openxmlformats.org/officeDocument/2006/relationships" id="258" r:id="R5e559ee914ce46eb"/>
-    <p:sldId xmlns:r="http://schemas.openxmlformats.org/officeDocument/2006/relationships" id="259" r:id="R02a49565bf0e41a5"/>
-    <p:sldId xmlns:r="http://schemas.openxmlformats.org/officeDocument/2006/relationships" id="260" r:id="Rc273b800682b4eeb"/>
-    <p:sldId xmlns:r="http://schemas.openxmlformats.org/officeDocument/2006/relationships" id="261" r:id="R68a3804f8f774928"/>
+    <p:sldId xmlns:r="http://schemas.openxmlformats.org/officeDocument/2006/relationships" id="256" r:id="R1ce67cc027c04933"/>
+    <p:sldId xmlns:r="http://schemas.openxmlformats.org/officeDocument/2006/relationships" id="257" r:id="Rd42f81cce8194a53"/>
+    <p:sldId xmlns:r="http://schemas.openxmlformats.org/officeDocument/2006/relationships" id="258" r:id="R27df153e3db34bba"/>
+    <p:sldId xmlns:r="http://schemas.openxmlformats.org/officeDocument/2006/relationships" id="259" r:id="Ra3b390f1d5274d53"/>
+    <p:sldId xmlns:r="http://schemas.openxmlformats.org/officeDocument/2006/relationships" id="260" r:id="R2a30841c43fe4b79"/>
+    <p:sldId xmlns:r="http://schemas.openxmlformats.org/officeDocument/2006/relationships" id="261" r:id="R8e61bbe75a2c47a4"/>
+    <p:sldId xmlns:r="http://schemas.openxmlformats.org/officeDocument/2006/relationships" id="262" r:id="R8f223647758a47e0"/>
+    <p:sldId xmlns:r="http://schemas.openxmlformats.org/officeDocument/2006/relationships" id="263" r:id="Rf6b6623445584b27"/>
+    <p:sldId xmlns:r="http://schemas.openxmlformats.org/officeDocument/2006/relationships" id="264" r:id="R22ab5ed9b8094601"/>
   </p:sldIdLst>
   <p:sldSz cx="12192000" cy="6858000"/>
   <p:notesSz cx="6858000" cy="9144000"/>
@@ -447,7 +450,22 @@
           <a:lstStyle xmlns:a="http://schemas.openxmlformats.org/drawingml/2006/main"/>
           <a:p xmlns:a="http://schemas.openxmlformats.org/drawingml/2006/main">
             <a:r>
-              <a:t>Progress status: reviewed requirements and feedback, prepared team work plan, proposed scenario and measurement method, verified public provider prices. No interviews, timing tests, prototype, deployment or demonstrated savings. Next-week submission is the user’s clarification on 22 September 2026; exact day pending. Source: https://github.com/duqins/ITS/blob/main/docs/reference/Project-September2026.pdf pages 5 and 7. Photo: Ildar Sagdejev (Specious), 30 September 2003, UNC Chapel Hill, https://commons.wikimedia.org/wiki/File:2003-09-30_UNC-CH_Phillips_classroom_1.jpg ; CC BY-SA 3.0 https://creativecommons.org/licenses/by-sa/3.0 . Resized proportionally; no other edits.</a:t>
+              <a:t>Sources and status</a:t>
+            </a:r>
+          </a:p>
+          <a:p xmlns:a="http://schemas.openxmlformats.org/drawingml/2006/main">
+            <a:r>
+              <a:t>https://github.com/duqins/ITS/blob/main/docs/reference/Project-September2026.pdf pages 5 and 7</a:t>
+            </a:r>
+          </a:p>
+          <a:p xmlns:a="http://schemas.openxmlformats.org/drawingml/2006/main">
+            <a:r>
+              <a:t/>
+            </a:r>
+          </a:p>
+          <a:p xmlns:a="http://schemas.openxmlformats.org/drawingml/2006/main">
+            <a:r>
+              <a:t>Early progress report, not a measured 50 percent completion claim. No interviews, timing trials, implemented app or deployment claimed. Submission next week comes from the user; exact day remains to confirm. Photo by Ildar Sagdejev (Specious), UNC Chapel Hill, 2003-09-30. Source https://commons.wikimedia.org/wiki/File:2003-09-30_UNC-CH_Phillips_classroom_1.jpg . CC BY-SA 3.0 https://creativecommons.org/licenses/by-sa/3.0 . Proportional resizing only. Suggested time25seconds.</a:t>
             </a:r>
           </a:p>
         </p:txBody>
@@ -517,7 +535,27 @@
           <a:lstStyle xmlns:a="http://schemas.openxmlformats.org/drawingml/2006/main"/>
           <a:p xmlns:a="http://schemas.openxmlformats.org/drawingml/2006/main">
             <a:r>
-              <a:t>Scenario is proposed, not an existing KU mandate or an observed transfer. The two-monitor request is an illustrative case, not measured demand. Required approvals remain. The small case does not remove maintenance, end-of-life or sustainability requirements from course scope. Source: https://github.com/duqins/ITS/blob/main/docs/reference/Project-September2026.pdf and the team’s local Phase 2 foundation draft.</a:t>
+              <a:t>Sources and status</a:t>
+            </a:r>
+          </a:p>
+          <a:p xmlns:a="http://schemas.openxmlformats.org/drawingml/2006/main">
+            <a:r>
+              <a:t>https://github.com/duqins/ITS/blob/main/docs/phase1/sections/06-requirements-specification.md</a:t>
+            </a:r>
+          </a:p>
+          <a:p xmlns:a="http://schemas.openxmlformats.org/drawingml/2006/main">
+            <a:r>
+              <a:t>Local Phase2 foundation proposal</a:t>
+            </a:r>
+          </a:p>
+          <a:p xmlns:a="http://schemas.openxmlformats.org/drawingml/2006/main">
+            <a:r>
+              <a:t/>
+            </a:r>
+          </a:p>
+          <a:p xmlns:a="http://schemas.openxmlformats.org/drawingml/2006/main">
+            <a:r>
+              <a:t>Illustrative scenario, not a measured request or a confirmed KU mandate. Participating units, staff and service owner still need confirmation. Steps summarise FR07,08,10,11; any additional finance/procurement approvals depend on policy. Diagram is a conceptual image generated with the built-in image tool, not a screenshot or implemented application. Source prompt is retained with the image. Suggested time35seconds.</a:t>
             </a:r>
           </a:p>
         </p:txBody>
@@ -587,7 +625,27 @@
           <a:lstStyle xmlns:a="http://schemas.openxmlformats.org/drawingml/2006/main"/>
           <a:p xmlns:a="http://schemas.openxmlformats.org/drawingml/2006/main">
             <a:r>
-              <a:t>This is the comparison plan, not a completed assessment of KU’s existing system. No claim is made that KU lacks search, approvals, reuse or reporting. Source: instructor feedback reported by Sultan and https://github.com/duqins/ITS/blob/main/docs/reference/Project-September2026.pdf page 5.</a:t>
+              <a:t>Sources and status</a:t>
+            </a:r>
+          </a:p>
+          <a:p xmlns:a="http://schemas.openxmlformats.org/drawingml/2006/main">
+            <a:r>
+              <a:t>https://github.com/duqins/ITS/blob/main/docs/phase1/sections/02-project-overview.md section2.5</a:t>
+            </a:r>
+          </a:p>
+          <a:p xmlns:a="http://schemas.openxmlformats.org/drawingml/2006/main">
+            <a:r>
+              <a:t>https://github.com/duqins/ITS/blob/main/docs/phase1/sections/06-requirements-specification.md</a:t>
+            </a:r>
+          </a:p>
+          <a:p xmlns:a="http://schemas.openxmlformats.org/drawingml/2006/main">
+            <a:r>
+              <a:t/>
+            </a:r>
+          </a:p>
+          <a:p xmlns:a="http://schemas.openxmlformats.org/drawingml/2006/main">
+            <a:r>
+              <a:t>Condensed scope summary. In scope includes authentication and nine roles, departments, assets with photos/documents, surplus marketplace, requests, search/filtering, reservations, approvals, transfer/custody, maintenance/repair, end-of-life actions, notifications/audit, classic reports, AI classification/matching/ranking/sustainable-action suggestions/assistant/generative reporting, sustainability, local setup, hosting/deployment and documentation. ERP means university enterprise resource planning; live integration is excluded and interfaces are simulated. Recording collection/delivery remains in scope, while physical logistics/hardware is excluded. Deployment is explicitly included. Suggested time35seconds.</a:t>
             </a:r>
           </a:p>
         </p:txBody>
@@ -657,7 +715,27 @@
           <a:lstStyle xmlns:a="http://schemas.openxmlformats.org/drawingml/2006/main"/>
           <a:p xmlns:a="http://schemas.openxmlformats.org/drawingml/2006/main">
             <a:r>
-              <a:t>Count active time for every participating role, including failed cases and AI review. Separate approval waiting from working minutes. State sample size and case selection; simulations do not establish campus-wide results. Count incremental avoided purchases relative to current process, not all reuse. Released time is capacity, not automatic cash reduction. Source: https://github.com/duqins/ITS/blob/main/docs/reference/Project-September2026.pdf page 7 and the Phase 2 evidence plan.</a:t>
+              <a:t>Sources and status</a:t>
+            </a:r>
+          </a:p>
+          <a:p xmlns:a="http://schemas.openxmlformats.org/drawingml/2006/main">
+            <a:r>
+              <a:t>https://github.com/duqins/ITS/blob/main/docs/reference/Project-September2026.pdf page5</a:t>
+            </a:r>
+          </a:p>
+          <a:p xmlns:a="http://schemas.openxmlformats.org/drawingml/2006/main">
+            <a:r>
+              <a:t>https://github.com/duqins/ITS/blob/main/docs/phase1/sections/06-requirements-specification.md</a:t>
+            </a:r>
+          </a:p>
+          <a:p xmlns:a="http://schemas.openxmlformats.org/drawingml/2006/main">
+            <a:r>
+              <a:t/>
+            </a:r>
+          </a:p>
+          <a:p xmlns:a="http://schemas.openxmlformats.org/drawingml/2006/main">
+            <a:r>
+              <a:t>Current KU capabilities are unconfirmed. This is a comparison plan, not a claim that KU lacks any listed feature. Core and AI entries describe intended functionality, not implemented features. Human approvals and permissions apply to all versions. Suggested time30seconds.</a:t>
             </a:r>
           </a:p>
         </p:txBody>
@@ -727,7 +805,27 @@
           <a:lstStyle xmlns:a="http://schemas.openxmlformats.org/drawingml/2006/main"/>
           <a:p xmlns:a="http://schemas.openxmlformats.org/drawingml/2006/main">
             <a:r>
-              <a:t>Prices verified 22 September 2026. Railway: https://docs.railway.com/pricing and https://docs.railway.com/pricing/understanding-your-bill . Example assumes combined application/database average RAM0.5GB x USD10/GB-month=5.00; CPU0.05vCPU x USD20/vCPU-month=1.00; volume1GB x USD0.15/GB-month=0.15; public egress1GB x USD0.05/GB=0.05. Total USD6.20 monthly. Hobby minimumUSD5 includes usage; max(5,6.20)=6.20. This is an illustrative subtotal; no measured load or bill. AI, media storage, support, tax and other costs excluded. Render free app sleeps after15idleminutes, localfilesephemeral: https://render.com/docs/free . Neonfree database0.5GB100CUh5GBpublictransfer/project/month: https://github.com/neondatabase/website/blob/main/content/faqs/free-plan-limits-and-quotas.md . No platform or subscription selected.</a:t>
+              <a:t>Sources and status</a:t>
+            </a:r>
+          </a:p>
+          <a:p xmlns:a="http://schemas.openxmlformats.org/drawingml/2006/main">
+            <a:r>
+              <a:t>https://github.com/duqins/ITS/blob/main/docs/phase1/sections/06-requirements-specification.md AI03-AI05,AI11,AI13</a:t>
+            </a:r>
+          </a:p>
+          <a:p xmlns:a="http://schemas.openxmlformats.org/drawingml/2006/main">
+            <a:r>
+              <a:t>https://github.com/duqins/ITS/blob/main/docs/phase1/sections/09-classic-vs-ai.md</a:t>
+            </a:r>
+          </a:p>
+          <a:p xmlns:a="http://schemas.openxmlformats.org/drawingml/2006/main">
+            <a:r>
+              <a:t/>
+            </a:r>
+          </a:p>
+          <a:p xmlns:a="http://schemas.openxmlformats.org/drawingml/2006/main">
+            <a:r>
+              <a:t>Proposed behaviour. Enforce eligibility and permissions before actionable matching; AI must not override compatibility, available quantity, release/receipt approvals or controlled asset state changes. Ranking quality, explanations and fallback still need a trial. Suggested time35seconds.</a:t>
             </a:r>
           </a:p>
         </p:txBody>
@@ -797,7 +895,312 @@
           <a:lstStyle xmlns:a="http://schemas.openxmlformats.org/drawingml/2006/main"/>
           <a:p xmlns:a="http://schemas.openxmlformats.org/drawingml/2006/main">
             <a:r>
-              <a:t>Six course feasibility dimensions: technical, financial, operational, schedule, data/AI, legal/ethical. Zayed also leads the team’s brand/logo discussion; no brand adopted. Deployment remains in project scope. Task split from Phase2GroupWorkPlan; source https://github.com/duqins/ITS/blob/main/docs/reference/Project-September2026.pdf page7. Timing: approximately50seconds per slide, two slides per member, total5minutes. This note records allocation and sources, not a speaking script.</a:t>
+              <a:t>Sources and status</a:t>
+            </a:r>
+          </a:p>
+          <a:p xmlns:a="http://schemas.openxmlformats.org/drawingml/2006/main">
+            <a:r>
+              <a:t>https://github.com/duqins/ITS/blob/main/docs/reference/Project-September2026.pdf page7</a:t>
+            </a:r>
+          </a:p>
+          <a:p xmlns:a="http://schemas.openxmlformats.org/drawingml/2006/main">
+            <a:r>
+              <a:t>Phase2_Progress_Update.docx page2</a:t>
+            </a:r>
+          </a:p>
+          <a:p xmlns:a="http://schemas.openxmlformats.org/drawingml/2006/main">
+            <a:r>
+              <a:t/>
+            </a:r>
+          </a:p>
+          <a:p xmlns:a="http://schemas.openxmlformats.org/drawingml/2006/main">
+            <a:r>
+              <a:t>These are hypotheses and a measurement plan, not demonstrated benefits. Include failed cases, sample size, active minutes of all roles, corrections, AI review, administration and duplicate entry. Use comparable input cases and record completion/errors. Count incremental avoided purchases relative to current process, subtract inspection/repair/transfer and added operation costs. Released staff time is capacity, not automatic cash savings. Suggested time35seconds.</a:t>
+            </a:r>
+          </a:p>
+        </p:txBody>
+      </p:sp>
+      <p:sp>
+        <p:nvSpPr>
+          <p:cNvPr id="4" name="Slide Number Placeholder 3"/>
+          <p:cNvSpPr>
+            <a:spLocks xmlns:a="http://schemas.openxmlformats.org/drawingml/2006/main" noGrp="1"/>
+          </p:cNvSpPr>
+          <p:nvPr>
+            <p:ph type="sldNum" idx="5"/>
+          </p:nvPr>
+        </p:nvSpPr>
+        <p:spPr/>
+        <p:txBody>
+          <a:bodyPr xmlns:a="http://schemas.openxmlformats.org/drawingml/2006/main"/>
+          <a:lstStyle xmlns:a="http://schemas.openxmlformats.org/drawingml/2006/main"/>
+          <a:p xmlns:a="http://schemas.openxmlformats.org/drawingml/2006/main"/>
+        </p:txBody>
+      </p:sp>
+    </p:spTree>
+  </p:cSld>
+  <p:clrMapOvr>
+    <a:masterClrMapping xmlns:a="http://schemas.openxmlformats.org/drawingml/2006/main"/>
+  </p:clrMapOvr>
+</p:notes>
+</file>
+
+<file path=ppt/notesSlides/notesSlide7.xml><?xml version="1.0" encoding="utf-8"?>
+<p:notes xmlns:p="http://schemas.openxmlformats.org/presentationml/2006/main">
+  <p:cSld>
+    <p:spTree>
+      <p:nvGrpSpPr>
+        <p:cNvPr id="1" name=""/>
+        <p:cNvGrpSpPr/>
+        <p:nvPr/>
+      </p:nvGrpSpPr>
+      <p:grpSpPr>
+        <a:xfrm xmlns:a="http://schemas.openxmlformats.org/drawingml/2006/main"/>
+      </p:grpSpPr>
+      <p:sp>
+        <p:nvSpPr>
+          <p:cNvPr id="2" name="Slide Image Placeholder 1"/>
+          <p:cNvSpPr>
+            <a:spLocks xmlns:a="http://schemas.openxmlformats.org/drawingml/2006/main" noGrp="1"/>
+          </p:cNvSpPr>
+          <p:nvPr>
+            <p:ph type="sldImg" idx="0"/>
+          </p:nvPr>
+        </p:nvSpPr>
+        <p:spPr/>
+      </p:sp>
+      <p:sp>
+        <p:nvSpPr>
+          <p:cNvPr id="3" name="Notes Placeholder 2"/>
+          <p:cNvSpPr>
+            <a:spLocks xmlns:a="http://schemas.openxmlformats.org/drawingml/2006/main" noGrp="1"/>
+          </p:cNvSpPr>
+          <p:nvPr>
+            <p:ph type="body" idx="1"/>
+          </p:nvPr>
+        </p:nvSpPr>
+        <p:spPr/>
+        <p:txBody>
+          <a:bodyPr xmlns:a="http://schemas.openxmlformats.org/drawingml/2006/main"/>
+          <a:lstStyle xmlns:a="http://schemas.openxmlformats.org/drawingml/2006/main"/>
+          <a:p xmlns:a="http://schemas.openxmlformats.org/drawingml/2006/main">
+            <a:r>
+              <a:t>Sources and status</a:t>
+            </a:r>
+          </a:p>
+          <a:p xmlns:a="http://schemas.openxmlformats.org/drawingml/2006/main">
+            <a:r>
+              <a:t>https://github.com/duqins/ITS/blob/main/docs/reference/Project-September2026.pdf page7</a:t>
+            </a:r>
+          </a:p>
+          <a:p xmlns:a="http://schemas.openxmlformats.org/drawingml/2006/main">
+            <a:r>
+              <a:t>Phase2_Group_Work_Plan.docx</a:t>
+            </a:r>
+          </a:p>
+          <a:p xmlns:a="http://schemas.openxmlformats.org/drawingml/2006/main">
+            <a:r>
+              <a:t>Phase2_Progress_Update.docx</a:t>
+            </a:r>
+          </a:p>
+          <a:p xmlns:a="http://schemas.openxmlformats.org/drawingml/2006/main">
+            <a:r>
+              <a:t/>
+            </a:r>
+          </a:p>
+          <a:p xmlns:a="http://schemas.openxmlformats.org/drawingml/2006/main">
+            <a:r>
+              <a:t>Status refers to documented planning/research, not completed feasibility validation. No actual stack experiment, interviews, current-process measurements, policy approval or implementation is claimed. Suggested time30seconds.</a:t>
+            </a:r>
+          </a:p>
+        </p:txBody>
+      </p:sp>
+      <p:sp>
+        <p:nvSpPr>
+          <p:cNvPr id="4" name="Slide Number Placeholder 3"/>
+          <p:cNvSpPr>
+            <a:spLocks xmlns:a="http://schemas.openxmlformats.org/drawingml/2006/main" noGrp="1"/>
+          </p:cNvSpPr>
+          <p:nvPr>
+            <p:ph type="sldNum" idx="5"/>
+          </p:nvPr>
+        </p:nvSpPr>
+        <p:spPr/>
+        <p:txBody>
+          <a:bodyPr xmlns:a="http://schemas.openxmlformats.org/drawingml/2006/main"/>
+          <a:lstStyle xmlns:a="http://schemas.openxmlformats.org/drawingml/2006/main"/>
+          <a:p xmlns:a="http://schemas.openxmlformats.org/drawingml/2006/main"/>
+        </p:txBody>
+      </p:sp>
+    </p:spTree>
+  </p:cSld>
+  <p:clrMapOvr>
+    <a:masterClrMapping xmlns:a="http://schemas.openxmlformats.org/drawingml/2006/main"/>
+  </p:clrMapOvr>
+</p:notes>
+</file>
+
+<file path=ppt/notesSlides/notesSlide8.xml><?xml version="1.0" encoding="utf-8"?>
+<p:notes xmlns:p="http://schemas.openxmlformats.org/presentationml/2006/main">
+  <p:cSld>
+    <p:spTree>
+      <p:nvGrpSpPr>
+        <p:cNvPr id="1" name=""/>
+        <p:cNvGrpSpPr/>
+        <p:nvPr/>
+      </p:nvGrpSpPr>
+      <p:grpSpPr>
+        <a:xfrm xmlns:a="http://schemas.openxmlformats.org/drawingml/2006/main"/>
+      </p:grpSpPr>
+      <p:sp>
+        <p:nvSpPr>
+          <p:cNvPr id="2" name="Slide Image Placeholder 1"/>
+          <p:cNvSpPr>
+            <a:spLocks xmlns:a="http://schemas.openxmlformats.org/drawingml/2006/main" noGrp="1"/>
+          </p:cNvSpPr>
+          <p:nvPr>
+            <p:ph type="sldImg" idx="0"/>
+          </p:nvPr>
+        </p:nvSpPr>
+        <p:spPr/>
+      </p:sp>
+      <p:sp>
+        <p:nvSpPr>
+          <p:cNvPr id="3" name="Notes Placeholder 2"/>
+          <p:cNvSpPr>
+            <a:spLocks xmlns:a="http://schemas.openxmlformats.org/drawingml/2006/main" noGrp="1"/>
+          </p:cNvSpPr>
+          <p:nvPr>
+            <p:ph type="body" idx="1"/>
+          </p:nvPr>
+        </p:nvSpPr>
+        <p:spPr/>
+        <p:txBody>
+          <a:bodyPr xmlns:a="http://schemas.openxmlformats.org/drawingml/2006/main"/>
+          <a:lstStyle xmlns:a="http://schemas.openxmlformats.org/drawingml/2006/main"/>
+          <a:p xmlns:a="http://schemas.openxmlformats.org/drawingml/2006/main">
+            <a:r>
+              <a:t>Sources and status</a:t>
+            </a:r>
+          </a:p>
+          <a:p xmlns:a="http://schemas.openxmlformats.org/drawingml/2006/main">
+            <a:r>
+              <a:t>https://docs.railway.com/pricing</a:t>
+            </a:r>
+          </a:p>
+          <a:p xmlns:a="http://schemas.openxmlformats.org/drawingml/2006/main">
+            <a:r>
+              <a:t>https://docs.railway.com/pricing/understanding-your-bill</a:t>
+            </a:r>
+          </a:p>
+          <a:p xmlns:a="http://schemas.openxmlformats.org/drawingml/2006/main">
+            <a:r>
+              <a:t>https://render.com/docs/free</a:t>
+            </a:r>
+          </a:p>
+          <a:p xmlns:a="http://schemas.openxmlformats.org/drawingml/2006/main">
+            <a:r>
+              <a:t>https://github.com/neondatabase/website/blob/main/content/faqs/free-plan-limits-and-quotas.md</a:t>
+            </a:r>
+          </a:p>
+          <a:p xmlns:a="http://schemas.openxmlformats.org/drawingml/2006/main">
+            <a:r>
+              <a:t/>
+            </a:r>
+          </a:p>
+          <a:p xmlns:a="http://schemas.openxmlformats.org/drawingml/2006/main">
+            <a:r>
+              <a:t>Prices checked22September2026. Monthly average combined app/database resource assumptions: .5GB RAMx$10=$5; .05vCPUx$20=$1;1GBvolume x$.15=$.15;1GBpublicegress x$.05=$.05. Total$6.20. Hobby minimum$5 includes usage, so billmax(5,6.20)=6.20. Assumptions are unmeasured and not KU demand. Illustrative partial subtotal excludes AI, media storage, support, taxes and other unpriced costs. Renderfree sleeps15idleminutes and cannot persist appfiles; Neonfree database is separate. Chart data are literal calculations, not an external workbook or measured bill. Suggested time45seconds.</a:t>
+            </a:r>
+          </a:p>
+        </p:txBody>
+      </p:sp>
+      <p:sp>
+        <p:nvSpPr>
+          <p:cNvPr id="4" name="Slide Number Placeholder 3"/>
+          <p:cNvSpPr>
+            <a:spLocks xmlns:a="http://schemas.openxmlformats.org/drawingml/2006/main" noGrp="1"/>
+          </p:cNvSpPr>
+          <p:nvPr>
+            <p:ph type="sldNum" idx="5"/>
+          </p:nvPr>
+        </p:nvSpPr>
+        <p:spPr/>
+        <p:txBody>
+          <a:bodyPr xmlns:a="http://schemas.openxmlformats.org/drawingml/2006/main"/>
+          <a:lstStyle xmlns:a="http://schemas.openxmlformats.org/drawingml/2006/main"/>
+          <a:p xmlns:a="http://schemas.openxmlformats.org/drawingml/2006/main"/>
+        </p:txBody>
+      </p:sp>
+    </p:spTree>
+  </p:cSld>
+  <p:clrMapOvr>
+    <a:masterClrMapping xmlns:a="http://schemas.openxmlformats.org/drawingml/2006/main"/>
+  </p:clrMapOvr>
+</p:notes>
+</file>
+
+<file path=ppt/notesSlides/notesSlide9.xml><?xml version="1.0" encoding="utf-8"?>
+<p:notes xmlns:p="http://schemas.openxmlformats.org/presentationml/2006/main">
+  <p:cSld>
+    <p:spTree>
+      <p:nvGrpSpPr>
+        <p:cNvPr id="1" name=""/>
+        <p:cNvGrpSpPr/>
+        <p:nvPr/>
+      </p:nvGrpSpPr>
+      <p:grpSpPr>
+        <a:xfrm xmlns:a="http://schemas.openxmlformats.org/drawingml/2006/main"/>
+      </p:grpSpPr>
+      <p:sp>
+        <p:nvSpPr>
+          <p:cNvPr id="2" name="Slide Image Placeholder 1"/>
+          <p:cNvSpPr>
+            <a:spLocks xmlns:a="http://schemas.openxmlformats.org/drawingml/2006/main" noGrp="1"/>
+          </p:cNvSpPr>
+          <p:nvPr>
+            <p:ph type="sldImg" idx="0"/>
+          </p:nvPr>
+        </p:nvSpPr>
+        <p:spPr/>
+      </p:sp>
+      <p:sp>
+        <p:nvSpPr>
+          <p:cNvPr id="3" name="Notes Placeholder 2"/>
+          <p:cNvSpPr>
+            <a:spLocks xmlns:a="http://schemas.openxmlformats.org/drawingml/2006/main" noGrp="1"/>
+          </p:cNvSpPr>
+          <p:nvPr>
+            <p:ph type="body" idx="1"/>
+          </p:nvPr>
+        </p:nvSpPr>
+        <p:spPr/>
+        <p:txBody>
+          <a:bodyPr xmlns:a="http://schemas.openxmlformats.org/drawingml/2006/main"/>
+          <a:lstStyle xmlns:a="http://schemas.openxmlformats.org/drawingml/2006/main"/>
+          <a:p xmlns:a="http://schemas.openxmlformats.org/drawingml/2006/main">
+            <a:r>
+              <a:t>Sources and status</a:t>
+            </a:r>
+          </a:p>
+          <a:p xmlns:a="http://schemas.openxmlformats.org/drawingml/2006/main">
+            <a:r>
+              <a:t>https://github.com/duqins/ITS/blob/main/docs/reference/Project-September2026.pdf page7</a:t>
+            </a:r>
+          </a:p>
+          <a:p xmlns:a="http://schemas.openxmlformats.org/drawingml/2006/main">
+            <a:r>
+              <a:t>Phase2_Group_Work_Plan.docx</a:t>
+            </a:r>
+          </a:p>
+          <a:p xmlns:a="http://schemas.openxmlformats.org/drawingml/2006/main">
+            <a:r>
+              <a:t/>
+            </a:r>
+          </a:p>
+          <a:p xmlns:a="http://schemas.openxmlformats.org/drawingml/2006/main">
+            <a:r>
+              <a:t>Three slides each. Sultan1,8,9 total100seconds; Zayed2,3,4 total100seconds; Ghith5,6,7 total100seconds. Suggested durations allow5minutes for the team. This is a timing allocation, not a speaking guide. Brand and logo remain unconfirmed. Final report integrates six feasibility dimensions. Deployment remains in semester scope. Suggested time30seconds.</a:t>
             </a:r>
           </a:p>
         </p:txBody>
@@ -865,7 +1268,7 @@
   </p:cSld>
   <p:clrMap bg1="lt1" tx1="dk1" bg2="lt2" tx2="dk2" accent1="accent1" accent2="accent2" accent3="accent3" accent4="accent4" accent5="accent5" accent6="accent6" hlink="hlink" folHlink="folHlink"/>
   <p:sldLayoutIdLst>
-    <p:sldLayoutId xmlns:r="http://schemas.openxmlformats.org/officeDocument/2006/relationships" id="2147483649" r:id="Rf731f68296f14beb"/>
+    <p:sldLayoutId xmlns:r="http://schemas.openxmlformats.org/officeDocument/2006/relationships" id="2147483649" r:id="R4fd25873c9ea448e"/>
   </p:sldLayoutIdLst>
   <p:txStyles>
     <p:titleStyle>
@@ -1392,6 +1795,202 @@
 </a:theme>
 </file>
 
+<file path=ppt/slides/charts/chart1.xml><?xml version="1.0" encoding="utf-8"?>
+<c:chartSpace xmlns:c="http://schemas.openxmlformats.org/drawingml/2006/chart" xmlns:r="http://schemas.openxmlformats.org/officeDocument/2006/relationships">
+  <c:lang val="en-US"/>
+  <c:chart>
+    <c:plotArea>
+      <c:barChart>
+        <c:barDir val="bar"/>
+        <c:grouping val="clustered"/>
+        <c:varyColors val="0"/>
+        <c:ser>
+          <c:idx val="0"/>
+          <c:order val="0"/>
+          <c:tx>
+            <c:v>USD per month</c:v>
+          </c:tx>
+          <c:spPr>
+            <a:solidFill xmlns:a="http://schemas.openxmlformats.org/drawingml/2006/main">
+              <a:srgbClr val="26746D"/>
+            </a:solidFill>
+          </c:spPr>
+          <c:cat>
+            <c:strRef>
+              <c:f>'Chart Data'!$A$2:$A$5</c:f>
+              <c:strCache>
+                <c:ptCount val="4"/>
+                <c:pt idx="0">
+                  <c:v>Data transfer</c:v>
+                </c:pt>
+                <c:pt idx="1">
+                  <c:v>Stored data</c:v>
+                </c:pt>
+                <c:pt idx="2">
+                  <c:v>CPU</c:v>
+                </c:pt>
+                <c:pt idx="3">
+                  <c:v>Memory</c:v>
+                </c:pt>
+              </c:strCache>
+            </c:strRef>
+          </c:cat>
+          <c:val>
+            <c:numRef>
+              <c:f>'Chart Data'!$B$2:$B$5</c:f>
+              <c:numCache>
+                <c:formatCode>0.00</c:formatCode>
+                <c:ptCount val="4"/>
+                <c:pt idx="0">
+                  <c:v>0.05</c:v>
+                </c:pt>
+                <c:pt idx="1">
+                  <c:v>0.15</c:v>
+                </c:pt>
+                <c:pt idx="2">
+                  <c:v>1</c:v>
+                </c:pt>
+                <c:pt idx="3">
+                  <c:v>5</c:v>
+                </c:pt>
+              </c:numCache>
+            </c:numRef>
+          </c:val>
+        </c:ser>
+        <c:dLbls>
+          <c:txPr>
+            <a:bodyPr xmlns:a="http://schemas.openxmlformats.org/drawingml/2006/main" anchorCtr="1"/>
+            <a:lstStyle xmlns:a="http://schemas.openxmlformats.org/drawingml/2006/main"/>
+            <a:p xmlns:a="http://schemas.openxmlformats.org/drawingml/2006/main">
+              <a:pPr>
+                <a:defRPr sz="1800" b="1">
+                  <a:solidFill>
+                    <a:srgbClr val="17343C"/>
+                  </a:solidFill>
+                  <a:latin typeface="Arial"/>
+                  <a:ea typeface="Arial"/>
+                  <a:cs typeface="Arial"/>
+                </a:defRPr>
+              </a:pPr>
+            </a:p>
+          </c:txPr>
+          <c:dLblPos val="outEnd"/>
+          <c:showLegendKey val="0"/>
+          <c:showVal val="1"/>
+          <c:showCatName val="0"/>
+          <c:showSerName val="0"/>
+          <c:showPercent val="0"/>
+          <c:showBubbleSize val="0"/>
+          <c:showLeaderLines val="0"/>
+        </c:dLbls>
+        <c:gapWidth val="70"/>
+        <c:axId val="48650112"/>
+        <c:axId val="48672768"/>
+      </c:barChart>
+      <c:catAx>
+        <c:axId val="48650112"/>
+        <c:scaling>
+          <c:orientation val="minMax"/>
+        </c:scaling>
+        <c:delete val="0"/>
+        <c:axPos val="l"/>
+        <c:numFmt formatCode="General"/>
+        <c:majorTickMark val="none"/>
+        <c:minorTickMark val="none"/>
+        <c:spPr>
+          <a:ln xmlns:a="http://schemas.openxmlformats.org/drawingml/2006/main" w="9525">
+            <a:solidFill>
+              <a:srgbClr val="D4D4D4"/>
+            </a:solidFill>
+            <a:prstDash val="solid"/>
+          </a:ln>
+        </c:spPr>
+        <c:txPr>
+          <a:bodyPr xmlns:a="http://schemas.openxmlformats.org/drawingml/2006/main" anchorCtr="1"/>
+          <a:lstStyle xmlns:a="http://schemas.openxmlformats.org/drawingml/2006/main"/>
+          <a:p xmlns:a="http://schemas.openxmlformats.org/drawingml/2006/main">
+            <a:pPr>
+              <a:defRPr sz="1800">
+                <a:solidFill>
+                  <a:srgbClr val="17343C"/>
+                </a:solidFill>
+                <a:latin typeface="Arial"/>
+                <a:ea typeface="Arial"/>
+                <a:cs typeface="Arial"/>
+              </a:defRPr>
+            </a:pPr>
+          </a:p>
+        </c:txPr>
+        <c:crossAx val="48672768"/>
+      </c:catAx>
+      <c:valAx>
+        <c:axId val="48672768"/>
+        <c:scaling>
+          <c:orientation val="minMax"/>
+          <c:max val="6"/>
+          <c:min val="0"/>
+        </c:scaling>
+        <c:delete val="0"/>
+        <c:axPos val="b"/>
+        <c:numFmt formatCode="0"/>
+        <c:majorTickMark val="none"/>
+        <c:minorTickMark val="none"/>
+        <c:spPr>
+          <a:ln xmlns:a="http://schemas.openxmlformats.org/drawingml/2006/main" w="0">
+            <a:solidFill>
+              <a:srgbClr val="FAFAF7"/>
+            </a:solidFill>
+          </a:ln>
+        </c:spPr>
+        <c:txPr>
+          <a:bodyPr xmlns:a="http://schemas.openxmlformats.org/drawingml/2006/main" anchorCtr="1"/>
+          <a:lstStyle xmlns:a="http://schemas.openxmlformats.org/drawingml/2006/main"/>
+          <a:p xmlns:a="http://schemas.openxmlformats.org/drawingml/2006/main">
+            <a:pPr>
+              <a:defRPr sz="1800">
+                <a:solidFill>
+                  <a:srgbClr val="17343C"/>
+                </a:solidFill>
+                <a:latin typeface="Arial"/>
+                <a:ea typeface="Arial"/>
+                <a:cs typeface="Arial"/>
+              </a:defRPr>
+            </a:pPr>
+          </a:p>
+        </c:txPr>
+        <c:crossAx val="48650112"/>
+        <c:crossBetween val="between"/>
+        <c:majorUnit val="1"/>
+      </c:valAx>
+      <c:spPr>
+        <a:solidFill xmlns:a="http://schemas.openxmlformats.org/drawingml/2006/main">
+          <a:srgbClr val="FAFAF7"/>
+        </a:solidFill>
+        <a:ln xmlns:a="http://schemas.openxmlformats.org/drawingml/2006/main" w="0">
+          <a:solidFill>
+            <a:srgbClr val="FAFAF7"/>
+          </a:solidFill>
+        </a:ln>
+      </c:spPr>
+    </c:plotArea>
+    <c:plotVisOnly val="1"/>
+  </c:chart>
+  <c:spPr>
+    <a:solidFill xmlns:a="http://schemas.openxmlformats.org/drawingml/2006/main">
+      <a:srgbClr val="FAFAF7"/>
+    </a:solidFill>
+    <a:ln xmlns:a="http://schemas.openxmlformats.org/drawingml/2006/main" w="0">
+      <a:solidFill>
+        <a:srgbClr val="FAFAF7"/>
+      </a:solidFill>
+    </a:ln>
+  </c:spPr>
+  <c:externalData r:id="rIdChartSnapshot1">
+    <c:autoUpdate val="0"/>
+  </c:externalData>
+</c:chartSpace>
+</file>
+
 <file path=ppt/slides/slide1.xml><?xml version="1.0" encoding="utf-8"?>
 <p:sld xmlns:p="http://schemas.openxmlformats.org/presentationml/2006/main">
   <p:cSld>
@@ -1416,7 +2015,7 @@
           <p:cNvPr id="9" name="presenter">
             <a:extLst xmlns:a="http://schemas.openxmlformats.org/drawingml/2006/main">
               <a:ext uri="{FF2B5EF4-FFF2-40B4-BE49-F238E27FC236}">
-                <a16:creationId xmlns:a16="http://schemas.microsoft.com/office/drawing/2014/main" id="{BCCE71A8-EC28-4845-8528-DAF7C009E094}"/>
+                <a16:creationId xmlns:a16="http://schemas.microsoft.com/office/drawing/2014/main" id="{CC8ED219-50CD-4CE1-BC5A-FA33DBB21BA6}"/>
               </a:ext>
             </a:extLst>
           </p:cNvPr>
@@ -1427,8 +2026,8 @@
         </p:nvSpPr>
         <p:spPr>
           <a:xfrm xmlns:a="http://schemas.openxmlformats.org/drawingml/2006/main">
-            <a:off x="9906000" y="6400800"/>
-            <a:ext cx="1600200" cy="247650"/>
+            <a:off x="10144125" y="6429375"/>
+            <a:ext cx="1400175" cy="238125"/>
           </a:xfrm>
           <a:prstGeom xmlns:a="http://schemas.openxmlformats.org/drawingml/2006/main" prst="rect">
             <a:avLst/>
@@ -1445,7 +2044,7 @@
           <a:lstStyle xmlns:a="http://schemas.openxmlformats.org/drawingml/2006/main"/>
           <a:p xmlns:a="http://schemas.openxmlformats.org/drawingml/2006/main">
             <a:pPr algn="l">
-              <a:defRPr sz="1425" b="0">
+              <a:defRPr sz="1350" b="0">
                 <a:solidFill>
                   <a:srgbClr val="526264"/>
                 </a:solidFill>
@@ -1455,7 +2054,7 @@
               </a:defRPr>
             </a:pPr>
             <a:r>
-              <a:rPr sz="1425" b="0">
+              <a:rPr sz="1350" b="0">
                 <a:solidFill>
                   <a:srgbClr val="526264"/>
                 </a:solidFill>
@@ -1473,7 +2072,7 @@
           <p:cNvPr id="2" name="context">
             <a:extLst xmlns:a="http://schemas.openxmlformats.org/drawingml/2006/main">
               <a:ext uri="{FF2B5EF4-FFF2-40B4-BE49-F238E27FC236}">
-                <a16:creationId xmlns:a16="http://schemas.microsoft.com/office/drawing/2014/main" id="{F4E282D3-1080-43AF-A8D7-4EC00CFEF500}"/>
+                <a16:creationId xmlns:a16="http://schemas.microsoft.com/office/drawing/2014/main" id="{BC276E7B-C7BE-4922-B5D0-2B6E5FDCDCC8}"/>
               </a:ext>
             </a:extLst>
           </p:cNvPr>
@@ -1484,8 +2083,8 @@
         </p:nvSpPr>
         <p:spPr>
           <a:xfrm xmlns:a="http://schemas.openxmlformats.org/drawingml/2006/main">
-            <a:off x="685800" y="542925"/>
-            <a:ext cx="6762750" cy="476250"/>
+            <a:off x="647700" y="485775"/>
+            <a:ext cx="6667500" cy="457200"/>
           </a:xfrm>
           <a:prstGeom xmlns:a="http://schemas.openxmlformats.org/drawingml/2006/main" prst="rect">
             <a:avLst/>
@@ -1502,7 +2101,7 @@
           <a:lstStyle xmlns:a="http://schemas.openxmlformats.org/drawingml/2006/main"/>
           <a:p xmlns:a="http://schemas.openxmlformats.org/drawingml/2006/main">
             <a:pPr algn="l">
-              <a:defRPr sz="2100" b="0">
+              <a:defRPr sz="2175" b="0">
                 <a:solidFill>
                   <a:srgbClr val="26746D"/>
                 </a:solidFill>
@@ -1512,7 +2111,7 @@
               </a:defRPr>
             </a:pPr>
             <a:r>
-              <a:rPr sz="2100" b="0">
+              <a:rPr sz="2175" b="0">
                 <a:solidFill>
                   <a:srgbClr val="26746D"/>
                 </a:solidFill>
@@ -1527,10 +2126,10 @@
       </p:sp>
       <p:sp>
         <p:nvSpPr>
-          <p:cNvPr id="3" name="cover">
+          <p:cNvPr id="3" name="cover-title">
             <a:extLst xmlns:a="http://schemas.openxmlformats.org/drawingml/2006/main">
               <a:ext uri="{FF2B5EF4-FFF2-40B4-BE49-F238E27FC236}">
-                <a16:creationId xmlns:a16="http://schemas.microsoft.com/office/drawing/2014/main" id="{28063904-4E55-476D-B77C-23F577EB79F0}"/>
+                <a16:creationId xmlns:a16="http://schemas.microsoft.com/office/drawing/2014/main" id="{EBAB5542-C0C7-49C1-A1C1-8EF18A53DAD6}"/>
               </a:ext>
             </a:extLst>
           </p:cNvPr>
@@ -1541,8 +2140,8 @@
         </p:nvSpPr>
         <p:spPr>
           <a:xfrm xmlns:a="http://schemas.openxmlformats.org/drawingml/2006/main">
-            <a:off x="685800" y="1323975"/>
-            <a:ext cx="6286500" cy="1543050"/>
+            <a:off x="647700" y="1390650"/>
+            <a:ext cx="6410325" cy="1514475"/>
           </a:xfrm>
           <a:prstGeom xmlns:a="http://schemas.openxmlformats.org/drawingml/2006/main" prst="rect">
             <a:avLst/>
@@ -1607,10 +2206,10 @@
       </p:sp>
       <p:sp>
         <p:nvSpPr>
-          <p:cNvPr id="4" name="done">
+          <p:cNvPr id="4" name="completed">
             <a:extLst xmlns:a="http://schemas.openxmlformats.org/drawingml/2006/main">
               <a:ext uri="{FF2B5EF4-FFF2-40B4-BE49-F238E27FC236}">
-                <a16:creationId xmlns:a16="http://schemas.microsoft.com/office/drawing/2014/main" id="{E00D9930-F196-418B-A761-15061DB6047B}"/>
+                <a16:creationId xmlns:a16="http://schemas.microsoft.com/office/drawing/2014/main" id="{FB7339CB-4405-4FAD-96A0-FF0679A35119}"/>
               </a:ext>
             </a:extLst>
           </p:cNvPr>
@@ -1621,8 +2220,8 @@
         </p:nvSpPr>
         <p:spPr>
           <a:xfrm xmlns:a="http://schemas.openxmlformats.org/drawingml/2006/main">
-            <a:off x="685800" y="3238500"/>
-            <a:ext cx="6191250" cy="1428750"/>
+            <a:off x="647700" y="3371850"/>
+            <a:ext cx="6134100" cy="1419225"/>
           </a:xfrm>
           <a:prstGeom xmlns:a="http://schemas.openxmlformats.org/drawingml/2006/main" prst="rect">
             <a:avLst/>
@@ -1639,7 +2238,7 @@
           <a:lstStyle xmlns:a="http://schemas.openxmlformats.org/drawingml/2006/main"/>
           <a:p xmlns:a="http://schemas.openxmlformats.org/drawingml/2006/main">
             <a:pPr algn="l">
-              <a:defRPr sz="2250" b="0">
+              <a:defRPr sz="2325" b="0">
                 <a:solidFill>
                   <a:srgbClr val="17343C"/>
                 </a:solidFill>
@@ -1649,7 +2248,7 @@
               </a:defRPr>
             </a:pPr>
             <a:r>
-              <a:rPr sz="2250" b="0">
+              <a:rPr sz="2325" b="0">
                 <a:solidFill>
                   <a:srgbClr val="17343C"/>
                 </a:solidFill>
@@ -1657,12 +2256,12 @@
                 <a:ea typeface="Arial"/>
                 <a:cs typeface="Arial"/>
               </a:rPr>
-              <a:t>Requirements reviewed</a:t>
+              <a:t>Scope reviewed</a:t>
             </a:r>
           </a:p>
           <a:p xmlns:a="http://schemas.openxmlformats.org/drawingml/2006/main">
             <a:pPr algn="l">
-              <a:defRPr sz="2250" b="0">
+              <a:defRPr sz="2325" b="0">
                 <a:solidFill>
                   <a:srgbClr val="17343C"/>
                 </a:solidFill>
@@ -1672,7 +2271,7 @@
               </a:defRPr>
             </a:pPr>
             <a:r>
-              <a:rPr sz="2250" b="0">
+              <a:rPr sz="2325" b="0">
                 <a:solidFill>
                   <a:srgbClr val="17343C"/>
                 </a:solidFill>
@@ -1685,7 +2284,7 @@
           </a:p>
           <a:p xmlns:a="http://schemas.openxmlformats.org/drawingml/2006/main">
             <a:pPr algn="l">
-              <a:defRPr sz="2250" b="0">
+              <a:defRPr sz="2325" b="0">
                 <a:solidFill>
                   <a:srgbClr val="17343C"/>
                 </a:solidFill>
@@ -1695,7 +2294,7 @@
               </a:defRPr>
             </a:pPr>
             <a:r>
-              <a:rPr sz="2250" b="0">
+              <a:rPr sz="2325" b="0">
                 <a:solidFill>
                   <a:srgbClr val="17343C"/>
                 </a:solidFill>
@@ -1703,7 +2302,7 @@
                 <a:ea typeface="Arial"/>
                 <a:cs typeface="Arial"/>
               </a:rPr>
-              <a:t>Cost research started</a:t>
+              <a:t>Hosting costs researched</a:t>
             </a:r>
           </a:p>
         </p:txBody>
@@ -1717,13 +2316,13 @@
           <p:nvPr/>
         </p:nvPicPr>
         <p:blipFill>
-          <a:blip xmlns:r="http://schemas.openxmlformats.org/officeDocument/2006/relationships" xmlns:a="http://schemas.openxmlformats.org/drawingml/2006/main" r:embed="R63b8999b11bd493b"/>
+          <a:blip xmlns:r="http://schemas.openxmlformats.org/officeDocument/2006/relationships" xmlns:a="http://schemas.openxmlformats.org/drawingml/2006/main" r:embed="R636a6d6f7e724723"/>
           <a:stretch xmlns:a="http://schemas.openxmlformats.org/drawingml/2006/main"/>
         </p:blipFill>
         <p:spPr>
           <a:xfrm xmlns:a="http://schemas.openxmlformats.org/drawingml/2006/main">
-            <a:off x="7277100" y="1495425"/>
-            <a:ext cx="4229100" cy="3171825"/>
+            <a:off x="7429500" y="1438275"/>
+            <a:ext cx="4114800" cy="3086100"/>
           </a:xfrm>
           <a:prstGeom xmlns:a="http://schemas.openxmlformats.org/drawingml/2006/main" prst="rect">
             <a:avLst/>
@@ -1732,10 +2331,10 @@
       </p:pic>
       <p:sp>
         <p:nvSpPr>
-          <p:cNvPr id="6" name="photo-label">
+          <p:cNvPr id="6" name="photo-caption">
             <a:extLst xmlns:a="http://schemas.openxmlformats.org/drawingml/2006/main">
               <a:ext uri="{FF2B5EF4-FFF2-40B4-BE49-F238E27FC236}">
-                <a16:creationId xmlns:a16="http://schemas.microsoft.com/office/drawing/2014/main" id="{752FBE36-9325-4BC9-96B5-2707DD2B81E0}"/>
+                <a16:creationId xmlns:a16="http://schemas.microsoft.com/office/drawing/2014/main" id="{CF2F98F6-02DF-4DC8-9BCF-8DBEA910FF2F}"/>
               </a:ext>
             </a:extLst>
           </p:cNvPr>
@@ -1746,8 +2345,8 @@
         </p:nvSpPr>
         <p:spPr>
           <a:xfrm xmlns:a="http://schemas.openxmlformats.org/drawingml/2006/main">
-            <a:off x="7277100" y="4781550"/>
-            <a:ext cx="4229100" cy="285750"/>
+            <a:off x="7429500" y="4619625"/>
+            <a:ext cx="4114800" cy="304800"/>
           </a:xfrm>
           <a:prstGeom xmlns:a="http://schemas.openxmlformats.org/drawingml/2006/main" prst="rect">
             <a:avLst/>
@@ -1789,10 +2388,10 @@
       </p:sp>
       <p:sp>
         <p:nvSpPr>
-          <p:cNvPr id="7" name="timing">
+          <p:cNvPr id="7" name="status">
             <a:extLst xmlns:a="http://schemas.openxmlformats.org/drawingml/2006/main">
               <a:ext uri="{FF2B5EF4-FFF2-40B4-BE49-F238E27FC236}">
-                <a16:creationId xmlns:a16="http://schemas.microsoft.com/office/drawing/2014/main" id="{BAF99739-F881-49CE-A401-C4AE686C470E}"/>
+                <a16:creationId xmlns:a16="http://schemas.microsoft.com/office/drawing/2014/main" id="{133792B0-135F-4487-BD30-45F0C81481D4}"/>
               </a:ext>
             </a:extLst>
           </p:cNvPr>
@@ -1803,8 +2402,8 @@
         </p:nvSpPr>
         <p:spPr>
           <a:xfrm xmlns:a="http://schemas.openxmlformats.org/drawingml/2006/main">
-            <a:off x="685800" y="5448300"/>
-            <a:ext cx="10820400" cy="552450"/>
+            <a:off x="647700" y="5295900"/>
+            <a:ext cx="10896600" cy="781050"/>
           </a:xfrm>
           <a:prstGeom xmlns:a="http://schemas.openxmlformats.org/drawingml/2006/main" prst="rect">
             <a:avLst/>
@@ -1821,7 +2420,7 @@
           <a:lstStyle xmlns:a="http://schemas.openxmlformats.org/drawingml/2006/main"/>
           <a:p xmlns:a="http://schemas.openxmlformats.org/drawingml/2006/main">
             <a:pPr algn="l">
-              <a:defRPr sz="2100" b="1">
+              <a:defRPr sz="2250" b="1">
                 <a:solidFill>
                   <a:srgbClr val="17343C"/>
                 </a:solidFill>
@@ -1831,7 +2430,7 @@
               </a:defRPr>
             </a:pPr>
             <a:r>
-              <a:rPr sz="2100" b="1">
+              <a:rPr sz="2250" b="1">
                 <a:solidFill>
                   <a:srgbClr val="17343C"/>
                 </a:solidFill>
@@ -1839,7 +2438,30 @@
                 <a:ea typeface="Arial"/>
                 <a:cs typeface="Arial"/>
               </a:rPr>
-              <a:t>Class discussion this week. Final submission next week.</a:t>
+              <a:t>This week: progress discussion</a:t>
+            </a:r>
+          </a:p>
+          <a:p xmlns:a="http://schemas.openxmlformats.org/drawingml/2006/main">
+            <a:pPr algn="l">
+              <a:defRPr sz="2250" b="1">
+                <a:solidFill>
+                  <a:srgbClr val="17343C"/>
+                </a:solidFill>
+                <a:latin typeface="Arial"/>
+                <a:ea typeface="Arial"/>
+                <a:cs typeface="Arial"/>
+              </a:defRPr>
+            </a:pPr>
+            <a:r>
+              <a:rPr sz="2250" b="1">
+                <a:solidFill>
+                  <a:srgbClr val="17343C"/>
+                </a:solidFill>
+                <a:latin typeface="Arial"/>
+                <a:ea typeface="Arial"/>
+                <a:cs typeface="Arial"/>
+              </a:rPr>
+              <a:t>Next week: final feasibility submission</a:t>
             </a:r>
           </a:p>
         </p:txBody>
@@ -1849,7 +2471,7 @@
           <p:cNvPr id="8" name="team">
             <a:extLst xmlns:a="http://schemas.openxmlformats.org/drawingml/2006/main">
               <a:ext uri="{FF2B5EF4-FFF2-40B4-BE49-F238E27FC236}">
-                <a16:creationId xmlns:a16="http://schemas.microsoft.com/office/drawing/2014/main" id="{60962B89-BADE-4BFC-A9D1-A6CB6C59871F}"/>
+                <a16:creationId xmlns:a16="http://schemas.microsoft.com/office/drawing/2014/main" id="{05102E60-9AF9-47E1-B327-43169D958B5E}"/>
               </a:ext>
             </a:extLst>
           </p:cNvPr>
@@ -1860,8 +2482,8 @@
         </p:nvSpPr>
         <p:spPr>
           <a:xfrm xmlns:a="http://schemas.openxmlformats.org/drawingml/2006/main">
-            <a:off x="685800" y="6115050"/>
-            <a:ext cx="9191625" cy="333375"/>
+            <a:off x="647700" y="6267450"/>
+            <a:ext cx="9172575" cy="323850"/>
           </a:xfrm>
           <a:prstGeom xmlns:a="http://schemas.openxmlformats.org/drawingml/2006/main" prst="rect">
             <a:avLst/>
@@ -1878,7 +2500,7 @@
           <a:lstStyle xmlns:a="http://schemas.openxmlformats.org/drawingml/2006/main"/>
           <a:p xmlns:a="http://schemas.openxmlformats.org/drawingml/2006/main">
             <a:pPr algn="l">
-              <a:defRPr sz="1575" b="0">
+              <a:defRPr sz="1500" b="0">
                 <a:solidFill>
                   <a:srgbClr val="526264"/>
                 </a:solidFill>
@@ -1888,7 +2510,7 @@
               </a:defRPr>
             </a:pPr>
             <a:r>
-              <a:rPr sz="1575" b="0">
+              <a:rPr sz="1500" b="0">
                 <a:solidFill>
                   <a:srgbClr val="526264"/>
                 </a:solidFill>
@@ -1896,7 +2518,7 @@
                 <a:ea typeface="Arial"/>
                 <a:cs typeface="Arial"/>
               </a:rPr>
-              <a:t>Group 4   Sultan Almheiri, Zayed Alfadli, Ghith Alhinaai   22 September 2026</a:t>
+              <a:t>Group 4   Sultan Almheiri, Zayed Alfadli and Ghith Alhinaai   22 September 2026</a:t>
             </a:r>
           </a:p>
         </p:txBody>
@@ -1904,7 +2526,7 @@
     </p:spTree>
     <p:extLst>
       <p:ext uri="{BB962C8B-B14F-4D97-AF65-F5344CB8AC3E}">
-        <p14:creationId xmlns:p14="http://schemas.microsoft.com/office/powerpoint/2010/main" val="1109475583"/>
+        <p14:creationId xmlns:p14="http://schemas.microsoft.com/office/powerpoint/2010/main" val="1216407544"/>
       </p:ext>
     </p:extLst>
   </p:cSld>
@@ -1932,10 +2554,10 @@
       </p:grpSpPr>
       <p:sp>
         <p:nvSpPr>
-          <p:cNvPr id="10" name="title">
+          <p:cNvPr id="13" name="title">
             <a:extLst xmlns:a="http://schemas.openxmlformats.org/drawingml/2006/main">
               <a:ext uri="{FF2B5EF4-FFF2-40B4-BE49-F238E27FC236}">
-                <a16:creationId xmlns:a16="http://schemas.microsoft.com/office/drawing/2014/main" id="{C2C374BC-CFA0-4058-9477-D00A078D7AE3}"/>
+                <a16:creationId xmlns:a16="http://schemas.microsoft.com/office/drawing/2014/main" id="{C1574E45-A86F-41E6-81FC-06B3426E1903}"/>
               </a:ext>
             </a:extLst>
           </p:cNvPr>
@@ -1946,8 +2568,8 @@
         </p:nvSpPr>
         <p:spPr>
           <a:xfrm xmlns:a="http://schemas.openxmlformats.org/drawingml/2006/main">
-            <a:off x="685800" y="514350"/>
-            <a:ext cx="10820400" cy="685800"/>
+            <a:off x="647700" y="457200"/>
+            <a:ext cx="10896600" cy="714375"/>
           </a:xfrm>
           <a:prstGeom xmlns:a="http://schemas.openxmlformats.org/drawingml/2006/main" prst="rect">
             <a:avLst/>
@@ -1982,7 +2604,7 @@
                 <a:ea typeface="Arial"/>
                 <a:cs typeface="Arial"/>
               </a:rPr>
-              <a:t>The scenario we propose</a:t>
+              <a:t>Our proposed monitor example</a:t>
             </a:r>
           </a:p>
         </p:txBody>
@@ -1992,7 +2614,7 @@
           <p:cNvPr id="2" name="presenter">
             <a:extLst xmlns:a="http://schemas.openxmlformats.org/drawingml/2006/main">
               <a:ext uri="{FF2B5EF4-FFF2-40B4-BE49-F238E27FC236}">
-                <a16:creationId xmlns:a16="http://schemas.microsoft.com/office/drawing/2014/main" id="{0A9CDC4F-48DF-444A-B69F-CF763C6F8CEF}"/>
+                <a16:creationId xmlns:a16="http://schemas.microsoft.com/office/drawing/2014/main" id="{BDA25D23-0F58-4DDF-B2C9-A8546538DA35}"/>
               </a:ext>
             </a:extLst>
           </p:cNvPr>
@@ -2003,8 +2625,8 @@
         </p:nvSpPr>
         <p:spPr>
           <a:xfrm xmlns:a="http://schemas.openxmlformats.org/drawingml/2006/main">
-            <a:off x="9906000" y="6400800"/>
-            <a:ext cx="1600200" cy="247650"/>
+            <a:off x="10144125" y="6429375"/>
+            <a:ext cx="1400175" cy="238125"/>
           </a:xfrm>
           <a:prstGeom xmlns:a="http://schemas.openxmlformats.org/drawingml/2006/main" prst="rect">
             <a:avLst/>
@@ -2021,7 +2643,7 @@
           <a:lstStyle xmlns:a="http://schemas.openxmlformats.org/drawingml/2006/main"/>
           <a:p xmlns:a="http://schemas.openxmlformats.org/drawingml/2006/main">
             <a:pPr algn="l">
-              <a:defRPr sz="1425" b="0">
+              <a:defRPr sz="1350" b="0">
                 <a:solidFill>
                   <a:srgbClr val="526264"/>
                 </a:solidFill>
@@ -2031,7 +2653,7 @@
               </a:defRPr>
             </a:pPr>
             <a:r>
-              <a:rPr sz="1425" b="0">
+              <a:rPr sz="1350" b="0">
                 <a:solidFill>
                   <a:srgbClr val="526264"/>
                 </a:solidFill>
@@ -2046,10 +2668,10 @@
       </p:sp>
       <p:sp>
         <p:nvSpPr>
-          <p:cNvPr id="3" name="label0">
+          <p:cNvPr id="3" name="team-role">
             <a:extLst xmlns:a="http://schemas.openxmlformats.org/drawingml/2006/main">
               <a:ext uri="{FF2B5EF4-FFF2-40B4-BE49-F238E27FC236}">
-                <a16:creationId xmlns:a16="http://schemas.microsoft.com/office/drawing/2014/main" id="{2AF2EE5B-F069-45E3-B7AD-96DC32B31D82}"/>
+                <a16:creationId xmlns:a16="http://schemas.microsoft.com/office/drawing/2014/main" id="{D94EDC09-86A9-4C1F-AE5C-754FAE756437}"/>
               </a:ext>
             </a:extLst>
           </p:cNvPr>
@@ -2060,8 +2682,8 @@
         </p:nvSpPr>
         <p:spPr>
           <a:xfrm xmlns:a="http://schemas.openxmlformats.org/drawingml/2006/main">
-            <a:off x="685800" y="1762125"/>
-            <a:ext cx="3190875" cy="685800"/>
+            <a:off x="647700" y="1352550"/>
+            <a:ext cx="10896600" cy="561975"/>
           </a:xfrm>
           <a:prstGeom xmlns:a="http://schemas.openxmlformats.org/drawingml/2006/main" prst="rect">
             <a:avLst/>
@@ -2078,7 +2700,7 @@
           <a:lstStyle xmlns:a="http://schemas.openxmlformats.org/drawingml/2006/main"/>
           <a:p xmlns:a="http://schemas.openxmlformats.org/drawingml/2006/main">
             <a:pPr algn="l">
-              <a:defRPr sz="2325" b="1">
+              <a:defRPr sz="2250" b="1">
                 <a:solidFill>
                   <a:srgbClr val="26746D"/>
                 </a:solidFill>
@@ -2088,7 +2710,7 @@
               </a:defRPr>
             </a:pPr>
             <a:r>
-              <a:rPr sz="2325" b="1">
+              <a:rPr sz="2250" b="1">
                 <a:solidFill>
                   <a:srgbClr val="26746D"/>
                 </a:solidFill>
@@ -2096,17 +2718,39 @@
                 <a:ea typeface="Arial"/>
                 <a:cs typeface="Arial"/>
               </a:rPr>
-              <a:t>Our role</a:t>
+              <a:t>We are three KU students proposing a reuse tool for staff</a:t>
             </a:r>
           </a:p>
         </p:txBody>
       </p:sp>
+      <p:pic>
+        <p:nvPicPr>
+          <p:cNvPr id="16" name=""/>
+          <p:cNvPicPr>
+            <a:picLocks xmlns:a="http://schemas.openxmlformats.org/drawingml/2006/main" noChangeAspect="1"/>
+          </p:cNvPicPr>
+          <p:nvPr/>
+        </p:nvPicPr>
+        <p:blipFill>
+          <a:blip xmlns:r="http://schemas.openxmlformats.org/officeDocument/2006/relationships" xmlns:a="http://schemas.openxmlformats.org/drawingml/2006/main" r:embed="Rad072401dfb4475e"/>
+          <a:stretch xmlns:a="http://schemas.openxmlformats.org/drawingml/2006/main"/>
+        </p:blipFill>
+        <p:spPr>
+          <a:xfrm xmlns:a="http://schemas.openxmlformats.org/drawingml/2006/main">
+            <a:off x="542925" y="2354263"/>
+            <a:ext cx="11106150" cy="3702050"/>
+          </a:xfrm>
+          <a:prstGeom xmlns:a="http://schemas.openxmlformats.org/drawingml/2006/main" prst="rect">
+            <a:avLst/>
+          </a:prstGeom>
+        </p:spPr>
+      </p:pic>
       <p:sp>
         <p:nvSpPr>
-          <p:cNvPr id="4" name="body0">
+          <p:cNvPr id="5" name="step0">
             <a:extLst xmlns:a="http://schemas.openxmlformats.org/drawingml/2006/main">
               <a:ext uri="{FF2B5EF4-FFF2-40B4-BE49-F238E27FC236}">
-                <a16:creationId xmlns:a16="http://schemas.microsoft.com/office/drawing/2014/main" id="{5F1C6968-2738-4312-B2D8-288AB7EBE586}"/>
+                <a16:creationId xmlns:a16="http://schemas.microsoft.com/office/drawing/2014/main" id="{B1468F0C-CA74-43F4-A1B9-8766C324B046}"/>
               </a:ext>
             </a:extLst>
           </p:cNvPr>
@@ -2117,8 +2761,8 @@
         </p:nvSpPr>
         <p:spPr>
           <a:xfrm xmlns:a="http://schemas.openxmlformats.org/drawingml/2006/main">
-            <a:off x="4162425" y="1762125"/>
-            <a:ext cx="7343775" cy="933450"/>
+            <a:off x="647700" y="1981200"/>
+            <a:ext cx="2638425" cy="400050"/>
           </a:xfrm>
           <a:prstGeom xmlns:a="http://schemas.openxmlformats.org/drawingml/2006/main" prst="rect">
             <a:avLst/>
@@ -2135,7 +2779,7 @@
           <a:lstStyle xmlns:a="http://schemas.openxmlformats.org/drawingml/2006/main"/>
           <a:p xmlns:a="http://schemas.openxmlformats.org/drawingml/2006/main">
             <a:pPr algn="l">
-              <a:defRPr sz="2325" b="0">
+              <a:defRPr sz="2100" b="1">
                 <a:solidFill>
                   <a:srgbClr val="17343C"/>
                 </a:solidFill>
@@ -2145,7 +2789,7 @@
               </a:defRPr>
             </a:pPr>
             <a:r>
-              <a:rPr sz="2325" b="0">
+              <a:rPr sz="2100" b="1">
                 <a:solidFill>
                   <a:srgbClr val="17343C"/>
                 </a:solidFill>
@@ -2153,17 +2797,17 @@
                 <a:ea typeface="Arial"/>
                 <a:cs typeface="Arial"/>
               </a:rPr>
-              <a:t>Three KU students proposing a tool for staff</a:t>
+              <a:t>1  Request</a:t>
             </a:r>
           </a:p>
         </p:txBody>
       </p:sp>
       <p:sp>
         <p:nvSpPr>
-          <p:cNvPr id="5" name="label1">
+          <p:cNvPr id="6" name="detail0">
             <a:extLst xmlns:a="http://schemas.openxmlformats.org/drawingml/2006/main">
               <a:ext uri="{FF2B5EF4-FFF2-40B4-BE49-F238E27FC236}">
-                <a16:creationId xmlns:a16="http://schemas.microsoft.com/office/drawing/2014/main" id="{C40910D2-C392-4605-8371-A8D310CEA2BD}"/>
+                <a16:creationId xmlns:a16="http://schemas.microsoft.com/office/drawing/2014/main" id="{5566860B-4322-43ED-89C5-6E928794F959}"/>
               </a:ext>
             </a:extLst>
           </p:cNvPr>
@@ -2174,8 +2818,8 @@
         </p:nvSpPr>
         <p:spPr>
           <a:xfrm xmlns:a="http://schemas.openxmlformats.org/drawingml/2006/main">
-            <a:off x="685800" y="2962275"/>
-            <a:ext cx="3190875" cy="685800"/>
+            <a:off x="647700" y="5724525"/>
+            <a:ext cx="2638425" cy="561975"/>
           </a:xfrm>
           <a:prstGeom xmlns:a="http://schemas.openxmlformats.org/drawingml/2006/main" prst="rect">
             <a:avLst/>
@@ -2192,9 +2836,9 @@
           <a:lstStyle xmlns:a="http://schemas.openxmlformats.org/drawingml/2006/main"/>
           <a:p xmlns:a="http://schemas.openxmlformats.org/drawingml/2006/main">
             <a:pPr algn="l">
-              <a:defRPr sz="2325" b="1">
-                <a:solidFill>
-                  <a:srgbClr val="26746D"/>
+              <a:defRPr sz="1725" b="0">
+                <a:solidFill>
+                  <a:srgbClr val="526264"/>
                 </a:solidFill>
                 <a:latin typeface="Arial"/>
                 <a:ea typeface="Arial"/>
@@ -2202,25 +2846,25 @@
               </a:defRPr>
             </a:pPr>
             <a:r>
-              <a:rPr sz="2325" b="1">
-                <a:solidFill>
-                  <a:srgbClr val="26746D"/>
+              <a:rPr sz="1725" b="0">
+                <a:solidFill>
+                  <a:srgbClr val="526264"/>
                 </a:solidFill>
                 <a:latin typeface="Arial"/>
                 <a:ea typeface="Arial"/>
                 <a:cs typeface="Arial"/>
               </a:rPr>
-              <a:t>Example request</a:t>
+              <a:t>Two suitable monitors</a:t>
             </a:r>
           </a:p>
         </p:txBody>
       </p:sp>
       <p:sp>
         <p:nvSpPr>
-          <p:cNvPr id="6" name="body1">
+          <p:cNvPr id="7" name="step1">
             <a:extLst xmlns:a="http://schemas.openxmlformats.org/drawingml/2006/main">
               <a:ext uri="{FF2B5EF4-FFF2-40B4-BE49-F238E27FC236}">
-                <a16:creationId xmlns:a16="http://schemas.microsoft.com/office/drawing/2014/main" id="{BC2F3C08-33BF-4AF7-BEFD-FAA404A6E182}"/>
+                <a16:creationId xmlns:a16="http://schemas.microsoft.com/office/drawing/2014/main" id="{0BAD3C70-7BA5-43F4-AE5A-A6B65DBC0001}"/>
               </a:ext>
             </a:extLst>
           </p:cNvPr>
@@ -2231,8 +2875,8 @@
         </p:nvSpPr>
         <p:spPr>
           <a:xfrm xmlns:a="http://schemas.openxmlformats.org/drawingml/2006/main">
-            <a:off x="4162425" y="2962275"/>
-            <a:ext cx="7343775" cy="933450"/>
+            <a:off x="3381375" y="1981200"/>
+            <a:ext cx="2638425" cy="400050"/>
           </a:xfrm>
           <a:prstGeom xmlns:a="http://schemas.openxmlformats.org/drawingml/2006/main" prst="rect">
             <a:avLst/>
@@ -2249,7 +2893,7 @@
           <a:lstStyle xmlns:a="http://schemas.openxmlformats.org/drawingml/2006/main"/>
           <a:p xmlns:a="http://schemas.openxmlformats.org/drawingml/2006/main">
             <a:pPr algn="l">
-              <a:defRPr sz="2325" b="0">
+              <a:defRPr sz="2100" b="1">
                 <a:solidFill>
                   <a:srgbClr val="17343C"/>
                 </a:solidFill>
@@ -2259,7 +2903,7 @@
               </a:defRPr>
             </a:pPr>
             <a:r>
-              <a:rPr sz="2325" b="0">
+              <a:rPr sz="2100" b="1">
                 <a:solidFill>
                   <a:srgbClr val="17343C"/>
                 </a:solidFill>
@@ -2267,17 +2911,17 @@
                 <a:ea typeface="Arial"/>
                 <a:cs typeface="Arial"/>
               </a:rPr>
-              <a:t>A staff member needs two suitable monitors</a:t>
+              <a:t>2  Find spares</a:t>
             </a:r>
           </a:p>
         </p:txBody>
       </p:sp>
       <p:sp>
         <p:nvSpPr>
-          <p:cNvPr id="7" name="label2">
+          <p:cNvPr id="8" name="detail1">
             <a:extLst xmlns:a="http://schemas.openxmlformats.org/drawingml/2006/main">
               <a:ext uri="{FF2B5EF4-FFF2-40B4-BE49-F238E27FC236}">
-                <a16:creationId xmlns:a16="http://schemas.microsoft.com/office/drawing/2014/main" id="{28C92563-0101-40A5-A98E-E024E10CDFBB}"/>
+                <a16:creationId xmlns:a16="http://schemas.microsoft.com/office/drawing/2014/main" id="{F4E27746-AF92-4AFA-B49E-4BC9AEDB0100}"/>
               </a:ext>
             </a:extLst>
           </p:cNvPr>
@@ -2288,8 +2932,8 @@
         </p:nvSpPr>
         <p:spPr>
           <a:xfrm xmlns:a="http://schemas.openxmlformats.org/drawingml/2006/main">
-            <a:off x="685800" y="4162425"/>
-            <a:ext cx="3190875" cy="685800"/>
+            <a:off x="3381375" y="5724525"/>
+            <a:ext cx="2638425" cy="561975"/>
           </a:xfrm>
           <a:prstGeom xmlns:a="http://schemas.openxmlformats.org/drawingml/2006/main" prst="rect">
             <a:avLst/>
@@ -2306,9 +2950,9 @@
           <a:lstStyle xmlns:a="http://schemas.openxmlformats.org/drawingml/2006/main"/>
           <a:p xmlns:a="http://schemas.openxmlformats.org/drawingml/2006/main">
             <a:pPr algn="l">
-              <a:defRPr sz="2325" b="1">
-                <a:solidFill>
-                  <a:srgbClr val="26746D"/>
+              <a:defRPr sz="1725" b="0">
+                <a:solidFill>
+                  <a:srgbClr val="526264"/>
                 </a:solidFill>
                 <a:latin typeface="Arial"/>
                 <a:ea typeface="Arial"/>
@@ -2316,25 +2960,25 @@
               </a:defRPr>
             </a:pPr>
             <a:r>
-              <a:rPr sz="2325" b="1">
-                <a:solidFill>
-                  <a:srgbClr val="26746D"/>
+              <a:rPr sz="1725" b="0">
+                <a:solidFill>
+                  <a:srgbClr val="526264"/>
                 </a:solidFill>
                 <a:latin typeface="Arial"/>
                 <a:ea typeface="Arial"/>
                 <a:cs typeface="Arial"/>
               </a:rPr>
-              <a:t>Proposed process</a:t>
+              <a:t>Check quantity and fit</a:t>
             </a:r>
           </a:p>
         </p:txBody>
       </p:sp>
       <p:sp>
         <p:nvSpPr>
-          <p:cNvPr id="8" name="body2">
+          <p:cNvPr id="9" name="step2">
             <a:extLst xmlns:a="http://schemas.openxmlformats.org/drawingml/2006/main">
               <a:ext uri="{FF2B5EF4-FFF2-40B4-BE49-F238E27FC236}">
-                <a16:creationId xmlns:a16="http://schemas.microsoft.com/office/drawing/2014/main" id="{74C14D60-9B43-4954-9F00-F9026D902833}"/>
+                <a16:creationId xmlns:a16="http://schemas.microsoft.com/office/drawing/2014/main" id="{82660C51-435E-4F71-83D5-3EF791419ACE}"/>
               </a:ext>
             </a:extLst>
           </p:cNvPr>
@@ -2345,8 +2989,8 @@
         </p:nvSpPr>
         <p:spPr>
           <a:xfrm xmlns:a="http://schemas.openxmlformats.org/drawingml/2006/main">
-            <a:off x="4162425" y="4162425"/>
-            <a:ext cx="7343775" cy="933450"/>
+            <a:off x="6115050" y="1981200"/>
+            <a:ext cx="2638425" cy="400050"/>
           </a:xfrm>
           <a:prstGeom xmlns:a="http://schemas.openxmlformats.org/drawingml/2006/main" prst="rect">
             <a:avLst/>
@@ -2363,7 +3007,7 @@
           <a:lstStyle xmlns:a="http://schemas.openxmlformats.org/drawingml/2006/main"/>
           <a:p xmlns:a="http://schemas.openxmlformats.org/drawingml/2006/main">
             <a:pPr algn="l">
-              <a:defRPr sz="2325" b="0">
+              <a:defRPr sz="2100" b="1">
                 <a:solidFill>
                   <a:srgbClr val="17343C"/>
                 </a:solidFill>
@@ -2373,7 +3017,7 @@
               </a:defRPr>
             </a:pPr>
             <a:r>
-              <a:rPr sz="2325" b="0">
+              <a:rPr sz="2100" b="1">
                 <a:solidFill>
                   <a:srgbClr val="17343C"/>
                 </a:solidFill>
@@ -2381,40 +3025,17 @@
                 <a:ea typeface="Arial"/>
                 <a:cs typeface="Arial"/>
               </a:rPr>
-              <a:t>Find spares, request them, get approval,</a:t>
-            </a:r>
-          </a:p>
-          <a:p xmlns:a="http://schemas.openxmlformats.org/drawingml/2006/main">
-            <a:pPr algn="l">
-              <a:defRPr sz="2325" b="0">
-                <a:solidFill>
-                  <a:srgbClr val="17343C"/>
-                </a:solidFill>
-                <a:latin typeface="Arial"/>
-                <a:ea typeface="Arial"/>
-                <a:cs typeface="Arial"/>
-              </a:defRPr>
-            </a:pPr>
-            <a:r>
-              <a:rPr sz="2325" b="0">
-                <a:solidFill>
-                  <a:srgbClr val="17343C"/>
-                </a:solidFill>
-                <a:latin typeface="Arial"/>
-                <a:ea typeface="Arial"/>
-                <a:cs typeface="Arial"/>
-              </a:rPr>
-              <a:t>then record the handover</a:t>
+              <a:t>3  Get approval</a:t>
             </a:r>
           </a:p>
         </p:txBody>
       </p:sp>
       <p:sp>
         <p:nvSpPr>
-          <p:cNvPr id="9" name="condition">
+          <p:cNvPr id="10" name="detail2">
             <a:extLst xmlns:a="http://schemas.openxmlformats.org/drawingml/2006/main">
               <a:ext uri="{FF2B5EF4-FFF2-40B4-BE49-F238E27FC236}">
-                <a16:creationId xmlns:a16="http://schemas.microsoft.com/office/drawing/2014/main" id="{C59D625A-8F16-4F97-929A-A8C5D6E22237}"/>
+                <a16:creationId xmlns:a16="http://schemas.microsoft.com/office/drawing/2014/main" id="{2C43F43D-9C89-4B70-8A83-689DFBD59DB9}"/>
               </a:ext>
             </a:extLst>
           </p:cNvPr>
@@ -2425,8 +3046,8 @@
         </p:nvSpPr>
         <p:spPr>
           <a:xfrm xmlns:a="http://schemas.openxmlformats.org/drawingml/2006/main">
-            <a:off x="685800" y="5629275"/>
-            <a:ext cx="10820400" cy="704850"/>
+            <a:off x="6115050" y="5724525"/>
+            <a:ext cx="2638425" cy="561975"/>
           </a:xfrm>
           <a:prstGeom xmlns:a="http://schemas.openxmlformats.org/drawingml/2006/main" prst="rect">
             <a:avLst/>
@@ -2443,7 +3064,7 @@
           <a:lstStyle xmlns:a="http://schemas.openxmlformats.org/drawingml/2006/main"/>
           <a:p xmlns:a="http://schemas.openxmlformats.org/drawingml/2006/main">
             <a:pPr algn="l">
-              <a:defRPr sz="2025" b="0">
+              <a:defRPr sz="1725" b="0">
                 <a:solidFill>
                   <a:srgbClr val="526264"/>
                 </a:solidFill>
@@ -2453,7 +3074,7 @@
               </a:defRPr>
             </a:pPr>
             <a:r>
-              <a:rPr sz="2025" b="0">
+              <a:rPr sz="1725" b="0">
                 <a:solidFill>
                   <a:srgbClr val="526264"/>
                 </a:solidFill>
@@ -2461,14 +3082,48 @@
                 <a:ea typeface="Arial"/>
                 <a:cs typeface="Arial"/>
               </a:rPr>
-              <a:t>We still need to confirm the KU unit that owns the service</a:t>
-            </a:r>
-          </a:p>
+              <a:t>Releasing and receiving staff</a:t>
+            </a:r>
+          </a:p>
+        </p:txBody>
+      </p:sp>
+      <p:sp>
+        <p:nvSpPr>
+          <p:cNvPr id="11" name="step3">
+            <a:extLst xmlns:a="http://schemas.openxmlformats.org/drawingml/2006/main">
+              <a:ext uri="{FF2B5EF4-FFF2-40B4-BE49-F238E27FC236}">
+                <a16:creationId xmlns:a16="http://schemas.microsoft.com/office/drawing/2014/main" id="{D04173A0-926F-420D-B68B-B55AEC609257}"/>
+              </a:ext>
+            </a:extLst>
+          </p:cNvPr>
+          <p:cNvSpPr>
+            <a:spLocks xmlns:a="http://schemas.openxmlformats.org/drawingml/2006/main" noGrp="1"/>
+          </p:cNvSpPr>
+          <p:nvPr/>
+        </p:nvSpPr>
+        <p:spPr>
+          <a:xfrm xmlns:a="http://schemas.openxmlformats.org/drawingml/2006/main">
+            <a:off x="8848725" y="1981200"/>
+            <a:ext cx="2638425" cy="400050"/>
+          </a:xfrm>
+          <a:prstGeom xmlns:a="http://schemas.openxmlformats.org/drawingml/2006/main" prst="rect">
+            <a:avLst/>
+          </a:prstGeom>
+          <a:noFill xmlns:a="http://schemas.openxmlformats.org/drawingml/2006/main"/>
+          <a:ln xmlns:a="http://schemas.openxmlformats.org/drawingml/2006/main" w="0">
+            <a:noFill/>
+          </a:ln>
+        </p:spPr>
+        <p:txBody>
+          <a:bodyPr xmlns:a="http://schemas.openxmlformats.org/drawingml/2006/main" wrap="square" lIns="0" tIns="0" rIns="0" bIns="0" anchor="t">
+            <a:noAutofit/>
+          </a:bodyPr>
+          <a:lstStyle xmlns:a="http://schemas.openxmlformats.org/drawingml/2006/main"/>
           <a:p xmlns:a="http://schemas.openxmlformats.org/drawingml/2006/main">
             <a:pPr algn="l">
-              <a:defRPr sz="2025" b="0">
-                <a:solidFill>
-                  <a:srgbClr val="526264"/>
+              <a:defRPr sz="2100" b="1">
+                <a:solidFill>
+                  <a:srgbClr val="17343C"/>
                 </a:solidFill>
                 <a:latin typeface="Arial"/>
                 <a:ea typeface="Arial"/>
@@ -2476,15 +3131,72 @@
               </a:defRPr>
             </a:pPr>
             <a:r>
-              <a:rPr sz="2025" b="0">
+              <a:rPr sz="2100" b="1">
+                <a:solidFill>
+                  <a:srgbClr val="17343C"/>
+                </a:solidFill>
+                <a:latin typeface="Arial"/>
+                <a:ea typeface="Arial"/>
+                <a:cs typeface="Arial"/>
+              </a:rPr>
+              <a:t>4  Record handover</a:t>
+            </a:r>
+          </a:p>
+        </p:txBody>
+      </p:sp>
+      <p:sp>
+        <p:nvSpPr>
+          <p:cNvPr id="12" name="detail3">
+            <a:extLst xmlns:a="http://schemas.openxmlformats.org/drawingml/2006/main">
+              <a:ext uri="{FF2B5EF4-FFF2-40B4-BE49-F238E27FC236}">
+                <a16:creationId xmlns:a16="http://schemas.microsoft.com/office/drawing/2014/main" id="{0361F87A-B9CA-4569-8C22-8C6AFCA760ED}"/>
+              </a:ext>
+            </a:extLst>
+          </p:cNvPr>
+          <p:cNvSpPr>
+            <a:spLocks xmlns:a="http://schemas.openxmlformats.org/drawingml/2006/main" noGrp="1"/>
+          </p:cNvSpPr>
+          <p:nvPr/>
+        </p:nvSpPr>
+        <p:spPr>
+          <a:xfrm xmlns:a="http://schemas.openxmlformats.org/drawingml/2006/main">
+            <a:off x="8848725" y="5724525"/>
+            <a:ext cx="2638425" cy="561975"/>
+          </a:xfrm>
+          <a:prstGeom xmlns:a="http://schemas.openxmlformats.org/drawingml/2006/main" prst="rect">
+            <a:avLst/>
+          </a:prstGeom>
+          <a:noFill xmlns:a="http://schemas.openxmlformats.org/drawingml/2006/main"/>
+          <a:ln xmlns:a="http://schemas.openxmlformats.org/drawingml/2006/main" w="0">
+            <a:noFill/>
+          </a:ln>
+        </p:spPr>
+        <p:txBody>
+          <a:bodyPr xmlns:a="http://schemas.openxmlformats.org/drawingml/2006/main" wrap="square" lIns="0" tIns="0" rIns="0" bIns="0" anchor="t">
+            <a:noAutofit/>
+          </a:bodyPr>
+          <a:lstStyle xmlns:a="http://schemas.openxmlformats.org/drawingml/2006/main"/>
+          <a:p xmlns:a="http://schemas.openxmlformats.org/drawingml/2006/main">
+            <a:pPr algn="l">
+              <a:defRPr sz="1725" b="0">
                 <a:solidFill>
                   <a:srgbClr val="526264"/>
                 </a:solidFill>
                 <a:latin typeface="Arial"/>
                 <a:ea typeface="Arial"/>
                 <a:cs typeface="Arial"/>
+              </a:defRPr>
+            </a:pPr>
+            <a:r>
+              <a:rPr sz="1725" b="0">
+                <a:solidFill>
+                  <a:srgbClr val="526264"/>
+                </a:solidFill>
+                <a:latin typeface="Arial"/>
+                <a:ea typeface="Arial"/>
+                <a:cs typeface="Arial"/>
               </a:rPr>
-              <a:t>and the staff who would use it.</a:t>
+              <a:t>Update custody and location</a:t>
             </a:r>
           </a:p>
         </p:txBody>
@@ -2492,7 +3204,7 @@
     </p:spTree>
     <p:extLst>
       <p:ext uri="{BB962C8B-B14F-4D97-AF65-F5344CB8AC3E}">
-        <p14:creationId xmlns:p14="http://schemas.microsoft.com/office/powerpoint/2010/main" val="1232475096"/>
+        <p14:creationId xmlns:p14="http://schemas.microsoft.com/office/powerpoint/2010/main" val="1128202748"/>
       </p:ext>
     </p:extLst>
   </p:cSld>
@@ -2520,10 +3232,10 @@
       </p:grpSpPr>
       <p:sp>
         <p:nvSpPr>
-          <p:cNvPr id="5" name="title">
+          <p:cNvPr id="6" name="title">
             <a:extLst xmlns:a="http://schemas.openxmlformats.org/drawingml/2006/main">
               <a:ext uri="{FF2B5EF4-FFF2-40B4-BE49-F238E27FC236}">
-                <a16:creationId xmlns:a16="http://schemas.microsoft.com/office/drawing/2014/main" id="{129C26F0-2B06-4809-A5F4-69B56D50F526}"/>
+                <a16:creationId xmlns:a16="http://schemas.microsoft.com/office/drawing/2014/main" id="{6607182A-8096-433F-B08E-DBE1AACE5BF2}"/>
               </a:ext>
             </a:extLst>
           </p:cNvPr>
@@ -2534,8 +3246,8 @@
         </p:nvSpPr>
         <p:spPr>
           <a:xfrm xmlns:a="http://schemas.openxmlformats.org/drawingml/2006/main">
-            <a:off x="685800" y="514350"/>
-            <a:ext cx="10820400" cy="685800"/>
+            <a:off x="647700" y="457200"/>
+            <a:ext cx="10896600" cy="714375"/>
           </a:xfrm>
           <a:prstGeom xmlns:a="http://schemas.openxmlformats.org/drawingml/2006/main" prst="rect">
             <a:avLst/>
@@ -2570,7 +3282,7 @@
                 <a:ea typeface="Arial"/>
                 <a:cs typeface="Arial"/>
               </a:rPr>
-              <a:t>The comparison we are preparing</a:t>
+              <a:t>Project scope</a:t>
             </a:r>
           </a:p>
         </p:txBody>
@@ -2580,7 +3292,7 @@
           <p:cNvPr id="2" name="presenter">
             <a:extLst xmlns:a="http://schemas.openxmlformats.org/drawingml/2006/main">
               <a:ext uri="{FF2B5EF4-FFF2-40B4-BE49-F238E27FC236}">
-                <a16:creationId xmlns:a16="http://schemas.microsoft.com/office/drawing/2014/main" id="{7EB4209C-D62C-4EF4-AD71-EF5C5B2BE640}"/>
+                <a16:creationId xmlns:a16="http://schemas.microsoft.com/office/drawing/2014/main" id="{AC37414C-FFD2-4096-8FC3-DD4FC757E29D}"/>
               </a:ext>
             </a:extLst>
           </p:cNvPr>
@@ -2591,8 +3303,8 @@
         </p:nvSpPr>
         <p:spPr>
           <a:xfrm xmlns:a="http://schemas.openxmlformats.org/drawingml/2006/main">
-            <a:off x="9906000" y="6400800"/>
-            <a:ext cx="1600200" cy="247650"/>
+            <a:off x="10144125" y="6429375"/>
+            <a:ext cx="1400175" cy="238125"/>
           </a:xfrm>
           <a:prstGeom xmlns:a="http://schemas.openxmlformats.org/drawingml/2006/main" prst="rect">
             <a:avLst/>
@@ -2609,7 +3321,7 @@
           <a:lstStyle xmlns:a="http://schemas.openxmlformats.org/drawingml/2006/main"/>
           <a:p xmlns:a="http://schemas.openxmlformats.org/drawingml/2006/main">
             <a:pPr algn="l">
-              <a:defRPr sz="1425" b="0">
+              <a:defRPr sz="1350" b="0">
                 <a:solidFill>
                   <a:srgbClr val="526264"/>
                 </a:solidFill>
@@ -2619,7 +3331,7 @@
               </a:defRPr>
             </a:pPr>
             <a:r>
-              <a:rPr sz="1425" b="0">
+              <a:rPr sz="1350" b="0">
                 <a:solidFill>
                   <a:srgbClr val="526264"/>
                 </a:solidFill>
@@ -2632,250 +3344,12 @@
           </a:p>
         </p:txBody>
       </p:sp>
-      <p:graphicFrame>
-        <p:nvGraphicFramePr>
-          <p:cNvPr id="7" name=""/>
-          <p:cNvGraphicFramePr/>
-          <p:nvPr/>
-        </p:nvGraphicFramePr>
-        <p:xfrm>
-          <a:off xmlns:a="http://schemas.openxmlformats.org/drawingml/2006/main" x="685800" y="1771650"/>
-          <a:ext xmlns:a="http://schemas.openxmlformats.org/drawingml/2006/main" cx="10820400" cy="3495675"/>
-        </p:xfrm>
-        <a:graphic xmlns:a="http://schemas.openxmlformats.org/drawingml/2006/main">
-          <a:graphicData uri="http://schemas.openxmlformats.org/drawingml/2006/table">
-            <a:tbl>
-              <a:tblPr firstRow="0" firstCol="0" bandRow="0"/>
-              <a:tblGrid>
-                <a:gridCol w="3400425"/>
-                <a:gridCol w="7419975"/>
-              </a:tblGrid>
-              <a:tr h="581025">
-                <a:tc>
-                  <a:txBody>
-                    <a:bodyPr lIns="76200" tIns="66675" rIns="114300" bIns="66675">
-                      <a:noAutofit/>
-                    </a:bodyPr>
-                    <a:lstStyle/>
-                    <a:p>
-                      <a:r>
-                        <a:rPr sz="1875" b="1">
-                          <a:solidFill>
-                            <a:srgbClr val="26746D"/>
-                          </a:solidFill>
-                          <a:latin typeface="Arial"/>
-                          <a:ea typeface="Arial"/>
-                          <a:cs typeface="Arial"/>
-                        </a:rPr>
-                        <a:t>Version</a:t>
-                      </a:r>
-                    </a:p>
-                  </a:txBody>
-                  <a:tcPr marL="91440" marR="91440" marT="45720" marB="45720" anchor="ctr">
-                    <a:solidFill>
-                      <a:srgbClr val="FAFAF7"/>
-                    </a:solidFill>
-                  </a:tcPr>
-                </a:tc>
-                <a:tc>
-                  <a:txBody>
-                    <a:bodyPr lIns="76200" tIns="66675" rIns="114300" bIns="66675">
-                      <a:noAutofit/>
-                    </a:bodyPr>
-                    <a:lstStyle/>
-                    <a:p>
-                      <a:r>
-                        <a:rPr sz="1875" b="1">
-                          <a:solidFill>
-                            <a:srgbClr val="26746D"/>
-                          </a:solidFill>
-                          <a:latin typeface="Arial"/>
-                          <a:ea typeface="Arial"/>
-                          <a:cs typeface="Arial"/>
-                        </a:rPr>
-                        <a:t>What we need to understand</a:t>
-                      </a:r>
-                    </a:p>
-                  </a:txBody>
-                  <a:tcPr marL="91440" marR="91440" marT="45720" marB="45720" anchor="ctr">
-                    <a:solidFill>
-                      <a:srgbClr val="FAFAF7"/>
-                    </a:solidFill>
-                  </a:tcPr>
-                </a:tc>
-              </a:tr>
-              <a:tr h="923925">
-                <a:tc>
-                  <a:txBody>
-                    <a:bodyPr lIns="76200" tIns="66675" rIns="114300" bIns="66675">
-                      <a:noAutofit/>
-                    </a:bodyPr>
-                    <a:lstStyle/>
-                    <a:p>
-                      <a:r>
-                        <a:rPr sz="2175" b="0">
-                          <a:solidFill>
-                            <a:srgbClr val="17343C"/>
-                          </a:solidFill>
-                          <a:latin typeface="Arial"/>
-                          <a:ea typeface="Arial"/>
-                          <a:cs typeface="Arial"/>
-                        </a:rPr>
-                        <a:t>Current KU process</a:t>
-                      </a:r>
-                    </a:p>
-                  </a:txBody>
-                  <a:tcPr marL="91440" marR="91440" marT="45720" marB="45720" anchor="ctr">
-                    <a:solidFill>
-                      <a:srgbClr val="FAFAF7"/>
-                    </a:solidFill>
-                  </a:tcPr>
-                </a:tc>
-                <a:tc>
-                  <a:txBody>
-                    <a:bodyPr lIns="76200" tIns="66675" rIns="114300" bIns="66675">
-                      <a:noAutofit/>
-                    </a:bodyPr>
-                    <a:lstStyle/>
-                    <a:p>
-                      <a:r>
-                        <a:rPr sz="2175" b="0">
-                          <a:solidFill>
-                            <a:srgbClr val="17343C"/>
-                          </a:solidFill>
-                          <a:latin typeface="Arial"/>
-                          <a:ea typeface="Arial"/>
-                          <a:cs typeface="Arial"/>
-                        </a:rPr>
-                        <a:t>Which system and steps do staff use today?</a:t>
-                      </a:r>
-                    </a:p>
-                  </a:txBody>
-                  <a:tcPr marL="91440" marR="91440" marT="45720" marB="45720" anchor="ctr">
-                    <a:solidFill>
-                      <a:srgbClr val="FAFAF7"/>
-                    </a:solidFill>
-                  </a:tcPr>
-                </a:tc>
-              </a:tr>
-              <a:tr h="923925">
-                <a:tc>
-                  <a:txBody>
-                    <a:bodyPr lIns="76200" tIns="66675" rIns="114300" bIns="66675">
-                      <a:noAutofit/>
-                    </a:bodyPr>
-                    <a:lstStyle/>
-                    <a:p>
-                      <a:r>
-                        <a:rPr sz="2175" b="0">
-                          <a:solidFill>
-                            <a:srgbClr val="17343C"/>
-                          </a:solidFill>
-                          <a:latin typeface="Arial"/>
-                          <a:ea typeface="Arial"/>
-                          <a:cs typeface="Arial"/>
-                        </a:rPr>
-                        <a:t>Our core tool</a:t>
-                      </a:r>
-                    </a:p>
-                  </a:txBody>
-                  <a:tcPr marL="91440" marR="91440" marT="45720" marB="45720" anchor="ctr">
-                    <a:solidFill>
-                      <a:srgbClr val="FAFAF7"/>
-                    </a:solidFill>
-                  </a:tcPr>
-                </a:tc>
-                <a:tc>
-                  <a:txBody>
-                    <a:bodyPr lIns="76200" tIns="66675" rIns="114300" bIns="66675">
-                      <a:noAutofit/>
-                    </a:bodyPr>
-                    <a:lstStyle/>
-                    <a:p>
-                      <a:r>
-                        <a:rPr sz="2175" b="0">
-                          <a:solidFill>
-                            <a:srgbClr val="17343C"/>
-                          </a:solidFill>
-                          <a:latin typeface="Arial"/>
-                          <a:ea typeface="Arial"/>
-                          <a:cs typeface="Arial"/>
-                        </a:rPr>
-                        <a:t>How would ordinary search and requests work?</a:t>
-                      </a:r>
-                    </a:p>
-                  </a:txBody>
-                  <a:tcPr marL="91440" marR="91440" marT="45720" marB="45720" anchor="ctr">
-                    <a:solidFill>
-                      <a:srgbClr val="FAFAF7"/>
-                    </a:solidFill>
-                  </a:tcPr>
-                </a:tc>
-              </a:tr>
-              <a:tr h="1066800">
-                <a:tc>
-                  <a:txBody>
-                    <a:bodyPr lIns="76200" tIns="66675" rIns="114300" bIns="66675">
-                      <a:noAutofit/>
-                    </a:bodyPr>
-                    <a:lstStyle/>
-                    <a:p>
-                      <a:r>
-                        <a:rPr sz="2175" b="0">
-                          <a:solidFill>
-                            <a:srgbClr val="17343C"/>
-                          </a:solidFill>
-                          <a:latin typeface="Arial"/>
-                          <a:ea typeface="Arial"/>
-                          <a:cs typeface="Arial"/>
-                        </a:rPr>
-                        <a:t>Our tool with AI</a:t>
-                      </a:r>
-                    </a:p>
-                  </a:txBody>
-                  <a:tcPr marL="91440" marR="91440" marT="45720" marB="45720" anchor="ctr">
-                    <a:solidFill>
-                      <a:srgbClr val="FAFAF7"/>
-                    </a:solidFill>
-                  </a:tcPr>
-                </a:tc>
-                <a:tc>
-                  <a:txBody>
-                    <a:bodyPr lIns="76200" tIns="66675" rIns="114300" bIns="66675">
-                      <a:noAutofit/>
-                    </a:bodyPr>
-                    <a:lstStyle/>
-                    <a:p>
-                      <a:r>
-                        <a:rPr sz="2175" b="0">
-                          <a:solidFill>
-                            <a:srgbClr val="17343C"/>
-                          </a:solidFill>
-                          <a:latin typeface="Arial"/>
-                          <a:ea typeface="Arial"/>
-                          <a:cs typeface="Arial"/>
-                        </a:rPr>
-                        <a:t>What do suggestions add after staff check them?</a:t>
-                      </a:r>
-                    </a:p>
-                  </a:txBody>
-                  <a:tcPr marL="91440" marR="91440" marT="45720" marB="45720" anchor="ctr">
-                    <a:solidFill>
-                      <a:srgbClr val="FAFAF7"/>
-                    </a:solidFill>
-                  </a:tcPr>
-                </a:tc>
-              </a:tr>
-            </a:tbl>
-          </a:graphicData>
-        </a:graphic>
-      </p:graphicFrame>
       <p:sp>
         <p:nvSpPr>
-          <p:cNvPr id="4" name="missing">
+          <p:cNvPr id="3" name="scope-intro">
             <a:extLst xmlns:a="http://schemas.openxmlformats.org/drawingml/2006/main">
               <a:ext uri="{FF2B5EF4-FFF2-40B4-BE49-F238E27FC236}">
-                <a16:creationId xmlns:a16="http://schemas.microsoft.com/office/drawing/2014/main" id="{A7E7F484-84B6-4863-8350-E19E54F2D22F}"/>
+                <a16:creationId xmlns:a16="http://schemas.microsoft.com/office/drawing/2014/main" id="{9284BF40-B683-4A44-B89D-4A435E492B55}"/>
               </a:ext>
             </a:extLst>
           </p:cNvPr>
@@ -2886,8 +3360,8 @@
         </p:nvSpPr>
         <p:spPr>
           <a:xfrm xmlns:a="http://schemas.openxmlformats.org/drawingml/2006/main">
-            <a:off x="685800" y="5638800"/>
-            <a:ext cx="10820400" cy="666750"/>
+            <a:off x="647700" y="1304925"/>
+            <a:ext cx="10896600" cy="447675"/>
           </a:xfrm>
           <a:prstGeom xmlns:a="http://schemas.openxmlformats.org/drawingml/2006/main" prst="rect">
             <a:avLst/>
@@ -2904,9 +3378,9 @@
           <a:lstStyle xmlns:a="http://schemas.openxmlformats.org/drawingml/2006/main"/>
           <a:p xmlns:a="http://schemas.openxmlformats.org/drawingml/2006/main">
             <a:pPr algn="l">
-              <a:defRPr sz="2100" b="1">
-                <a:solidFill>
-                  <a:srgbClr val="17343C"/>
+              <a:defRPr sz="2175" b="0">
+                <a:solidFill>
+                  <a:srgbClr val="526264"/>
                 </a:solidFill>
                 <a:latin typeface="Arial"/>
                 <a:ea typeface="Arial"/>
@@ -2914,20 +3388,687 @@
               </a:defRPr>
             </a:pPr>
             <a:r>
-              <a:rPr sz="2100" b="1">
-                <a:solidFill>
-                  <a:srgbClr val="17343C"/>
+              <a:rPr sz="2175" b="0">
+                <a:solidFill>
+                  <a:srgbClr val="526264"/>
                 </a:solidFill>
                 <a:latin typeface="Arial"/>
                 <a:ea typeface="Arial"/>
                 <a:cs typeface="Arial"/>
               </a:rPr>
-              <a:t>The current KU system, its features and the process owner</a:t>
-            </a:r>
-          </a:p>
+              <a:t>These boundaries cover the semester project</a:t>
+            </a:r>
+          </a:p>
+        </p:txBody>
+      </p:sp>
+      <p:graphicFrame>
+        <p:nvGraphicFramePr>
+          <p:cNvPr id="9" name=""/>
+          <p:cNvGraphicFramePr/>
+          <p:nvPr/>
+        </p:nvGraphicFramePr>
+        <p:xfrm>
+          <a:off xmlns:a="http://schemas.openxmlformats.org/drawingml/2006/main" x="647700" y="1781175"/>
+          <a:ext xmlns:a="http://schemas.openxmlformats.org/drawingml/2006/main" cx="10896600" cy="4191000"/>
+        </p:xfrm>
+        <a:graphic xmlns:a="http://schemas.openxmlformats.org/drawingml/2006/main">
+          <a:graphicData uri="http://schemas.openxmlformats.org/drawingml/2006/table">
+            <a:tbl>
+              <a:tblPr firstRow="0" firstCol="0" bandRow="0"/>
+              <a:tblGrid>
+                <a:gridCol w="2105025"/>
+                <a:gridCol w="4391025"/>
+                <a:gridCol w="4400550"/>
+              </a:tblGrid>
+              <a:tr h="523875">
+                <a:tc>
+                  <a:txBody>
+                    <a:bodyPr lIns="133350" tIns="85725" rIns="133350" bIns="85725">
+                      <a:noAutofit/>
+                    </a:bodyPr>
+                    <a:lstStyle/>
+                    <a:p>
+                      <a:r>
+                        <a:rPr sz="1875" b="1">
+                          <a:solidFill>
+                            <a:srgbClr val="FFFFFF"/>
+                          </a:solidFill>
+                          <a:latin typeface="Arial"/>
+                          <a:ea typeface="Arial"/>
+                          <a:cs typeface="Arial"/>
+                        </a:rPr>
+                        <a:t>Area</a:t>
+                      </a:r>
+                    </a:p>
+                  </a:txBody>
+                  <a:tcPr marL="91440" marR="91440" marT="45720" marB="45720" anchor="ctr">
+                    <a:solidFill>
+                      <a:srgbClr val="17343C"/>
+                    </a:solidFill>
+                  </a:tcPr>
+                </a:tc>
+                <a:tc>
+                  <a:txBody>
+                    <a:bodyPr lIns="133350" tIns="85725" rIns="133350" bIns="85725">
+                      <a:noAutofit/>
+                    </a:bodyPr>
+                    <a:lstStyle/>
+                    <a:p>
+                      <a:r>
+                        <a:rPr sz="1875" b="1">
+                          <a:solidFill>
+                            <a:srgbClr val="FFFFFF"/>
+                          </a:solidFill>
+                          <a:latin typeface="Arial"/>
+                          <a:ea typeface="Arial"/>
+                          <a:cs typeface="Arial"/>
+                        </a:rPr>
+                        <a:t>In scope</a:t>
+                      </a:r>
+                    </a:p>
+                  </a:txBody>
+                  <a:tcPr marL="91440" marR="91440" marT="45720" marB="45720" anchor="ctr">
+                    <a:solidFill>
+                      <a:srgbClr val="17343C"/>
+                    </a:solidFill>
+                  </a:tcPr>
+                </a:tc>
+                <a:tc>
+                  <a:txBody>
+                    <a:bodyPr lIns="133350" tIns="85725" rIns="133350" bIns="85725">
+                      <a:noAutofit/>
+                    </a:bodyPr>
+                    <a:lstStyle/>
+                    <a:p>
+                      <a:r>
+                        <a:rPr sz="1875" b="1">
+                          <a:solidFill>
+                            <a:srgbClr val="FFFFFF"/>
+                          </a:solidFill>
+                          <a:latin typeface="Arial"/>
+                          <a:ea typeface="Arial"/>
+                          <a:cs typeface="Arial"/>
+                        </a:rPr>
+                        <a:t>Out of scope</a:t>
+                      </a:r>
+                    </a:p>
+                  </a:txBody>
+                  <a:tcPr marL="91440" marR="91440" marT="45720" marB="45720" anchor="ctr">
+                    <a:solidFill>
+                      <a:srgbClr val="17343C"/>
+                    </a:solidFill>
+                  </a:tcPr>
+                </a:tc>
+              </a:tr>
+              <a:tr h="733425">
+                <a:tc>
+                  <a:txBody>
+                    <a:bodyPr lIns="133350" tIns="85725" rIns="133350" bIns="85725">
+                      <a:noAutofit/>
+                    </a:bodyPr>
+                    <a:lstStyle/>
+                    <a:p>
+                      <a:r>
+                        <a:rPr sz="2025" b="0">
+                          <a:solidFill>
+                            <a:srgbClr val="17343C"/>
+                          </a:solidFill>
+                          <a:latin typeface="Arial"/>
+                          <a:ea typeface="Arial"/>
+                          <a:cs typeface="Arial"/>
+                        </a:rPr>
+                        <a:t>Campus work</a:t>
+                      </a:r>
+                    </a:p>
+                  </a:txBody>
+                  <a:tcPr marL="91440" marR="91440" marT="45720" marB="45720" anchor="ctr">
+                    <a:solidFill>
+                      <a:srgbClr val="FAFAF7"/>
+                    </a:solidFill>
+                  </a:tcPr>
+                </a:tc>
+                <a:tc>
+                  <a:txBody>
+                    <a:bodyPr lIns="133350" tIns="85725" rIns="133350" bIns="85725">
+                      <a:noAutofit/>
+                    </a:bodyPr>
+                    <a:lstStyle/>
+                    <a:p>
+                      <a:r>
+                        <a:rPr sz="2025" b="0">
+                          <a:solidFill>
+                            <a:srgbClr val="17343C"/>
+                          </a:solidFill>
+                          <a:latin typeface="Arial"/>
+                          <a:ea typeface="Arial"/>
+                          <a:cs typeface="Arial"/>
+                        </a:rPr>
+                        <a:t>Asset lists, requests, approvals</a:t>
+                      </a:r>
+                    </a:p>
+                    <a:p>
+                      <a:r>
+                        <a:rPr sz="2025" b="0">
+                          <a:solidFill>
+                            <a:srgbClr val="17343C"/>
+                          </a:solidFill>
+                          <a:latin typeface="Arial"/>
+                          <a:ea typeface="Arial"/>
+                          <a:cs typeface="Arial"/>
+                        </a:rPr>
+                        <a:t>and history</a:t>
+                      </a:r>
+                    </a:p>
+                  </a:txBody>
+                  <a:tcPr marL="91440" marR="91440" marT="45720" marB="45720" anchor="ctr">
+                    <a:solidFill>
+                      <a:srgbClr val="FAFAF7"/>
+                    </a:solidFill>
+                  </a:tcPr>
+                </a:tc>
+                <a:tc>
+                  <a:txBody>
+                    <a:bodyPr lIns="133350" tIns="85725" rIns="133350" bIns="85725">
+                      <a:noAutofit/>
+                    </a:bodyPr>
+                    <a:lstStyle/>
+                    <a:p>
+                      <a:r>
+                        <a:rPr sz="2025" b="0">
+                          <a:solidFill>
+                            <a:srgbClr val="17343C"/>
+                          </a:solidFill>
+                          <a:latin typeface="Arial"/>
+                          <a:ea typeface="Arial"/>
+                          <a:cs typeface="Arial"/>
+                        </a:rPr>
+                        <a:t>Live links to KU finance,</a:t>
+                      </a:r>
+                    </a:p>
+                    <a:p>
+                      <a:r>
+                        <a:rPr sz="2025" b="0">
+                          <a:solidFill>
+                            <a:srgbClr val="17343C"/>
+                          </a:solidFill>
+                          <a:latin typeface="Arial"/>
+                          <a:ea typeface="Arial"/>
+                          <a:cs typeface="Arial"/>
+                        </a:rPr>
+                        <a:t>purchasing or ERP systems</a:t>
+                      </a:r>
+                    </a:p>
+                  </a:txBody>
+                  <a:tcPr marL="91440" marR="91440" marT="45720" marB="45720" anchor="ctr">
+                    <a:solidFill>
+                      <a:srgbClr val="FAFAF7"/>
+                    </a:solidFill>
+                  </a:tcPr>
+                </a:tc>
+              </a:tr>
+              <a:tr h="733425">
+                <a:tc>
+                  <a:txBody>
+                    <a:bodyPr lIns="133350" tIns="85725" rIns="133350" bIns="85725">
+                      <a:noAutofit/>
+                    </a:bodyPr>
+                    <a:lstStyle/>
+                    <a:p>
+                      <a:r>
+                        <a:rPr sz="2025" b="0">
+                          <a:solidFill>
+                            <a:srgbClr val="17343C"/>
+                          </a:solidFill>
+                          <a:latin typeface="Arial"/>
+                          <a:ea typeface="Arial"/>
+                          <a:cs typeface="Arial"/>
+                        </a:rPr>
+                        <a:t>Asset care</a:t>
+                      </a:r>
+                    </a:p>
+                  </a:txBody>
+                  <a:tcPr marL="91440" marR="91440" marT="45720" marB="45720" anchor="ctr">
+                    <a:solidFill>
+                      <a:srgbClr val="F0F4F3"/>
+                    </a:solidFill>
+                  </a:tcPr>
+                </a:tc>
+                <a:tc>
+                  <a:txBody>
+                    <a:bodyPr lIns="133350" tIns="85725" rIns="133350" bIns="85725">
+                      <a:noAutofit/>
+                    </a:bodyPr>
+                    <a:lstStyle/>
+                    <a:p>
+                      <a:r>
+                        <a:rPr sz="2025" b="0">
+                          <a:solidFill>
+                            <a:srgbClr val="17343C"/>
+                          </a:solidFill>
+                          <a:latin typeface="Arial"/>
+                          <a:ea typeface="Arial"/>
+                          <a:cs typeface="Arial"/>
+                        </a:rPr>
+                        <a:t>Transfer, maintenance</a:t>
+                      </a:r>
+                    </a:p>
+                    <a:p>
+                      <a:r>
+                        <a:rPr sz="2025" b="0">
+                          <a:solidFill>
+                            <a:srgbClr val="17343C"/>
+                          </a:solidFill>
+                          <a:latin typeface="Arial"/>
+                          <a:ea typeface="Arial"/>
+                          <a:cs typeface="Arial"/>
+                        </a:rPr>
+                        <a:t>and retirement records</a:t>
+                      </a:r>
+                    </a:p>
+                  </a:txBody>
+                  <a:tcPr marL="91440" marR="91440" marT="45720" marB="45720" anchor="ctr">
+                    <a:solidFill>
+                      <a:srgbClr val="F0F4F3"/>
+                    </a:solidFill>
+                  </a:tcPr>
+                </a:tc>
+                <a:tc>
+                  <a:txBody>
+                    <a:bodyPr lIns="133350" tIns="85725" rIns="133350" bIns="85725">
+                      <a:noAutofit/>
+                    </a:bodyPr>
+                    <a:lstStyle/>
+                    <a:p>
+                      <a:r>
+                        <a:rPr sz="2025" b="0">
+                          <a:solidFill>
+                            <a:srgbClr val="17343C"/>
+                          </a:solidFill>
+                          <a:latin typeface="Arial"/>
+                          <a:ea typeface="Arial"/>
+                          <a:cs typeface="Arial"/>
+                        </a:rPr>
+                        <a:t>Vehicle scheduling or</a:t>
+                      </a:r>
+                    </a:p>
+                    <a:p>
+                      <a:r>
+                        <a:rPr sz="2025" b="0">
+                          <a:solidFill>
+                            <a:srgbClr val="17343C"/>
+                          </a:solidFill>
+                          <a:latin typeface="Arial"/>
+                          <a:ea typeface="Arial"/>
+                          <a:cs typeface="Arial"/>
+                        </a:rPr>
+                        <a:t>barcode and RFID hardware</a:t>
+                      </a:r>
+                    </a:p>
+                  </a:txBody>
+                  <a:tcPr marL="91440" marR="91440" marT="45720" marB="45720" anchor="ctr">
+                    <a:solidFill>
+                      <a:srgbClr val="F0F4F3"/>
+                    </a:solidFill>
+                  </a:tcPr>
+                </a:tc>
+              </a:tr>
+              <a:tr h="733425">
+                <a:tc>
+                  <a:txBody>
+                    <a:bodyPr lIns="133350" tIns="85725" rIns="133350" bIns="85725">
+                      <a:noAutofit/>
+                    </a:bodyPr>
+                    <a:lstStyle/>
+                    <a:p>
+                      <a:r>
+                        <a:rPr sz="2025" b="0">
+                          <a:solidFill>
+                            <a:srgbClr val="17343C"/>
+                          </a:solidFill>
+                          <a:latin typeface="Arial"/>
+                          <a:ea typeface="Arial"/>
+                          <a:cs typeface="Arial"/>
+                        </a:rPr>
+                        <a:t>Costs and reports</a:t>
+                      </a:r>
+                    </a:p>
+                  </a:txBody>
+                  <a:tcPr marL="91440" marR="91440" marT="45720" marB="45720" anchor="ctr">
+                    <a:solidFill>
+                      <a:srgbClr val="FAFAF7"/>
+                    </a:solidFill>
+                  </a:tcPr>
+                </a:tc>
+                <a:tc>
+                  <a:txBody>
+                    <a:bodyPr lIns="133350" tIns="85725" rIns="133350" bIns="85725">
+                      <a:noAutofit/>
+                    </a:bodyPr>
+                    <a:lstStyle/>
+                    <a:p>
+                      <a:r>
+                        <a:rPr sz="2025" b="0">
+                          <a:solidFill>
+                            <a:srgbClr val="17343C"/>
+                          </a:solidFill>
+                          <a:latin typeface="Arial"/>
+                          <a:ea typeface="Arial"/>
+                          <a:cs typeface="Arial"/>
+                        </a:rPr>
+                        <a:t>Cost records and</a:t>
+                      </a:r>
+                    </a:p>
+                    <a:p>
+                      <a:r>
+                        <a:rPr sz="2025" b="0">
+                          <a:solidFill>
+                            <a:srgbClr val="17343C"/>
+                          </a:solidFill>
+                          <a:latin typeface="Arial"/>
+                          <a:ea typeface="Arial"/>
+                          <a:cs typeface="Arial"/>
+                        </a:rPr>
+                        <a:t>sustainability reports</a:t>
+                      </a:r>
+                    </a:p>
+                  </a:txBody>
+                  <a:tcPr marL="91440" marR="91440" marT="45720" marB="45720" anchor="ctr">
+                    <a:solidFill>
+                      <a:srgbClr val="FAFAF7"/>
+                    </a:solidFill>
+                  </a:tcPr>
+                </a:tc>
+                <a:tc>
+                  <a:txBody>
+                    <a:bodyPr lIns="133350" tIns="85725" rIns="133350" bIns="85725">
+                      <a:noAutofit/>
+                    </a:bodyPr>
+                    <a:lstStyle/>
+                    <a:p>
+                      <a:r>
+                        <a:rPr sz="2025" b="0">
+                          <a:solidFill>
+                            <a:srgbClr val="17343C"/>
+                          </a:solidFill>
+                          <a:latin typeface="Arial"/>
+                          <a:ea typeface="Arial"/>
+                          <a:cs typeface="Arial"/>
+                        </a:rPr>
+                        <a:t>Purchasing and</a:t>
+                      </a:r>
+                    </a:p>
+                    <a:p>
+                      <a:r>
+                        <a:rPr sz="2025" b="0">
+                          <a:solidFill>
+                            <a:srgbClr val="17343C"/>
+                          </a:solidFill>
+                          <a:latin typeface="Arial"/>
+                          <a:ea typeface="Arial"/>
+                          <a:cs typeface="Arial"/>
+                        </a:rPr>
+                        <a:t>payment processing</a:t>
+                      </a:r>
+                    </a:p>
+                  </a:txBody>
+                  <a:tcPr marL="91440" marR="91440" marT="45720" marB="45720" anchor="ctr">
+                    <a:solidFill>
+                      <a:srgbClr val="FAFAF7"/>
+                    </a:solidFill>
+                  </a:tcPr>
+                </a:tc>
+              </a:tr>
+              <a:tr h="733425">
+                <a:tc>
+                  <a:txBody>
+                    <a:bodyPr lIns="133350" tIns="85725" rIns="133350" bIns="85725">
+                      <a:noAutofit/>
+                    </a:bodyPr>
+                    <a:lstStyle/>
+                    <a:p>
+                      <a:r>
+                        <a:rPr sz="2025" b="0">
+                          <a:solidFill>
+                            <a:srgbClr val="17343C"/>
+                          </a:solidFill>
+                          <a:latin typeface="Arial"/>
+                          <a:ea typeface="Arial"/>
+                          <a:cs typeface="Arial"/>
+                        </a:rPr>
+                        <a:t>AI help</a:t>
+                      </a:r>
+                    </a:p>
+                  </a:txBody>
+                  <a:tcPr marL="91440" marR="91440" marT="45720" marB="45720" anchor="ctr">
+                    <a:solidFill>
+                      <a:srgbClr val="F0F4F3"/>
+                    </a:solidFill>
+                  </a:tcPr>
+                </a:tc>
+                <a:tc>
+                  <a:txBody>
+                    <a:bodyPr lIns="133350" tIns="85725" rIns="133350" bIns="85725">
+                      <a:noAutofit/>
+                    </a:bodyPr>
+                    <a:lstStyle/>
+                    <a:p>
+                      <a:r>
+                        <a:rPr sz="2025" b="0">
+                          <a:solidFill>
+                            <a:srgbClr val="17343C"/>
+                          </a:solidFill>
+                          <a:latin typeface="Arial"/>
+                          <a:ea typeface="Arial"/>
+                          <a:cs typeface="Arial"/>
+                        </a:rPr>
+                        <a:t>AI suggestions, assistant</a:t>
+                      </a:r>
+                    </a:p>
+                    <a:p>
+                      <a:r>
+                        <a:rPr sz="2025" b="0">
+                          <a:solidFill>
+                            <a:srgbClr val="17343C"/>
+                          </a:solidFill>
+                          <a:latin typeface="Arial"/>
+                          <a:ea typeface="Arial"/>
+                          <a:cs typeface="Arial"/>
+                        </a:rPr>
+                        <a:t>and reports</a:t>
+                      </a:r>
+                    </a:p>
+                  </a:txBody>
+                  <a:tcPr marL="91440" marR="91440" marT="45720" marB="45720" anchor="ctr">
+                    <a:solidFill>
+                      <a:srgbClr val="F0F4F3"/>
+                    </a:solidFill>
+                  </a:tcPr>
+                </a:tc>
+                <a:tc>
+                  <a:txBody>
+                    <a:bodyPr lIns="133350" tIns="85725" rIns="133350" bIns="85725">
+                      <a:noAutofit/>
+                    </a:bodyPr>
+                    <a:lstStyle/>
+                    <a:p>
+                      <a:r>
+                        <a:rPr sz="2025" b="0">
+                          <a:solidFill>
+                            <a:srgbClr val="17343C"/>
+                          </a:solidFill>
+                          <a:latin typeface="Arial"/>
+                          <a:ea typeface="Arial"/>
+                          <a:cs typeface="Arial"/>
+                        </a:rPr>
+                        <a:t>Training new AI models</a:t>
+                      </a:r>
+                    </a:p>
+                    <a:p>
+                      <a:r>
+                        <a:rPr sz="2025" b="0">
+                          <a:solidFill>
+                            <a:srgbClr val="17343C"/>
+                          </a:solidFill>
+                          <a:latin typeface="Arial"/>
+                          <a:ea typeface="Arial"/>
+                          <a:cs typeface="Arial"/>
+                        </a:rPr>
+                        <a:t>from scratch</a:t>
+                      </a:r>
+                    </a:p>
+                  </a:txBody>
+                  <a:tcPr marL="91440" marR="91440" marT="45720" marB="45720" anchor="ctr">
+                    <a:solidFill>
+                      <a:srgbClr val="F0F4F3"/>
+                    </a:solidFill>
+                  </a:tcPr>
+                </a:tc>
+              </a:tr>
+              <a:tr h="733425">
+                <a:tc>
+                  <a:txBody>
+                    <a:bodyPr lIns="133350" tIns="85725" rIns="133350" bIns="85725">
+                      <a:noAutofit/>
+                    </a:bodyPr>
+                    <a:lstStyle/>
+                    <a:p>
+                      <a:r>
+                        <a:rPr sz="2025" b="0">
+                          <a:solidFill>
+                            <a:srgbClr val="17343C"/>
+                          </a:solidFill>
+                          <a:latin typeface="Arial"/>
+                          <a:ea typeface="Arial"/>
+                          <a:cs typeface="Arial"/>
+                        </a:rPr>
+                        <a:t>Access</a:t>
+                      </a:r>
+                    </a:p>
+                  </a:txBody>
+                  <a:tcPr marL="91440" marR="91440" marT="45720" marB="45720" anchor="ctr">
+                    <a:solidFill>
+                      <a:srgbClr val="FAFAF7"/>
+                    </a:solidFill>
+                  </a:tcPr>
+                </a:tc>
+                <a:tc>
+                  <a:txBody>
+                    <a:bodyPr lIns="133350" tIns="85725" rIns="133350" bIns="85725">
+                      <a:noAutofit/>
+                    </a:bodyPr>
+                    <a:lstStyle/>
+                    <a:p>
+                      <a:r>
+                        <a:rPr sz="2025" b="0">
+                          <a:solidFill>
+                            <a:srgbClr val="17343C"/>
+                          </a:solidFill>
+                          <a:latin typeface="Arial"/>
+                          <a:ea typeface="Arial"/>
+                          <a:cs typeface="Arial"/>
+                        </a:rPr>
+                        <a:t>Responsive website,</a:t>
+                      </a:r>
+                    </a:p>
+                    <a:p>
+                      <a:r>
+                        <a:rPr sz="2025" b="0">
+                          <a:solidFill>
+                            <a:srgbClr val="17343C"/>
+                          </a:solidFill>
+                          <a:latin typeface="Arial"/>
+                          <a:ea typeface="Arial"/>
+                          <a:cs typeface="Arial"/>
+                        </a:rPr>
+                        <a:t>hosting and deployment</a:t>
+                      </a:r>
+                    </a:p>
+                  </a:txBody>
+                  <a:tcPr marL="91440" marR="91440" marT="45720" marB="45720" anchor="ctr">
+                    <a:solidFill>
+                      <a:srgbClr val="FAFAF7"/>
+                    </a:solidFill>
+                  </a:tcPr>
+                </a:tc>
+                <a:tc>
+                  <a:txBody>
+                    <a:bodyPr lIns="133350" tIns="85725" rIns="133350" bIns="85725">
+                      <a:noAutofit/>
+                    </a:bodyPr>
+                    <a:lstStyle/>
+                    <a:p>
+                      <a:r>
+                        <a:rPr sz="2025" b="0">
+                          <a:solidFill>
+                            <a:srgbClr val="17343C"/>
+                          </a:solidFill>
+                          <a:latin typeface="Arial"/>
+                          <a:ea typeface="Arial"/>
+                          <a:cs typeface="Arial"/>
+                        </a:rPr>
+                        <a:t>Separate iPhone</a:t>
+                      </a:r>
+                    </a:p>
+                    <a:p>
+                      <a:r>
+                        <a:rPr sz="2025" b="0">
+                          <a:solidFill>
+                            <a:srgbClr val="17343C"/>
+                          </a:solidFill>
+                          <a:latin typeface="Arial"/>
+                          <a:ea typeface="Arial"/>
+                          <a:cs typeface="Arial"/>
+                        </a:rPr>
+                        <a:t>and Android apps</a:t>
+                      </a:r>
+                    </a:p>
+                  </a:txBody>
+                  <a:tcPr marL="91440" marR="91440" marT="45720" marB="45720" anchor="ctr">
+                    <a:solidFill>
+                      <a:srgbClr val="FAFAF7"/>
+                    </a:solidFill>
+                  </a:tcPr>
+                </a:tc>
+              </a:tr>
+            </a:tbl>
+          </a:graphicData>
+        </a:graphic>
+      </p:graphicFrame>
+      <p:sp>
+        <p:nvSpPr>
+          <p:cNvPr id="5" name="scope-note">
+            <a:extLst xmlns:a="http://schemas.openxmlformats.org/drawingml/2006/main">
+              <a:ext uri="{FF2B5EF4-FFF2-40B4-BE49-F238E27FC236}">
+                <a16:creationId xmlns:a16="http://schemas.microsoft.com/office/drawing/2014/main" id="{0E234A50-5350-4EDC-8F11-D46AE4520282}"/>
+              </a:ext>
+            </a:extLst>
+          </p:cNvPr>
+          <p:cNvSpPr>
+            <a:spLocks xmlns:a="http://schemas.openxmlformats.org/drawingml/2006/main" noGrp="1"/>
+          </p:cNvSpPr>
+          <p:nvPr/>
+        </p:nvSpPr>
+        <p:spPr>
+          <a:xfrm xmlns:a="http://schemas.openxmlformats.org/drawingml/2006/main">
+            <a:off x="647700" y="6124575"/>
+            <a:ext cx="10896600" cy="371475"/>
+          </a:xfrm>
+          <a:prstGeom xmlns:a="http://schemas.openxmlformats.org/drawingml/2006/main" prst="rect">
+            <a:avLst/>
+          </a:prstGeom>
+          <a:noFill xmlns:a="http://schemas.openxmlformats.org/drawingml/2006/main"/>
+          <a:ln xmlns:a="http://schemas.openxmlformats.org/drawingml/2006/main" w="0">
+            <a:noFill/>
+          </a:ln>
+        </p:spPr>
+        <p:txBody>
+          <a:bodyPr xmlns:a="http://schemas.openxmlformats.org/drawingml/2006/main" wrap="square" lIns="0" tIns="0" rIns="0" bIns="0" anchor="t">
+            <a:noAutofit/>
+          </a:bodyPr>
+          <a:lstStyle xmlns:a="http://schemas.openxmlformats.org/drawingml/2006/main"/>
           <a:p xmlns:a="http://schemas.openxmlformats.org/drawingml/2006/main">
             <a:pPr algn="l">
-              <a:defRPr sz="2100" b="1">
+              <a:defRPr sz="1950" b="1">
                 <a:solidFill>
                   <a:srgbClr val="17343C"/>
                 </a:solidFill>
@@ -2937,7 +4078,7 @@
               </a:defRPr>
             </a:pPr>
             <a:r>
-              <a:rPr sz="2100" b="1">
+              <a:rPr sz="1950" b="1">
                 <a:solidFill>
                   <a:srgbClr val="17343C"/>
                 </a:solidFill>
@@ -2945,7 +4086,7 @@
                 <a:ea typeface="Arial"/>
                 <a:cs typeface="Arial"/>
               </a:rPr>
-              <a:t>still need confirmation.</a:t>
+              <a:t>The monitor example is a small test case within this wider scope.</a:t>
             </a:r>
           </a:p>
         </p:txBody>
@@ -2953,7 +4094,7 @@
     </p:spTree>
     <p:extLst>
       <p:ext uri="{BB962C8B-B14F-4D97-AF65-F5344CB8AC3E}">
-        <p14:creationId xmlns:p14="http://schemas.microsoft.com/office/powerpoint/2010/main" val="2116354281"/>
+        <p14:creationId xmlns:p14="http://schemas.microsoft.com/office/powerpoint/2010/main" val="1192528536"/>
       </p:ext>
     </p:extLst>
   </p:cSld>
@@ -2981,10 +4122,10 @@
       </p:grpSpPr>
       <p:sp>
         <p:nvSpPr>
-          <p:cNvPr id="6" name="title">
+          <p:cNvPr id="5" name="title">
             <a:extLst xmlns:a="http://schemas.openxmlformats.org/drawingml/2006/main">
               <a:ext uri="{FF2B5EF4-FFF2-40B4-BE49-F238E27FC236}">
-                <a16:creationId xmlns:a16="http://schemas.microsoft.com/office/drawing/2014/main" id="{5DDC7358-A29B-4159-BB8F-F8A455D304D7}"/>
+                <a16:creationId xmlns:a16="http://schemas.microsoft.com/office/drawing/2014/main" id="{53C51354-42AB-4162-AE0D-2B44540F5C27}"/>
               </a:ext>
             </a:extLst>
           </p:cNvPr>
@@ -2995,8 +4136,8 @@
         </p:nvSpPr>
         <p:spPr>
           <a:xfrm xmlns:a="http://schemas.openxmlformats.org/drawingml/2006/main">
-            <a:off x="685800" y="514350"/>
-            <a:ext cx="10820400" cy="685800"/>
+            <a:off x="647700" y="457200"/>
+            <a:ext cx="10896600" cy="714375"/>
           </a:xfrm>
           <a:prstGeom xmlns:a="http://schemas.openxmlformats.org/drawingml/2006/main" prst="rect">
             <a:avLst/>
@@ -3031,7 +4172,7 @@
                 <a:ea typeface="Arial"/>
                 <a:cs typeface="Arial"/>
               </a:rPr>
-              <a:t>How we will measure the change</a:t>
+              <a:t>What we will compare at KU</a:t>
             </a:r>
           </a:p>
         </p:txBody>
@@ -3041,7 +4182,7 @@
           <p:cNvPr id="2" name="presenter">
             <a:extLst xmlns:a="http://schemas.openxmlformats.org/drawingml/2006/main">
               <a:ext uri="{FF2B5EF4-FFF2-40B4-BE49-F238E27FC236}">
-                <a16:creationId xmlns:a16="http://schemas.microsoft.com/office/drawing/2014/main" id="{B265DEE1-0A0A-4276-A6ED-0B7B5F477BE5}"/>
+                <a16:creationId xmlns:a16="http://schemas.microsoft.com/office/drawing/2014/main" id="{824885A5-425E-4E9C-A3F0-A90BAEB1910D}"/>
               </a:ext>
             </a:extLst>
           </p:cNvPr>
@@ -3052,8 +4193,8 @@
         </p:nvSpPr>
         <p:spPr>
           <a:xfrm xmlns:a="http://schemas.openxmlformats.org/drawingml/2006/main">
-            <a:off x="9906000" y="6400800"/>
-            <a:ext cx="1600200" cy="247650"/>
+            <a:off x="10144125" y="6429375"/>
+            <a:ext cx="1400175" cy="238125"/>
           </a:xfrm>
           <a:prstGeom xmlns:a="http://schemas.openxmlformats.org/drawingml/2006/main" prst="rect">
             <a:avLst/>
@@ -3070,7 +4211,7 @@
           <a:lstStyle xmlns:a="http://schemas.openxmlformats.org/drawingml/2006/main"/>
           <a:p xmlns:a="http://schemas.openxmlformats.org/drawingml/2006/main">
             <a:pPr algn="l">
-              <a:defRPr sz="1425" b="0">
+              <a:defRPr sz="1350" b="0">
                 <a:solidFill>
                   <a:srgbClr val="526264"/>
                 </a:solidFill>
@@ -3080,7 +4221,7 @@
               </a:defRPr>
             </a:pPr>
             <a:r>
-              <a:rPr sz="1425" b="0">
+              <a:rPr sz="1350" b="0">
                 <a:solidFill>
                   <a:srgbClr val="526264"/>
                 </a:solidFill>
@@ -3088,17 +4229,727 @@
                 <a:ea typeface="Arial"/>
                 <a:cs typeface="Arial"/>
               </a:rPr>
-              <a:t>Ghith   4</a:t>
+              <a:t>Zayed   4</a:t>
             </a:r>
           </a:p>
         </p:txBody>
       </p:sp>
+      <p:graphicFrame>
+        <p:nvGraphicFramePr>
+          <p:cNvPr id="7" name=""/>
+          <p:cNvGraphicFramePr/>
+          <p:nvPr/>
+        </p:nvGraphicFramePr>
+        <p:xfrm>
+          <a:off xmlns:a="http://schemas.openxmlformats.org/drawingml/2006/main" x="647700" y="1657350"/>
+          <a:ext xmlns:a="http://schemas.openxmlformats.org/drawingml/2006/main" cx="10896600" cy="4248150"/>
+        </p:xfrm>
+        <a:graphic xmlns:a="http://schemas.openxmlformats.org/drawingml/2006/main">
+          <a:graphicData uri="http://schemas.openxmlformats.org/drawingml/2006/table">
+            <a:tbl>
+              <a:tblPr firstRow="0" firstCol="0" bandRow="0"/>
+              <a:tblGrid>
+                <a:gridCol w="1771650"/>
+                <a:gridCol w="2952750"/>
+                <a:gridCol w="2714625"/>
+                <a:gridCol w="3457575"/>
+              </a:tblGrid>
+              <a:tr h="552450">
+                <a:tc>
+                  <a:txBody>
+                    <a:bodyPr lIns="133350" tIns="85725" rIns="133350" bIns="85725">
+                      <a:noAutofit/>
+                    </a:bodyPr>
+                    <a:lstStyle/>
+                    <a:p>
+                      <a:r>
+                        <a:rPr sz="1875" b="1">
+                          <a:solidFill>
+                            <a:srgbClr val="FFFFFF"/>
+                          </a:solidFill>
+                          <a:latin typeface="Arial"/>
+                          <a:ea typeface="Arial"/>
+                          <a:cs typeface="Arial"/>
+                        </a:rPr>
+                        <a:t>Task</a:t>
+                      </a:r>
+                    </a:p>
+                  </a:txBody>
+                  <a:tcPr marL="91440" marR="91440" marT="45720" marB="45720" anchor="ctr">
+                    <a:solidFill>
+                      <a:srgbClr val="17343C"/>
+                    </a:solidFill>
+                  </a:tcPr>
+                </a:tc>
+                <a:tc>
+                  <a:txBody>
+                    <a:bodyPr lIns="133350" tIns="85725" rIns="133350" bIns="85725">
+                      <a:noAutofit/>
+                    </a:bodyPr>
+                    <a:lstStyle/>
+                    <a:p>
+                      <a:r>
+                        <a:rPr sz="1875" b="1">
+                          <a:solidFill>
+                            <a:srgbClr val="FFFFFF"/>
+                          </a:solidFill>
+                          <a:latin typeface="Arial"/>
+                          <a:ea typeface="Arial"/>
+                          <a:cs typeface="Arial"/>
+                        </a:rPr>
+                        <a:t>Current KU process</a:t>
+                      </a:r>
+                    </a:p>
+                  </a:txBody>
+                  <a:tcPr marL="91440" marR="91440" marT="45720" marB="45720" anchor="ctr">
+                    <a:solidFill>
+                      <a:srgbClr val="17343C"/>
+                    </a:solidFill>
+                  </a:tcPr>
+                </a:tc>
+                <a:tc>
+                  <a:txBody>
+                    <a:bodyPr lIns="133350" tIns="85725" rIns="133350" bIns="85725">
+                      <a:noAutofit/>
+                    </a:bodyPr>
+                    <a:lstStyle/>
+                    <a:p>
+                      <a:r>
+                        <a:rPr sz="1875" b="1">
+                          <a:solidFill>
+                            <a:srgbClr val="FFFFFF"/>
+                          </a:solidFill>
+                          <a:latin typeface="Arial"/>
+                          <a:ea typeface="Arial"/>
+                          <a:cs typeface="Arial"/>
+                        </a:rPr>
+                        <a:t>Our core tool</a:t>
+                      </a:r>
+                    </a:p>
+                  </a:txBody>
+                  <a:tcPr marL="91440" marR="91440" marT="45720" marB="45720" anchor="ctr">
+                    <a:solidFill>
+                      <a:srgbClr val="17343C"/>
+                    </a:solidFill>
+                  </a:tcPr>
+                </a:tc>
+                <a:tc>
+                  <a:txBody>
+                    <a:bodyPr lIns="133350" tIns="85725" rIns="133350" bIns="85725">
+                      <a:noAutofit/>
+                    </a:bodyPr>
+                    <a:lstStyle/>
+                    <a:p>
+                      <a:r>
+                        <a:rPr sz="1875" b="1">
+                          <a:solidFill>
+                            <a:srgbClr val="FFFFFF"/>
+                          </a:solidFill>
+                          <a:latin typeface="Arial"/>
+                          <a:ea typeface="Arial"/>
+                          <a:cs typeface="Arial"/>
+                        </a:rPr>
+                        <a:t>Added AI help</a:t>
+                      </a:r>
+                    </a:p>
+                  </a:txBody>
+                  <a:tcPr marL="91440" marR="91440" marT="45720" marB="45720" anchor="ctr">
+                    <a:solidFill>
+                      <a:srgbClr val="17343C"/>
+                    </a:solidFill>
+                  </a:tcPr>
+                </a:tc>
+              </a:tr>
+              <a:tr h="847725">
+                <a:tc>
+                  <a:txBody>
+                    <a:bodyPr lIns="133350" tIns="85725" rIns="133350" bIns="85725">
+                      <a:noAutofit/>
+                    </a:bodyPr>
+                    <a:lstStyle/>
+                    <a:p>
+                      <a:r>
+                        <a:rPr sz="1875" b="0">
+                          <a:solidFill>
+                            <a:srgbClr val="17343C"/>
+                          </a:solidFill>
+                          <a:latin typeface="Arial"/>
+                          <a:ea typeface="Arial"/>
+                          <a:cs typeface="Arial"/>
+                        </a:rPr>
+                        <a:t>Find an item</a:t>
+                      </a:r>
+                    </a:p>
+                  </a:txBody>
+                  <a:tcPr marL="91440" marR="91440" marT="45720" marB="45720" anchor="ctr">
+                    <a:solidFill>
+                      <a:srgbClr val="FAFAF7"/>
+                    </a:solidFill>
+                  </a:tcPr>
+                </a:tc>
+                <a:tc>
+                  <a:txBody>
+                    <a:bodyPr lIns="133350" tIns="85725" rIns="133350" bIns="85725">
+                      <a:noAutofit/>
+                    </a:bodyPr>
+                    <a:lstStyle/>
+                    <a:p>
+                      <a:r>
+                        <a:rPr sz="1875" b="0">
+                          <a:solidFill>
+                            <a:srgbClr val="17343C"/>
+                          </a:solidFill>
+                          <a:latin typeface="Arial"/>
+                          <a:ea typeface="Arial"/>
+                          <a:cs typeface="Arial"/>
+                        </a:rPr>
+                        <a:t>Confirm search</a:t>
+                      </a:r>
+                    </a:p>
+                    <a:p>
+                      <a:r>
+                        <a:rPr sz="1875" b="0">
+                          <a:solidFill>
+                            <a:srgbClr val="17343C"/>
+                          </a:solidFill>
+                          <a:latin typeface="Arial"/>
+                          <a:ea typeface="Arial"/>
+                          <a:cs typeface="Arial"/>
+                        </a:rPr>
+                        <a:t>and availability</a:t>
+                      </a:r>
+                    </a:p>
+                  </a:txBody>
+                  <a:tcPr marL="91440" marR="91440" marT="45720" marB="45720" anchor="ctr">
+                    <a:solidFill>
+                      <a:srgbClr val="FAFAF7"/>
+                    </a:solidFill>
+                  </a:tcPr>
+                </a:tc>
+                <a:tc>
+                  <a:txBody>
+                    <a:bodyPr lIns="133350" tIns="85725" rIns="133350" bIns="85725">
+                      <a:noAutofit/>
+                    </a:bodyPr>
+                    <a:lstStyle/>
+                    <a:p>
+                      <a:r>
+                        <a:rPr sz="1875" b="0">
+                          <a:solidFill>
+                            <a:srgbClr val="17343C"/>
+                          </a:solidFill>
+                          <a:latin typeface="Arial"/>
+                          <a:ea typeface="Arial"/>
+                          <a:cs typeface="Arial"/>
+                        </a:rPr>
+                        <a:t>Keywords and</a:t>
+                      </a:r>
+                    </a:p>
+                    <a:p>
+                      <a:r>
+                        <a:rPr sz="1875" b="0">
+                          <a:solidFill>
+                            <a:srgbClr val="17343C"/>
+                          </a:solidFill>
+                          <a:latin typeface="Arial"/>
+                          <a:ea typeface="Arial"/>
+                          <a:cs typeface="Arial"/>
+                        </a:rPr>
+                        <a:t>filters</a:t>
+                      </a:r>
+                    </a:p>
+                  </a:txBody>
+                  <a:tcPr marL="91440" marR="91440" marT="45720" marB="45720" anchor="ctr">
+                    <a:solidFill>
+                      <a:srgbClr val="FAFAF7"/>
+                    </a:solidFill>
+                  </a:tcPr>
+                </a:tc>
+                <a:tc>
+                  <a:txBody>
+                    <a:bodyPr lIns="133350" tIns="85725" rIns="133350" bIns="85725">
+                      <a:noAutofit/>
+                    </a:bodyPr>
+                    <a:lstStyle/>
+                    <a:p>
+                      <a:r>
+                        <a:rPr sz="1875" b="0">
+                          <a:solidFill>
+                            <a:srgbClr val="17343C"/>
+                          </a:solidFill>
+                          <a:latin typeface="Arial"/>
+                          <a:ea typeface="Arial"/>
+                          <a:cs typeface="Arial"/>
+                        </a:rPr>
+                        <a:t>Suggest matches</a:t>
+                      </a:r>
+                    </a:p>
+                    <a:p>
+                      <a:r>
+                        <a:rPr sz="1875" b="0">
+                          <a:solidFill>
+                            <a:srgbClr val="17343C"/>
+                          </a:solidFill>
+                          <a:latin typeface="Arial"/>
+                          <a:ea typeface="Arial"/>
+                          <a:cs typeface="Arial"/>
+                        </a:rPr>
+                        <a:t>by meaning</a:t>
+                      </a:r>
+                    </a:p>
+                  </a:txBody>
+                  <a:tcPr marL="91440" marR="91440" marT="45720" marB="45720" anchor="ctr">
+                    <a:solidFill>
+                      <a:srgbClr val="FAFAF7"/>
+                    </a:solidFill>
+                  </a:tcPr>
+                </a:tc>
+              </a:tr>
+              <a:tr h="981075">
+                <a:tc>
+                  <a:txBody>
+                    <a:bodyPr lIns="133350" tIns="85725" rIns="133350" bIns="85725">
+                      <a:noAutofit/>
+                    </a:bodyPr>
+                    <a:lstStyle/>
+                    <a:p>
+                      <a:r>
+                        <a:rPr sz="1875" b="0">
+                          <a:solidFill>
+                            <a:srgbClr val="17343C"/>
+                          </a:solidFill>
+                          <a:latin typeface="Arial"/>
+                          <a:ea typeface="Arial"/>
+                          <a:cs typeface="Arial"/>
+                        </a:rPr>
+                        <a:t>Send a request</a:t>
+                      </a:r>
+                    </a:p>
+                  </a:txBody>
+                  <a:tcPr marL="91440" marR="91440" marT="45720" marB="45720" anchor="ctr">
+                    <a:solidFill>
+                      <a:srgbClr val="F0F4F3"/>
+                    </a:solidFill>
+                  </a:tcPr>
+                </a:tc>
+                <a:tc>
+                  <a:txBody>
+                    <a:bodyPr lIns="133350" tIns="85725" rIns="133350" bIns="85725">
+                      <a:noAutofit/>
+                    </a:bodyPr>
+                    <a:lstStyle/>
+                    <a:p>
+                      <a:r>
+                        <a:rPr sz="1875" b="0">
+                          <a:solidFill>
+                            <a:srgbClr val="17343C"/>
+                          </a:solidFill>
+                          <a:latin typeface="Arial"/>
+                          <a:ea typeface="Arial"/>
+                          <a:cs typeface="Arial"/>
+                        </a:rPr>
+                        <a:t>Confirm entry</a:t>
+                      </a:r>
+                    </a:p>
+                    <a:p>
+                      <a:r>
+                        <a:rPr sz="1875" b="0">
+                          <a:solidFill>
+                            <a:srgbClr val="17343C"/>
+                          </a:solidFill>
+                          <a:latin typeface="Arial"/>
+                          <a:ea typeface="Arial"/>
+                          <a:cs typeface="Arial"/>
+                        </a:rPr>
+                        <a:t>and routing</a:t>
+                      </a:r>
+                    </a:p>
+                  </a:txBody>
+                  <a:tcPr marL="91440" marR="91440" marT="45720" marB="45720" anchor="ctr">
+                    <a:solidFill>
+                      <a:srgbClr val="F0F4F3"/>
+                    </a:solidFill>
+                  </a:tcPr>
+                </a:tc>
+                <a:tc>
+                  <a:txBody>
+                    <a:bodyPr lIns="133350" tIns="85725" rIns="133350" bIns="85725">
+                      <a:noAutofit/>
+                    </a:bodyPr>
+                    <a:lstStyle/>
+                    <a:p>
+                      <a:r>
+                        <a:rPr sz="1875" b="0">
+                          <a:solidFill>
+                            <a:srgbClr val="17343C"/>
+                          </a:solidFill>
+                          <a:latin typeface="Arial"/>
+                          <a:ea typeface="Arial"/>
+                          <a:cs typeface="Arial"/>
+                        </a:rPr>
+                        <a:t>A form and</a:t>
+                      </a:r>
+                    </a:p>
+                    <a:p>
+                      <a:r>
+                        <a:rPr sz="1875" b="0">
+                          <a:solidFill>
+                            <a:srgbClr val="17343C"/>
+                          </a:solidFill>
+                          <a:latin typeface="Arial"/>
+                          <a:ea typeface="Arial"/>
+                          <a:cs typeface="Arial"/>
+                        </a:rPr>
+                        <a:t>request status</a:t>
+                      </a:r>
+                    </a:p>
+                  </a:txBody>
+                  <a:tcPr marL="91440" marR="91440" marT="45720" marB="45720" anchor="ctr">
+                    <a:solidFill>
+                      <a:srgbClr val="F0F4F3"/>
+                    </a:solidFill>
+                  </a:tcPr>
+                </a:tc>
+                <a:tc>
+                  <a:txBody>
+                    <a:bodyPr lIns="133350" tIns="85725" rIns="133350" bIns="85725">
+                      <a:noAutofit/>
+                    </a:bodyPr>
+                    <a:lstStyle/>
+                    <a:p>
+                      <a:r>
+                        <a:rPr sz="1875" b="0">
+                          <a:solidFill>
+                            <a:srgbClr val="17343C"/>
+                          </a:solidFill>
+                          <a:latin typeface="Arial"/>
+                          <a:ea typeface="Arial"/>
+                          <a:cs typeface="Arial"/>
+                        </a:rPr>
+                        <a:t>Help fill the request</a:t>
+                      </a:r>
+                    </a:p>
+                    <a:p>
+                      <a:r>
+                        <a:rPr sz="1875" b="0">
+                          <a:solidFill>
+                            <a:srgbClr val="17343C"/>
+                          </a:solidFill>
+                          <a:latin typeface="Arial"/>
+                          <a:ea typeface="Arial"/>
+                          <a:cs typeface="Arial"/>
+                        </a:rPr>
+                        <a:t>with user confirmation</a:t>
+                      </a:r>
+                    </a:p>
+                  </a:txBody>
+                  <a:tcPr marL="91440" marR="91440" marT="45720" marB="45720" anchor="ctr">
+                    <a:solidFill>
+                      <a:srgbClr val="F0F4F3"/>
+                    </a:solidFill>
+                  </a:tcPr>
+                </a:tc>
+              </a:tr>
+              <a:tr h="981075">
+                <a:tc>
+                  <a:txBody>
+                    <a:bodyPr lIns="133350" tIns="85725" rIns="133350" bIns="85725">
+                      <a:noAutofit/>
+                    </a:bodyPr>
+                    <a:lstStyle/>
+                    <a:p>
+                      <a:r>
+                        <a:rPr sz="1875" b="0">
+                          <a:solidFill>
+                            <a:srgbClr val="17343C"/>
+                          </a:solidFill>
+                          <a:latin typeface="Arial"/>
+                          <a:ea typeface="Arial"/>
+                          <a:cs typeface="Arial"/>
+                        </a:rPr>
+                        <a:t>Approve a transfer</a:t>
+                      </a:r>
+                    </a:p>
+                  </a:txBody>
+                  <a:tcPr marL="91440" marR="91440" marT="45720" marB="45720" anchor="ctr">
+                    <a:solidFill>
+                      <a:srgbClr val="FAFAF7"/>
+                    </a:solidFill>
+                  </a:tcPr>
+                </a:tc>
+                <a:tc>
+                  <a:txBody>
+                    <a:bodyPr lIns="133350" tIns="85725" rIns="133350" bIns="85725">
+                      <a:noAutofit/>
+                    </a:bodyPr>
+                    <a:lstStyle/>
+                    <a:p>
+                      <a:r>
+                        <a:rPr sz="1875" b="0">
+                          <a:solidFill>
+                            <a:srgbClr val="17343C"/>
+                          </a:solidFill>
+                          <a:latin typeface="Arial"/>
+                          <a:ea typeface="Arial"/>
+                          <a:cs typeface="Arial"/>
+                        </a:rPr>
+                        <a:t>Confirm rules</a:t>
+                      </a:r>
+                    </a:p>
+                    <a:p>
+                      <a:r>
+                        <a:rPr sz="1875" b="0">
+                          <a:solidFill>
+                            <a:srgbClr val="17343C"/>
+                          </a:solidFill>
+                          <a:latin typeface="Arial"/>
+                          <a:ea typeface="Arial"/>
+                          <a:cs typeface="Arial"/>
+                        </a:rPr>
+                        <a:t>and decision owners</a:t>
+                      </a:r>
+                    </a:p>
+                  </a:txBody>
+                  <a:tcPr marL="91440" marR="91440" marT="45720" marB="45720" anchor="ctr">
+                    <a:solidFill>
+                      <a:srgbClr val="FAFAF7"/>
+                    </a:solidFill>
+                  </a:tcPr>
+                </a:tc>
+                <a:tc>
+                  <a:txBody>
+                    <a:bodyPr lIns="133350" tIns="85725" rIns="133350" bIns="85725">
+                      <a:noAutofit/>
+                    </a:bodyPr>
+                    <a:lstStyle/>
+                    <a:p>
+                      <a:r>
+                        <a:rPr sz="1875" b="0">
+                          <a:solidFill>
+                            <a:srgbClr val="17343C"/>
+                          </a:solidFill>
+                          <a:latin typeface="Arial"/>
+                          <a:ea typeface="Arial"/>
+                          <a:cs typeface="Arial"/>
+                        </a:rPr>
+                        <a:t>Staff approve</a:t>
+                      </a:r>
+                    </a:p>
+                    <a:p>
+                      <a:r>
+                        <a:rPr sz="1875" b="0">
+                          <a:solidFill>
+                            <a:srgbClr val="17343C"/>
+                          </a:solidFill>
+                          <a:latin typeface="Arial"/>
+                          <a:ea typeface="Arial"/>
+                          <a:cs typeface="Arial"/>
+                        </a:rPr>
+                        <a:t>and record decisions</a:t>
+                      </a:r>
+                    </a:p>
+                  </a:txBody>
+                  <a:tcPr marL="91440" marR="91440" marT="45720" marB="45720" anchor="ctr">
+                    <a:solidFill>
+                      <a:srgbClr val="FAFAF7"/>
+                    </a:solidFill>
+                  </a:tcPr>
+                </a:tc>
+                <a:tc>
+                  <a:txBody>
+                    <a:bodyPr lIns="133350" tIns="85725" rIns="133350" bIns="85725">
+                      <a:noAutofit/>
+                    </a:bodyPr>
+                    <a:lstStyle/>
+                    <a:p>
+                      <a:r>
+                        <a:rPr sz="1875" b="0">
+                          <a:solidFill>
+                            <a:srgbClr val="17343C"/>
+                          </a:solidFill>
+                          <a:latin typeface="Arial"/>
+                          <a:ea typeface="Arial"/>
+                          <a:cs typeface="Arial"/>
+                        </a:rPr>
+                        <a:t>Suggestions only</a:t>
+                      </a:r>
+                    </a:p>
+                    <a:p>
+                      <a:r>
+                        <a:rPr sz="1875" b="0">
+                          <a:solidFill>
+                            <a:srgbClr val="17343C"/>
+                          </a:solidFill>
+                          <a:latin typeface="Arial"/>
+                          <a:ea typeface="Arial"/>
+                          <a:cs typeface="Arial"/>
+                        </a:rPr>
+                        <a:t>Staff still decide</a:t>
+                      </a:r>
+                    </a:p>
+                  </a:txBody>
+                  <a:tcPr marL="91440" marR="91440" marT="45720" marB="45720" anchor="ctr">
+                    <a:solidFill>
+                      <a:srgbClr val="FAFAF7"/>
+                    </a:solidFill>
+                  </a:tcPr>
+                </a:tc>
+              </a:tr>
+              <a:tr h="885825">
+                <a:tc>
+                  <a:txBody>
+                    <a:bodyPr lIns="133350" tIns="85725" rIns="133350" bIns="85725">
+                      <a:noAutofit/>
+                    </a:bodyPr>
+                    <a:lstStyle/>
+                    <a:p>
+                      <a:r>
+                        <a:rPr sz="1875" b="0">
+                          <a:solidFill>
+                            <a:srgbClr val="17343C"/>
+                          </a:solidFill>
+                          <a:latin typeface="Arial"/>
+                          <a:ea typeface="Arial"/>
+                          <a:cs typeface="Arial"/>
+                        </a:rPr>
+                        <a:t>Prepare reports</a:t>
+                      </a:r>
+                    </a:p>
+                  </a:txBody>
+                  <a:tcPr marL="91440" marR="91440" marT="45720" marB="45720" anchor="ctr">
+                    <a:solidFill>
+                      <a:srgbClr val="F0F4F3"/>
+                    </a:solidFill>
+                  </a:tcPr>
+                </a:tc>
+                <a:tc>
+                  <a:txBody>
+                    <a:bodyPr lIns="133350" tIns="85725" rIns="133350" bIns="85725">
+                      <a:noAutofit/>
+                    </a:bodyPr>
+                    <a:lstStyle/>
+                    <a:p>
+                      <a:r>
+                        <a:rPr sz="1875" b="0">
+                          <a:solidFill>
+                            <a:srgbClr val="17343C"/>
+                          </a:solidFill>
+                          <a:latin typeface="Arial"/>
+                          <a:ea typeface="Arial"/>
+                          <a:cs typeface="Arial"/>
+                        </a:rPr>
+                        <a:t>Confirm existing</a:t>
+                      </a:r>
+                    </a:p>
+                    <a:p>
+                      <a:r>
+                        <a:rPr sz="1875" b="0">
+                          <a:solidFill>
+                            <a:srgbClr val="17343C"/>
+                          </a:solidFill>
+                          <a:latin typeface="Arial"/>
+                          <a:ea typeface="Arial"/>
+                          <a:cs typeface="Arial"/>
+                        </a:rPr>
+                        <a:t>reports</a:t>
+                      </a:r>
+                    </a:p>
+                  </a:txBody>
+                  <a:tcPr marL="91440" marR="91440" marT="45720" marB="45720" anchor="ctr">
+                    <a:solidFill>
+                      <a:srgbClr val="F0F4F3"/>
+                    </a:solidFill>
+                  </a:tcPr>
+                </a:tc>
+                <a:tc>
+                  <a:txBody>
+                    <a:bodyPr lIns="133350" tIns="85725" rIns="133350" bIns="85725">
+                      <a:noAutofit/>
+                    </a:bodyPr>
+                    <a:lstStyle/>
+                    <a:p>
+                      <a:r>
+                        <a:rPr sz="1875" b="0">
+                          <a:solidFill>
+                            <a:srgbClr val="17343C"/>
+                          </a:solidFill>
+                          <a:latin typeface="Arial"/>
+                          <a:ea typeface="Arial"/>
+                          <a:cs typeface="Arial"/>
+                        </a:rPr>
+                        <a:t>Recorded totals</a:t>
+                      </a:r>
+                    </a:p>
+                    <a:p>
+                      <a:r>
+                        <a:rPr sz="1875" b="0">
+                          <a:solidFill>
+                            <a:srgbClr val="17343C"/>
+                          </a:solidFill>
+                          <a:latin typeface="Arial"/>
+                          <a:ea typeface="Arial"/>
+                          <a:cs typeface="Arial"/>
+                        </a:rPr>
+                        <a:t>and standard reports</a:t>
+                      </a:r>
+                    </a:p>
+                  </a:txBody>
+                  <a:tcPr marL="91440" marR="91440" marT="45720" marB="45720" anchor="ctr">
+                    <a:solidFill>
+                      <a:srgbClr val="F0F4F3"/>
+                    </a:solidFill>
+                  </a:tcPr>
+                </a:tc>
+                <a:tc>
+                  <a:txBody>
+                    <a:bodyPr lIns="133350" tIns="85725" rIns="133350" bIns="85725">
+                      <a:noAutofit/>
+                    </a:bodyPr>
+                    <a:lstStyle/>
+                    <a:p>
+                      <a:r>
+                        <a:rPr sz="1875" b="0">
+                          <a:solidFill>
+                            <a:srgbClr val="17343C"/>
+                          </a:solidFill>
+                          <a:latin typeface="Arial"/>
+                          <a:ea typeface="Arial"/>
+                          <a:cs typeface="Arial"/>
+                        </a:rPr>
+                        <a:t>Written summaries</a:t>
+                      </a:r>
+                    </a:p>
+                    <a:p>
+                      <a:r>
+                        <a:rPr sz="1875" b="0">
+                          <a:solidFill>
+                            <a:srgbClr val="17343C"/>
+                          </a:solidFill>
+                          <a:latin typeface="Arial"/>
+                          <a:ea typeface="Arial"/>
+                          <a:cs typeface="Arial"/>
+                        </a:rPr>
+                        <a:t>for staff review</a:t>
+                      </a:r>
+                    </a:p>
+                  </a:txBody>
+                  <a:tcPr marL="91440" marR="91440" marT="45720" marB="45720" anchor="ctr">
+                    <a:solidFill>
+                      <a:srgbClr val="F0F4F3"/>
+                    </a:solidFill>
+                  </a:tcPr>
+                </a:tc>
+              </a:tr>
+            </a:tbl>
+          </a:graphicData>
+        </a:graphic>
+      </p:graphicFrame>
       <p:sp>
         <p:nvSpPr>
-          <p:cNvPr id="3" name="method">
+          <p:cNvPr id="4" name="comparison-note">
             <a:extLst xmlns:a="http://schemas.openxmlformats.org/drawingml/2006/main">
               <a:ext uri="{FF2B5EF4-FFF2-40B4-BE49-F238E27FC236}">
-                <a16:creationId xmlns:a16="http://schemas.microsoft.com/office/drawing/2014/main" id="{56356787-1A51-4D50-90DD-83EC0C7060BD}"/>
+                <a16:creationId xmlns:a16="http://schemas.microsoft.com/office/drawing/2014/main" id="{E9384C5B-0BFA-4E90-AB4F-D3E8E4C2711D}"/>
               </a:ext>
             </a:extLst>
           </p:cNvPr>
@@ -3109,8 +4960,8 @@
         </p:nvSpPr>
         <p:spPr>
           <a:xfrm xmlns:a="http://schemas.openxmlformats.org/drawingml/2006/main">
-            <a:off x="685800" y="1495425"/>
-            <a:ext cx="10820400" cy="590550"/>
+            <a:off x="647700" y="5991225"/>
+            <a:ext cx="10896600" cy="409575"/>
           </a:xfrm>
           <a:prstGeom xmlns:a="http://schemas.openxmlformats.org/drawingml/2006/main" prst="rect">
             <a:avLst/>
@@ -3127,9 +4978,9 @@
           <a:lstStyle xmlns:a="http://schemas.openxmlformats.org/drawingml/2006/main"/>
           <a:p xmlns:a="http://schemas.openxmlformats.org/drawingml/2006/main">
             <a:pPr algn="l">
-              <a:defRPr sz="2175" b="1">
-                <a:solidFill>
-                  <a:srgbClr val="26746D"/>
+              <a:defRPr sz="1950" b="1">
+                <a:solidFill>
+                  <a:srgbClr val="17343C"/>
                 </a:solidFill>
                 <a:latin typeface="Arial"/>
                 <a:ea typeface="Arial"/>
@@ -3137,310 +4988,15 @@
               </a:defRPr>
             </a:pPr>
             <a:r>
-              <a:rPr sz="2175" b="1">
-                <a:solidFill>
-                  <a:srgbClr val="26746D"/>
+              <a:rPr sz="1950" b="1">
+                <a:solidFill>
+                  <a:srgbClr val="17343C"/>
                 </a:solidFill>
                 <a:latin typeface="Arial"/>
                 <a:ea typeface="Arial"/>
                 <a:cs typeface="Arial"/>
               </a:rPr>
-              <a:t>Same request and same correct outcome in each version</a:t>
-            </a:r>
-          </a:p>
-        </p:txBody>
-      </p:sp>
-      <p:graphicFrame>
-        <p:nvGraphicFramePr>
-          <p:cNvPr id="9" name=""/>
-          <p:cNvGraphicFramePr/>
-          <p:nvPr/>
-        </p:nvGraphicFramePr>
-        <p:xfrm>
-          <a:off xmlns:a="http://schemas.openxmlformats.org/drawingml/2006/main" x="685800" y="2419350"/>
-          <a:ext xmlns:a="http://schemas.openxmlformats.org/drawingml/2006/main" cx="10820400" cy="3028950"/>
-        </p:xfrm>
-        <a:graphic xmlns:a="http://schemas.openxmlformats.org/drawingml/2006/main">
-          <a:graphicData uri="http://schemas.openxmlformats.org/drawingml/2006/table">
-            <a:tbl>
-              <a:tblPr firstRow="0" firstCol="0" bandRow="0"/>
-              <a:tblGrid>
-                <a:gridCol w="4010025"/>
-                <a:gridCol w="6810375"/>
-              </a:tblGrid>
-              <a:tr h="552450">
-                <a:tc>
-                  <a:txBody>
-                    <a:bodyPr lIns="76200" tIns="66675" rIns="114300" bIns="66675">
-                      <a:noAutofit/>
-                    </a:bodyPr>
-                    <a:lstStyle/>
-                    <a:p>
-                      <a:r>
-                        <a:rPr sz="1875" b="1">
-                          <a:solidFill>
-                            <a:srgbClr val="26746D"/>
-                          </a:solidFill>
-                          <a:latin typeface="Arial"/>
-                          <a:ea typeface="Arial"/>
-                          <a:cs typeface="Arial"/>
-                        </a:rPr>
-                        <a:t>We will record</a:t>
-                      </a:r>
-                    </a:p>
-                  </a:txBody>
-                  <a:tcPr marL="91440" marR="91440" marT="45720" marB="45720" anchor="ctr">
-                    <a:solidFill>
-                      <a:srgbClr val="FAFAF7"/>
-                    </a:solidFill>
-                  </a:tcPr>
-                </a:tc>
-                <a:tc>
-                  <a:txBody>
-                    <a:bodyPr lIns="76200" tIns="66675" rIns="114300" bIns="66675">
-                      <a:noAutofit/>
-                    </a:bodyPr>
-                    <a:lstStyle/>
-                    <a:p>
-                      <a:r>
-                        <a:rPr sz="1875" b="1">
-                          <a:solidFill>
-                            <a:srgbClr val="26746D"/>
-                          </a:solidFill>
-                          <a:latin typeface="Arial"/>
-                          <a:ea typeface="Arial"/>
-                          <a:cs typeface="Arial"/>
-                        </a:rPr>
-                        <a:t>Why it matters</a:t>
-                      </a:r>
-                    </a:p>
-                  </a:txBody>
-                  <a:tcPr marL="91440" marR="91440" marT="45720" marB="45720" anchor="ctr">
-                    <a:solidFill>
-                      <a:srgbClr val="FAFAF7"/>
-                    </a:solidFill>
-                  </a:tcPr>
-                </a:tc>
-              </a:tr>
-              <a:tr h="790575">
-                <a:tc>
-                  <a:txBody>
-                    <a:bodyPr lIns="76200" tIns="66675" rIns="114300" bIns="66675">
-                      <a:noAutofit/>
-                    </a:bodyPr>
-                    <a:lstStyle/>
-                    <a:p>
-                      <a:r>
-                        <a:rPr sz="2100" b="0">
-                          <a:solidFill>
-                            <a:srgbClr val="17343C"/>
-                          </a:solidFill>
-                          <a:latin typeface="Arial"/>
-                          <a:ea typeface="Arial"/>
-                          <a:cs typeface="Arial"/>
-                        </a:rPr>
-                        <a:t>Staff working minutes</a:t>
-                      </a:r>
-                    </a:p>
-                  </a:txBody>
-                  <a:tcPr marL="91440" marR="91440" marT="45720" marB="45720" anchor="ctr">
-                    <a:solidFill>
-                      <a:srgbClr val="FAFAF7"/>
-                    </a:solidFill>
-                  </a:tcPr>
-                </a:tc>
-                <a:tc>
-                  <a:txBody>
-                    <a:bodyPr lIns="76200" tIns="66675" rIns="114300" bIns="66675">
-                      <a:noAutofit/>
-                    </a:bodyPr>
-                    <a:lstStyle/>
-                    <a:p>
-                      <a:r>
-                        <a:rPr sz="2100" b="0">
-                          <a:solidFill>
-                            <a:srgbClr val="17343C"/>
-                          </a:solidFill>
-                          <a:latin typeface="Arial"/>
-                          <a:ea typeface="Arial"/>
-                          <a:cs typeface="Arial"/>
-                        </a:rPr>
-                        <a:t>Include checking, errors and extra data entry</a:t>
-                      </a:r>
-                    </a:p>
-                  </a:txBody>
-                  <a:tcPr marL="91440" marR="91440" marT="45720" marB="45720" anchor="ctr">
-                    <a:solidFill>
-                      <a:srgbClr val="FAFAF7"/>
-                    </a:solidFill>
-                  </a:tcPr>
-                </a:tc>
-              </a:tr>
-              <a:tr h="790575">
-                <a:tc>
-                  <a:txBody>
-                    <a:bodyPr lIns="76200" tIns="66675" rIns="114300" bIns="66675">
-                      <a:noAutofit/>
-                    </a:bodyPr>
-                    <a:lstStyle/>
-                    <a:p>
-                      <a:r>
-                        <a:rPr sz="2100" b="0">
-                          <a:solidFill>
-                            <a:srgbClr val="17343C"/>
-                          </a:solidFill>
-                          <a:latin typeface="Arial"/>
-                          <a:ea typeface="Arial"/>
-                          <a:cs typeface="Arial"/>
-                        </a:rPr>
-                        <a:t>Completed requests and errors</a:t>
-                      </a:r>
-                    </a:p>
-                  </a:txBody>
-                  <a:tcPr marL="91440" marR="91440" marT="45720" marB="45720" anchor="ctr">
-                    <a:solidFill>
-                      <a:srgbClr val="FAFAF7"/>
-                    </a:solidFill>
-                  </a:tcPr>
-                </a:tc>
-                <a:tc>
-                  <a:txBody>
-                    <a:bodyPr lIns="76200" tIns="66675" rIns="114300" bIns="66675">
-                      <a:noAutofit/>
-                    </a:bodyPr>
-                    <a:lstStyle/>
-                    <a:p>
-                      <a:r>
-                        <a:rPr sz="2100" b="0">
-                          <a:solidFill>
-                            <a:srgbClr val="17343C"/>
-                          </a:solidFill>
-                          <a:latin typeface="Arial"/>
-                          <a:ea typeface="Arial"/>
-                          <a:cs typeface="Arial"/>
-                        </a:rPr>
-                        <a:t>A faster attempt is useful only if it works</a:t>
-                      </a:r>
-                    </a:p>
-                  </a:txBody>
-                  <a:tcPr marL="91440" marR="91440" marT="45720" marB="45720" anchor="ctr">
-                    <a:solidFill>
-                      <a:srgbClr val="FAFAF7"/>
-                    </a:solidFill>
-                  </a:tcPr>
-                </a:tc>
-              </a:tr>
-              <a:tr h="895350">
-                <a:tc>
-                  <a:txBody>
-                    <a:bodyPr lIns="76200" tIns="66675" rIns="114300" bIns="66675">
-                      <a:noAutofit/>
-                    </a:bodyPr>
-                    <a:lstStyle/>
-                    <a:p>
-                      <a:r>
-                        <a:rPr sz="2100" b="0">
-                          <a:solidFill>
-                            <a:srgbClr val="17343C"/>
-                          </a:solidFill>
-                          <a:latin typeface="Arial"/>
-                          <a:ea typeface="Arial"/>
-                          <a:cs typeface="Arial"/>
-                        </a:rPr>
-                        <a:t>Extra purchases avoided</a:t>
-                      </a:r>
-                    </a:p>
-                  </a:txBody>
-                  <a:tcPr marL="91440" marR="91440" marT="45720" marB="45720" anchor="ctr">
-                    <a:solidFill>
-                      <a:srgbClr val="FAFAF7"/>
-                    </a:solidFill>
-                  </a:tcPr>
-                </a:tc>
-                <a:tc>
-                  <a:txBody>
-                    <a:bodyPr lIns="76200" tIns="66675" rIns="114300" bIns="66675">
-                      <a:noAutofit/>
-                    </a:bodyPr>
-                    <a:lstStyle/>
-                    <a:p>
-                      <a:r>
-                        <a:rPr sz="2100" b="0">
-                          <a:solidFill>
-                            <a:srgbClr val="17343C"/>
-                          </a:solidFill>
-                          <a:latin typeface="Arial"/>
-                          <a:ea typeface="Arial"/>
-                          <a:cs typeface="Arial"/>
-                        </a:rPr>
-                        <a:t>Subtract repair, transfer and operating costs</a:t>
-                      </a:r>
-                    </a:p>
-                  </a:txBody>
-                  <a:tcPr marL="91440" marR="91440" marT="45720" marB="45720" anchor="ctr">
-                    <a:solidFill>
-                      <a:srgbClr val="FAFAF7"/>
-                    </a:solidFill>
-                  </a:tcPr>
-                </a:tc>
-              </a:tr>
-            </a:tbl>
-          </a:graphicData>
-        </a:graphic>
-      </p:graphicFrame>
-      <p:sp>
-        <p:nvSpPr>
-          <p:cNvPr id="5" name="limit">
-            <a:extLst xmlns:a="http://schemas.openxmlformats.org/drawingml/2006/main">
-              <a:ext uri="{FF2B5EF4-FFF2-40B4-BE49-F238E27FC236}">
-                <a16:creationId xmlns:a16="http://schemas.microsoft.com/office/drawing/2014/main" id="{0FF6ADF7-35DD-4696-A81D-137091B404DC}"/>
-              </a:ext>
-            </a:extLst>
-          </p:cNvPr>
-          <p:cNvSpPr>
-            <a:spLocks xmlns:a="http://schemas.openxmlformats.org/drawingml/2006/main" noGrp="1"/>
-          </p:cNvSpPr>
-          <p:nvPr/>
-        </p:nvSpPr>
-        <p:spPr>
-          <a:xfrm xmlns:a="http://schemas.openxmlformats.org/drawingml/2006/main">
-            <a:off x="685800" y="5781675"/>
-            <a:ext cx="10820400" cy="457200"/>
-          </a:xfrm>
-          <a:prstGeom xmlns:a="http://schemas.openxmlformats.org/drawingml/2006/main" prst="rect">
-            <a:avLst/>
-          </a:prstGeom>
-          <a:noFill xmlns:a="http://schemas.openxmlformats.org/drawingml/2006/main"/>
-          <a:ln xmlns:a="http://schemas.openxmlformats.org/drawingml/2006/main" w="0">
-            <a:noFill/>
-          </a:ln>
-        </p:spPr>
-        <p:txBody>
-          <a:bodyPr xmlns:a="http://schemas.openxmlformats.org/drawingml/2006/main" wrap="square" lIns="0" tIns="0" rIns="0" bIns="0" anchor="t">
-            <a:noAutofit/>
-          </a:bodyPr>
-          <a:lstStyle xmlns:a="http://schemas.openxmlformats.org/drawingml/2006/main"/>
-          <a:p xmlns:a="http://schemas.openxmlformats.org/drawingml/2006/main">
-            <a:pPr algn="l">
-              <a:defRPr sz="2175" b="1">
-                <a:solidFill>
-                  <a:srgbClr val="17343C"/>
-                </a:solidFill>
-                <a:latin typeface="Arial"/>
-                <a:ea typeface="Arial"/>
-                <a:cs typeface="Arial"/>
-              </a:defRPr>
-            </a:pPr>
-            <a:r>
-              <a:rPr sz="2175" b="1">
-                <a:solidFill>
-                  <a:srgbClr val="17343C"/>
-                </a:solidFill>
-                <a:latin typeface="Arial"/>
-                <a:ea typeface="Arial"/>
-                <a:cs typeface="Arial"/>
-              </a:rPr>
-              <a:t>We have a measurement plan. We do not have results yet.</a:t>
+              <a:t>We need evidence of the current system before claiming an improvement.</a:t>
             </a:r>
           </a:p>
         </p:txBody>
@@ -3448,7 +5004,7 @@
     </p:spTree>
     <p:extLst>
       <p:ext uri="{BB962C8B-B14F-4D97-AF65-F5344CB8AC3E}">
-        <p14:creationId xmlns:p14="http://schemas.microsoft.com/office/powerpoint/2010/main" val="1268961273"/>
+        <p14:creationId xmlns:p14="http://schemas.microsoft.com/office/powerpoint/2010/main" val="665511494"/>
       </p:ext>
     </p:extLst>
   </p:cSld>
@@ -3476,10 +5032,10 @@
       </p:grpSpPr>
       <p:sp>
         <p:nvSpPr>
-          <p:cNvPr id="10" name="title">
+          <p:cNvPr id="7" name="title">
             <a:extLst xmlns:a="http://schemas.openxmlformats.org/drawingml/2006/main">
               <a:ext uri="{FF2B5EF4-FFF2-40B4-BE49-F238E27FC236}">
-                <a16:creationId xmlns:a16="http://schemas.microsoft.com/office/drawing/2014/main" id="{12B36125-C7C2-45BF-B772-189B6C733AF9}"/>
+                <a16:creationId xmlns:a16="http://schemas.microsoft.com/office/drawing/2014/main" id="{E9643E33-2C70-4CAF-9A2B-A1097830D89F}"/>
               </a:ext>
             </a:extLst>
           </p:cNvPr>
@@ -3490,8 +5046,8 @@
         </p:nvSpPr>
         <p:spPr>
           <a:xfrm xmlns:a="http://schemas.openxmlformats.org/drawingml/2006/main">
-            <a:off x="685800" y="514350"/>
-            <a:ext cx="10820400" cy="685800"/>
+            <a:off x="647700" y="457200"/>
+            <a:ext cx="10896600" cy="714375"/>
           </a:xfrm>
           <a:prstGeom xmlns:a="http://schemas.openxmlformats.org/drawingml/2006/main" prst="rect">
             <a:avLst/>
@@ -3526,7 +5082,7 @@
                 <a:ea typeface="Arial"/>
                 <a:cs typeface="Arial"/>
               </a:rPr>
-              <a:t>What we found about hosting</a:t>
+              <a:t>Where AI would help</a:t>
             </a:r>
           </a:p>
         </p:txBody>
@@ -3536,7 +5092,7 @@
           <p:cNvPr id="2" name="presenter">
             <a:extLst xmlns:a="http://schemas.openxmlformats.org/drawingml/2006/main">
               <a:ext uri="{FF2B5EF4-FFF2-40B4-BE49-F238E27FC236}">
-                <a16:creationId xmlns:a16="http://schemas.microsoft.com/office/drawing/2014/main" id="{91C060DC-4CFE-4A2B-BD4B-AC64219F53EB}"/>
+                <a16:creationId xmlns:a16="http://schemas.microsoft.com/office/drawing/2014/main" id="{937D6541-9303-4C6D-8E55-F1601399ECE6}"/>
               </a:ext>
             </a:extLst>
           </p:cNvPr>
@@ -3547,8 +5103,8 @@
         </p:nvSpPr>
         <p:spPr>
           <a:xfrm xmlns:a="http://schemas.openxmlformats.org/drawingml/2006/main">
-            <a:off x="9906000" y="6400800"/>
-            <a:ext cx="1600200" cy="247650"/>
+            <a:off x="10144125" y="6429375"/>
+            <a:ext cx="1400175" cy="238125"/>
           </a:xfrm>
           <a:prstGeom xmlns:a="http://schemas.openxmlformats.org/drawingml/2006/main" prst="rect">
             <a:avLst/>
@@ -3565,7 +5121,7 @@
           <a:lstStyle xmlns:a="http://schemas.openxmlformats.org/drawingml/2006/main"/>
           <a:p xmlns:a="http://schemas.openxmlformats.org/drawingml/2006/main">
             <a:pPr algn="l">
-              <a:defRPr sz="1425" b="0">
+              <a:defRPr sz="1350" b="0">
                 <a:solidFill>
                   <a:srgbClr val="526264"/>
                 </a:solidFill>
@@ -3575,7 +5131,7 @@
               </a:defRPr>
             </a:pPr>
             <a:r>
-              <a:rPr sz="1425" b="0">
+              <a:rPr sz="1350" b="0">
                 <a:solidFill>
                   <a:srgbClr val="526264"/>
                 </a:solidFill>
@@ -3590,10 +5146,10 @@
       </p:sp>
       <p:sp>
         <p:nvSpPr>
-          <p:cNvPr id="3" name="free-label">
+          <p:cNvPr id="3" name="same-case">
             <a:extLst xmlns:a="http://schemas.openxmlformats.org/drawingml/2006/main">
               <a:ext uri="{FF2B5EF4-FFF2-40B4-BE49-F238E27FC236}">
-                <a16:creationId xmlns:a16="http://schemas.microsoft.com/office/drawing/2014/main" id="{D72C6C00-012C-4CE4-9B10-C95E22ADFDCF}"/>
+                <a16:creationId xmlns:a16="http://schemas.microsoft.com/office/drawing/2014/main" id="{E35B0B4F-1BEB-4EB3-B3A2-A98D3C917154}"/>
               </a:ext>
             </a:extLst>
           </p:cNvPr>
@@ -3604,8 +5160,8 @@
         </p:nvSpPr>
         <p:spPr>
           <a:xfrm xmlns:a="http://schemas.openxmlformats.org/drawingml/2006/main">
-            <a:off x="685800" y="1666875"/>
-            <a:ext cx="5429250" cy="514350"/>
+            <a:off x="647700" y="1362075"/>
+            <a:ext cx="10896600" cy="533400"/>
           </a:xfrm>
           <a:prstGeom xmlns:a="http://schemas.openxmlformats.org/drawingml/2006/main" prst="rect">
             <a:avLst/>
@@ -3622,7 +5178,7 @@
           <a:lstStyle xmlns:a="http://schemas.openxmlformats.org/drawingml/2006/main"/>
           <a:p xmlns:a="http://schemas.openxmlformats.org/drawingml/2006/main">
             <a:pPr algn="l">
-              <a:defRPr sz="2475" b="1">
+              <a:defRPr sz="2250" b="1">
                 <a:solidFill>
                   <a:srgbClr val="26746D"/>
                 </a:solidFill>
@@ -3632,7 +5188,7 @@
               </a:defRPr>
             </a:pPr>
             <a:r>
-              <a:rPr sz="2475" b="1">
+              <a:rPr sz="2250" b="1">
                 <a:solidFill>
                   <a:srgbClr val="26746D"/>
                 </a:solidFill>
@@ -3640,17 +5196,253 @@
                 <a:ea typeface="Arial"/>
                 <a:cs typeface="Arial"/>
               </a:rPr>
-              <a:t>Free option</a:t>
+              <a:t>Example need: two working monitors with HDMI connections</a:t>
             </a:r>
           </a:p>
         </p:txBody>
       </p:sp>
+      <p:graphicFrame>
+        <p:nvGraphicFramePr>
+          <p:cNvPr id="10" name=""/>
+          <p:cNvGraphicFramePr/>
+          <p:nvPr/>
+        </p:nvGraphicFramePr>
+        <p:xfrm>
+          <a:off xmlns:a="http://schemas.openxmlformats.org/drawingml/2006/main" x="647700" y="2324100"/>
+          <a:ext xmlns:a="http://schemas.openxmlformats.org/drawingml/2006/main" cx="10896600" cy="2686050"/>
+        </p:xfrm>
+        <a:graphic xmlns:a="http://schemas.openxmlformats.org/drawingml/2006/main">
+          <a:graphicData uri="http://schemas.openxmlformats.org/drawingml/2006/table">
+            <a:tbl>
+              <a:tblPr firstRow="0" firstCol="0" bandRow="0"/>
+              <a:tblGrid>
+                <a:gridCol w="5448300"/>
+                <a:gridCol w="5448300"/>
+              </a:tblGrid>
+              <a:tr h="581025">
+                <a:tc>
+                  <a:txBody>
+                    <a:bodyPr lIns="133350" tIns="85725" rIns="133350" bIns="85725">
+                      <a:noAutofit/>
+                    </a:bodyPr>
+                    <a:lstStyle/>
+                    <a:p>
+                      <a:r>
+                        <a:rPr sz="1875" b="1">
+                          <a:solidFill>
+                            <a:srgbClr val="FFFFFF"/>
+                          </a:solidFill>
+                          <a:latin typeface="Arial"/>
+                          <a:ea typeface="Arial"/>
+                          <a:cs typeface="Arial"/>
+                        </a:rPr>
+                        <a:t>Ordinary search</a:t>
+                      </a:r>
+                    </a:p>
+                  </a:txBody>
+                  <a:tcPr marL="91440" marR="91440" marT="45720" marB="45720" anchor="ctr">
+                    <a:solidFill>
+                      <a:srgbClr val="17343C"/>
+                    </a:solidFill>
+                  </a:tcPr>
+                </a:tc>
+                <a:tc>
+                  <a:txBody>
+                    <a:bodyPr lIns="133350" tIns="85725" rIns="133350" bIns="85725">
+                      <a:noAutofit/>
+                    </a:bodyPr>
+                    <a:lstStyle/>
+                    <a:p>
+                      <a:r>
+                        <a:rPr sz="1875" b="1">
+                          <a:solidFill>
+                            <a:srgbClr val="FFFFFF"/>
+                          </a:solidFill>
+                          <a:latin typeface="Arial"/>
+                          <a:ea typeface="Arial"/>
+                          <a:cs typeface="Arial"/>
+                        </a:rPr>
+                        <a:t>Search with AI help</a:t>
+                      </a:r>
+                    </a:p>
+                  </a:txBody>
+                  <a:tcPr marL="91440" marR="91440" marT="45720" marB="45720" anchor="ctr">
+                    <a:solidFill>
+                      <a:srgbClr val="17343C"/>
+                    </a:solidFill>
+                  </a:tcPr>
+                </a:tc>
+              </a:tr>
+              <a:tr h="1104900">
+                <a:tc>
+                  <a:txBody>
+                    <a:bodyPr lIns="133350" tIns="85725" rIns="133350" bIns="85725">
+                      <a:noAutofit/>
+                    </a:bodyPr>
+                    <a:lstStyle/>
+                    <a:p>
+                      <a:r>
+                        <a:rPr sz="2250" b="0">
+                          <a:solidFill>
+                            <a:srgbClr val="17343C"/>
+                          </a:solidFill>
+                          <a:latin typeface="Arial"/>
+                          <a:ea typeface="Arial"/>
+                          <a:cs typeface="Arial"/>
+                        </a:rPr>
+                        <a:t>Search for “monitor”</a:t>
+                      </a:r>
+                    </a:p>
+                    <a:p>
+                      <a:r>
+                        <a:rPr sz="2250" b="0">
+                          <a:solidFill>
+                            <a:srgbClr val="17343C"/>
+                          </a:solidFill>
+                          <a:latin typeface="Arial"/>
+                          <a:ea typeface="Arial"/>
+                          <a:cs typeface="Arial"/>
+                        </a:rPr>
+                        <a:t>Filter by connection and quantity</a:t>
+                      </a:r>
+                    </a:p>
+                  </a:txBody>
+                  <a:tcPr marL="91440" marR="91440" marT="45720" marB="45720" anchor="ctr">
+                    <a:solidFill>
+                      <a:srgbClr val="FAFAF7"/>
+                    </a:solidFill>
+                  </a:tcPr>
+                </a:tc>
+                <a:tc>
+                  <a:txBody>
+                    <a:bodyPr lIns="133350" tIns="85725" rIns="133350" bIns="85725">
+                      <a:noAutofit/>
+                    </a:bodyPr>
+                    <a:lstStyle/>
+                    <a:p>
+                      <a:r>
+                        <a:rPr sz="2250" b="0">
+                          <a:solidFill>
+                            <a:srgbClr val="17343C"/>
+                          </a:solidFill>
+                          <a:latin typeface="Arial"/>
+                          <a:ea typeface="Arial"/>
+                          <a:cs typeface="Arial"/>
+                        </a:rPr>
+                        <a:t>Describe what the monitors are needed for</a:t>
+                      </a:r>
+                    </a:p>
+                    <a:p>
+                      <a:r>
+                        <a:rPr sz="2250" b="0">
+                          <a:solidFill>
+                            <a:srgbClr val="17343C"/>
+                          </a:solidFill>
+                          <a:latin typeface="Arial"/>
+                          <a:ea typeface="Arial"/>
+                          <a:cs typeface="Arial"/>
+                        </a:rPr>
+                        <a:t>AI ranks suitable options</a:t>
+                      </a:r>
+                    </a:p>
+                  </a:txBody>
+                  <a:tcPr marL="91440" marR="91440" marT="45720" marB="45720" anchor="ctr">
+                    <a:solidFill>
+                      <a:srgbClr val="FAFAF7"/>
+                    </a:solidFill>
+                  </a:tcPr>
+                </a:tc>
+              </a:tr>
+              <a:tr h="1000125">
+                <a:tc>
+                  <a:txBody>
+                    <a:bodyPr lIns="133350" tIns="85725" rIns="133350" bIns="85725">
+                      <a:noAutofit/>
+                    </a:bodyPr>
+                    <a:lstStyle/>
+                    <a:p>
+                      <a:r>
+                        <a:rPr sz="2250" b="0">
+                          <a:solidFill>
+                            <a:srgbClr val="17343C"/>
+                          </a:solidFill>
+                          <a:latin typeface="Arial"/>
+                          <a:ea typeface="Arial"/>
+                          <a:cs typeface="Arial"/>
+                        </a:rPr>
+                        <a:t>Read the item details</a:t>
+                      </a:r>
+                    </a:p>
+                    <a:p>
+                      <a:r>
+                        <a:rPr sz="2250" b="0">
+                          <a:solidFill>
+                            <a:srgbClr val="17343C"/>
+                          </a:solidFill>
+                          <a:latin typeface="Arial"/>
+                          <a:ea typeface="Arial"/>
+                          <a:cs typeface="Arial"/>
+                        </a:rPr>
+                        <a:t>and choose a suitable match</a:t>
+                      </a:r>
+                    </a:p>
+                  </a:txBody>
+                  <a:tcPr marL="91440" marR="91440" marT="45720" marB="45720" anchor="ctr">
+                    <a:solidFill>
+                      <a:srgbClr val="F0F4F3"/>
+                    </a:solidFill>
+                  </a:tcPr>
+                </a:tc>
+                <a:tc>
+                  <a:txBody>
+                    <a:bodyPr lIns="133350" tIns="85725" rIns="133350" bIns="85725">
+                      <a:noAutofit/>
+                    </a:bodyPr>
+                    <a:lstStyle/>
+                    <a:p>
+                      <a:r>
+                        <a:rPr sz="2250" b="0">
+                          <a:solidFill>
+                            <a:srgbClr val="17343C"/>
+                          </a:solidFill>
+                          <a:latin typeface="Arial"/>
+                          <a:ea typeface="Arial"/>
+                          <a:cs typeface="Arial"/>
+                        </a:rPr>
+                        <a:t>Check the suggested match</a:t>
+                      </a:r>
+                    </a:p>
+                    <a:p>
+                      <a:r>
+                        <a:rPr sz="2250" b="0">
+                          <a:solidFill>
+                            <a:srgbClr val="17343C"/>
+                          </a:solidFill>
+                          <a:latin typeface="Arial"/>
+                          <a:ea typeface="Arial"/>
+                          <a:cs typeface="Arial"/>
+                        </a:rPr>
+                        <a:t>and its explanation</a:t>
+                      </a:r>
+                    </a:p>
+                  </a:txBody>
+                  <a:tcPr marL="91440" marR="91440" marT="45720" marB="45720" anchor="ctr">
+                    <a:solidFill>
+                      <a:srgbClr val="F0F4F3"/>
+                    </a:solidFill>
+                  </a:tcPr>
+                </a:tc>
+              </a:tr>
+            </a:tbl>
+          </a:graphicData>
+        </a:graphic>
+      </p:graphicFrame>
       <p:sp>
         <p:nvSpPr>
-          <p:cNvPr id="4" name="free">
+          <p:cNvPr id="5" name="rules">
             <a:extLst xmlns:a="http://schemas.openxmlformats.org/drawingml/2006/main">
               <a:ext uri="{FF2B5EF4-FFF2-40B4-BE49-F238E27FC236}">
-                <a16:creationId xmlns:a16="http://schemas.microsoft.com/office/drawing/2014/main" id="{2CAD5D28-4E45-4EE6-85E1-BA1F9E3B5360}"/>
+                <a16:creationId xmlns:a16="http://schemas.microsoft.com/office/drawing/2014/main" id="{D9187CA1-65F5-4806-B19E-0864177C5EED}"/>
               </a:ext>
             </a:extLst>
           </p:cNvPr>
@@ -3661,8 +5453,8 @@
         </p:nvSpPr>
         <p:spPr>
           <a:xfrm xmlns:a="http://schemas.openxmlformats.org/drawingml/2006/main">
-            <a:off x="685800" y="2381250"/>
-            <a:ext cx="5429250" cy="514350"/>
+            <a:off x="647700" y="5362575"/>
+            <a:ext cx="10896600" cy="400050"/>
           </a:xfrm>
           <a:prstGeom xmlns:a="http://schemas.openxmlformats.org/drawingml/2006/main" prst="rect">
             <a:avLst/>
@@ -3679,7 +5471,7 @@
           <a:lstStyle xmlns:a="http://schemas.openxmlformats.org/drawingml/2006/main"/>
           <a:p xmlns:a="http://schemas.openxmlformats.org/drawingml/2006/main">
             <a:pPr algn="l">
-              <a:defRPr sz="2775" b="1">
+              <a:defRPr sz="2325" b="1">
                 <a:solidFill>
                   <a:srgbClr val="17343C"/>
                 </a:solidFill>
@@ -3689,7 +5481,7 @@
               </a:defRPr>
             </a:pPr>
             <a:r>
-              <a:rPr sz="2775" b="1">
+              <a:rPr sz="2325" b="1">
                 <a:solidFill>
                   <a:srgbClr val="17343C"/>
                 </a:solidFill>
@@ -3697,17 +5489,17 @@
                 <a:ea typeface="Arial"/>
                 <a:cs typeface="Arial"/>
               </a:rPr>
-              <a:t>Render + Neon</a:t>
+              <a:t>Both versions keep the same rules</a:t>
             </a:r>
           </a:p>
         </p:txBody>
       </p:sp>
       <p:sp>
         <p:nvSpPr>
-          <p:cNvPr id="5" name="free-conditions">
+          <p:cNvPr id="6" name="rules-detail">
             <a:extLst xmlns:a="http://schemas.openxmlformats.org/drawingml/2006/main">
               <a:ext uri="{FF2B5EF4-FFF2-40B4-BE49-F238E27FC236}">
-                <a16:creationId xmlns:a16="http://schemas.microsoft.com/office/drawing/2014/main" id="{9BCFA638-3C6B-455F-9D60-E409FEA2B581}"/>
+                <a16:creationId xmlns:a16="http://schemas.microsoft.com/office/drawing/2014/main" id="{5FD02C35-6FCA-45B2-A6F9-DDD1BA44034D}"/>
               </a:ext>
             </a:extLst>
           </p:cNvPr>
@@ -3718,8 +5510,8 @@
         </p:nvSpPr>
         <p:spPr>
           <a:xfrm xmlns:a="http://schemas.openxmlformats.org/drawingml/2006/main">
-            <a:off x="685800" y="3133725"/>
-            <a:ext cx="5438775" cy="1476375"/>
+            <a:off x="647700" y="5867400"/>
+            <a:ext cx="10896600" cy="561975"/>
           </a:xfrm>
           <a:prstGeom xmlns:a="http://schemas.openxmlformats.org/drawingml/2006/main" prst="rect">
             <a:avLst/>
@@ -3736,9 +5528,9 @@
           <a:lstStyle xmlns:a="http://schemas.openxmlformats.org/drawingml/2006/main"/>
           <a:p xmlns:a="http://schemas.openxmlformats.org/drawingml/2006/main">
             <a:pPr algn="l">
-              <a:defRPr sz="2100" b="0">
-                <a:solidFill>
-                  <a:srgbClr val="17343C"/>
+              <a:defRPr sz="1875" b="0">
+                <a:solidFill>
+                  <a:srgbClr val="526264"/>
                 </a:solidFill>
                 <a:latin typeface="Arial"/>
                 <a:ea typeface="Arial"/>
@@ -3746,22 +5538,22 @@
               </a:defRPr>
             </a:pPr>
             <a:r>
-              <a:rPr sz="2100" b="0">
-                <a:solidFill>
-                  <a:srgbClr val="17343C"/>
+              <a:rPr sz="1875" b="0">
+                <a:solidFill>
+                  <a:srgbClr val="526264"/>
                 </a:solidFill>
                 <a:latin typeface="Arial"/>
                 <a:ea typeface="Arial"/>
                 <a:cs typeface="Arial"/>
               </a:rPr>
-              <a:t>Works only within free limits</a:t>
+              <a:t>Access permissions, available quantity and staff approvals still apply.</a:t>
             </a:r>
           </a:p>
           <a:p xmlns:a="http://schemas.openxmlformats.org/drawingml/2006/main">
             <a:pPr algn="l">
-              <a:defRPr sz="2100" b="0">
-                <a:solidFill>
-                  <a:srgbClr val="17343C"/>
+              <a:defRPr sz="1875" b="0">
+                <a:solidFill>
+                  <a:srgbClr val="526264"/>
                 </a:solidFill>
                 <a:latin typeface="Arial"/>
                 <a:ea typeface="Arial"/>
@@ -3769,416 +5561,15 @@
               </a:defRPr>
             </a:pPr>
             <a:r>
-              <a:rPr sz="2100" b="0">
-                <a:solidFill>
-                  <a:srgbClr val="17343C"/>
+              <a:rPr sz="1875" b="0">
+                <a:solidFill>
+                  <a:srgbClr val="526264"/>
                 </a:solidFill>
                 <a:latin typeface="Arial"/>
                 <a:ea typeface="Arial"/>
                 <a:cs typeface="Arial"/>
               </a:rPr>
-              <a:t>The app sleeps when idle</a:t>
-            </a:r>
-          </a:p>
-          <a:p xmlns:a="http://schemas.openxmlformats.org/drawingml/2006/main">
-            <a:pPr algn="l">
-              <a:defRPr sz="2100" b="0">
-                <a:solidFill>
-                  <a:srgbClr val="17343C"/>
-                </a:solidFill>
-                <a:latin typeface="Arial"/>
-                <a:ea typeface="Arial"/>
-                <a:cs typeface="Arial"/>
-              </a:defRPr>
-            </a:pPr>
-            <a:r>
-              <a:rPr sz="2100" b="0">
-                <a:solidFill>
-                  <a:srgbClr val="17343C"/>
-                </a:solidFill>
-                <a:latin typeface="Arial"/>
-                <a:ea typeface="Arial"/>
-                <a:cs typeface="Arial"/>
-              </a:rPr>
-              <a:t>File storage still needs a solution</a:t>
-            </a:r>
-          </a:p>
-        </p:txBody>
-      </p:sp>
-      <p:sp>
-        <p:nvSpPr>
-          <p:cNvPr id="6" name="paid-label">
-            <a:extLst xmlns:a="http://schemas.openxmlformats.org/drawingml/2006/main">
-              <a:ext uri="{FF2B5EF4-FFF2-40B4-BE49-F238E27FC236}">
-                <a16:creationId xmlns:a16="http://schemas.microsoft.com/office/drawing/2014/main" id="{0E1C1EC0-B67D-4DEA-9983-A94C6DF8190C}"/>
-              </a:ext>
-            </a:extLst>
-          </p:cNvPr>
-          <p:cNvSpPr>
-            <a:spLocks xmlns:a="http://schemas.openxmlformats.org/drawingml/2006/main" noGrp="1"/>
-          </p:cNvSpPr>
-          <p:nvPr/>
-        </p:nvSpPr>
-        <p:spPr>
-          <a:xfrm xmlns:a="http://schemas.openxmlformats.org/drawingml/2006/main">
-            <a:off x="6667500" y="1666875"/>
-            <a:ext cx="4838700" cy="495300"/>
-          </a:xfrm>
-          <a:prstGeom xmlns:a="http://schemas.openxmlformats.org/drawingml/2006/main" prst="rect">
-            <a:avLst/>
-          </a:prstGeom>
-          <a:noFill xmlns:a="http://schemas.openxmlformats.org/drawingml/2006/main"/>
-          <a:ln xmlns:a="http://schemas.openxmlformats.org/drawingml/2006/main" w="0">
-            <a:noFill/>
-          </a:ln>
-        </p:spPr>
-        <p:txBody>
-          <a:bodyPr xmlns:a="http://schemas.openxmlformats.org/drawingml/2006/main" wrap="square" lIns="0" tIns="0" rIns="0" bIns="0" anchor="t">
-            <a:noAutofit/>
-          </a:bodyPr>
-          <a:lstStyle xmlns:a="http://schemas.openxmlformats.org/drawingml/2006/main"/>
-          <a:p xmlns:a="http://schemas.openxmlformats.org/drawingml/2006/main">
-            <a:pPr algn="l">
-              <a:defRPr sz="2250" b="1">
-                <a:solidFill>
-                  <a:srgbClr val="26746D"/>
-                </a:solidFill>
-                <a:latin typeface="Arial"/>
-                <a:ea typeface="Arial"/>
-                <a:cs typeface="Arial"/>
-              </a:defRPr>
-            </a:pPr>
-            <a:r>
-              <a:rPr sz="2250" b="1">
-                <a:solidFill>
-                  <a:srgbClr val="26746D"/>
-                </a:solidFill>
-                <a:latin typeface="Arial"/>
-                <a:ea typeface="Arial"/>
-                <a:cs typeface="Arial"/>
-              </a:rPr>
-              <a:t>Railway monthly example</a:t>
-            </a:r>
-          </a:p>
-        </p:txBody>
-      </p:sp>
-      <p:sp>
-        <p:nvSpPr>
-          <p:cNvPr id="7" name="paid-total">
-            <a:extLst xmlns:a="http://schemas.openxmlformats.org/drawingml/2006/main">
-              <a:ext uri="{FF2B5EF4-FFF2-40B4-BE49-F238E27FC236}">
-                <a16:creationId xmlns:a16="http://schemas.microsoft.com/office/drawing/2014/main" id="{4A63E755-2DE6-4F40-9CDD-FF52B4D68421}"/>
-              </a:ext>
-            </a:extLst>
-          </p:cNvPr>
-          <p:cNvSpPr>
-            <a:spLocks xmlns:a="http://schemas.openxmlformats.org/drawingml/2006/main" noGrp="1"/>
-          </p:cNvSpPr>
-          <p:nvPr/>
-        </p:nvSpPr>
-        <p:spPr>
-          <a:xfrm xmlns:a="http://schemas.openxmlformats.org/drawingml/2006/main">
-            <a:off x="6667500" y="2257425"/>
-            <a:ext cx="4838700" cy="885825"/>
-          </a:xfrm>
-          <a:prstGeom xmlns:a="http://schemas.openxmlformats.org/drawingml/2006/main" prst="rect">
-            <a:avLst/>
-          </a:prstGeom>
-          <a:noFill xmlns:a="http://schemas.openxmlformats.org/drawingml/2006/main"/>
-          <a:ln xmlns:a="http://schemas.openxmlformats.org/drawingml/2006/main" w="0">
-            <a:noFill/>
-          </a:ln>
-        </p:spPr>
-        <p:txBody>
-          <a:bodyPr xmlns:a="http://schemas.openxmlformats.org/drawingml/2006/main" wrap="square" lIns="0" tIns="0" rIns="0" bIns="0" anchor="t">
-            <a:noAutofit/>
-          </a:bodyPr>
-          <a:lstStyle xmlns:a="http://schemas.openxmlformats.org/drawingml/2006/main"/>
-          <a:p xmlns:a="http://schemas.openxmlformats.org/drawingml/2006/main">
-            <a:pPr algn="l">
-              <a:defRPr sz="5100" b="1">
-                <a:solidFill>
-                  <a:srgbClr val="17343C"/>
-                </a:solidFill>
-                <a:latin typeface="Arial"/>
-                <a:ea typeface="Arial"/>
-                <a:cs typeface="Arial"/>
-              </a:defRPr>
-            </a:pPr>
-            <a:r>
-              <a:rPr sz="5100" b="1">
-                <a:solidFill>
-                  <a:srgbClr val="17343C"/>
-                </a:solidFill>
-                <a:latin typeface="Arial"/>
-                <a:ea typeface="Arial"/>
-                <a:cs typeface="Arial"/>
-              </a:rPr>
-              <a:t>USD 6.20</a:t>
-            </a:r>
-          </a:p>
-        </p:txBody>
-      </p:sp>
-      <p:graphicFrame>
-        <p:nvGraphicFramePr>
-          <p:cNvPr id="17" name=""/>
-          <p:cNvGraphicFramePr/>
-          <p:nvPr/>
-        </p:nvGraphicFramePr>
-        <p:xfrm>
-          <a:off xmlns:a="http://schemas.openxmlformats.org/drawingml/2006/main" x="6667500" y="3448050"/>
-          <a:ext xmlns:a="http://schemas.openxmlformats.org/drawingml/2006/main" cx="4838700" cy="1733550"/>
-        </p:xfrm>
-        <a:graphic xmlns:a="http://schemas.openxmlformats.org/drawingml/2006/main">
-          <a:graphicData uri="http://schemas.openxmlformats.org/drawingml/2006/table">
-            <a:tbl>
-              <a:tblPr firstRow="0" firstCol="0" bandRow="0"/>
-              <a:tblGrid>
-                <a:gridCol w="3514725"/>
-                <a:gridCol w="1323975"/>
-              </a:tblGrid>
-              <a:tr h="466725">
-                <a:tc>
-                  <a:txBody>
-                    <a:bodyPr lIns="76200" tIns="66675" rIns="114300" bIns="66675">
-                      <a:noAutofit/>
-                    </a:bodyPr>
-                    <a:lstStyle/>
-                    <a:p>
-                      <a:r>
-                        <a:rPr sz="1875" b="1">
-                          <a:solidFill>
-                            <a:srgbClr val="26746D"/>
-                          </a:solidFill>
-                          <a:latin typeface="Arial"/>
-                          <a:ea typeface="Arial"/>
-                          <a:cs typeface="Arial"/>
-                        </a:rPr>
-                        <a:t>Part</a:t>
-                      </a:r>
-                    </a:p>
-                  </a:txBody>
-                  <a:tcPr marL="91440" marR="91440" marT="45720" marB="45720" anchor="ctr">
-                    <a:solidFill>
-                      <a:srgbClr val="FAFAF7"/>
-                    </a:solidFill>
-                  </a:tcPr>
-                </a:tc>
-                <a:tc>
-                  <a:txBody>
-                    <a:bodyPr lIns="76200" tIns="66675" rIns="114300" bIns="66675">
-                      <a:noAutofit/>
-                    </a:bodyPr>
-                    <a:lstStyle/>
-                    <a:p>
-                      <a:r>
-                        <a:rPr sz="1875" b="1">
-                          <a:solidFill>
-                            <a:srgbClr val="26746D"/>
-                          </a:solidFill>
-                          <a:latin typeface="Arial"/>
-                          <a:ea typeface="Arial"/>
-                          <a:cs typeface="Arial"/>
-                        </a:rPr>
-                        <a:t>USD</a:t>
-                      </a:r>
-                    </a:p>
-                  </a:txBody>
-                  <a:tcPr marL="91440" marR="91440" marT="45720" marB="45720" anchor="ctr">
-                    <a:solidFill>
-                      <a:srgbClr val="FAFAF7"/>
-                    </a:solidFill>
-                  </a:tcPr>
-                </a:tc>
-              </a:tr>
-              <a:tr h="542925">
-                <a:tc>
-                  <a:txBody>
-                    <a:bodyPr lIns="76200" tIns="66675" rIns="114300" bIns="66675">
-                      <a:noAutofit/>
-                    </a:bodyPr>
-                    <a:lstStyle/>
-                    <a:p>
-                      <a:r>
-                        <a:rPr sz="1950" b="0">
-                          <a:solidFill>
-                            <a:srgbClr val="17343C"/>
-                          </a:solidFill>
-                          <a:latin typeface="Arial"/>
-                          <a:ea typeface="Arial"/>
-                          <a:cs typeface="Arial"/>
-                        </a:rPr>
-                        <a:t>Memory and CPU</a:t>
-                      </a:r>
-                    </a:p>
-                  </a:txBody>
-                  <a:tcPr marL="91440" marR="91440" marT="45720" marB="45720" anchor="ctr">
-                    <a:solidFill>
-                      <a:srgbClr val="FAFAF7"/>
-                    </a:solidFill>
-                  </a:tcPr>
-                </a:tc>
-                <a:tc>
-                  <a:txBody>
-                    <a:bodyPr lIns="76200" tIns="66675" rIns="114300" bIns="66675">
-                      <a:noAutofit/>
-                    </a:bodyPr>
-                    <a:lstStyle/>
-                    <a:p>
-                      <a:r>
-                        <a:rPr sz="1950" b="0">
-                          <a:solidFill>
-                            <a:srgbClr val="17343C"/>
-                          </a:solidFill>
-                          <a:latin typeface="Arial"/>
-                          <a:ea typeface="Arial"/>
-                          <a:cs typeface="Arial"/>
-                        </a:rPr>
-                        <a:t>6.00</a:t>
-                      </a:r>
-                    </a:p>
-                  </a:txBody>
-                  <a:tcPr marL="91440" marR="91440" marT="45720" marB="45720" anchor="ctr">
-                    <a:solidFill>
-                      <a:srgbClr val="FAFAF7"/>
-                    </a:solidFill>
-                  </a:tcPr>
-                </a:tc>
-              </a:tr>
-              <a:tr h="723900">
-                <a:tc>
-                  <a:txBody>
-                    <a:bodyPr lIns="76200" tIns="66675" rIns="114300" bIns="66675">
-                      <a:noAutofit/>
-                    </a:bodyPr>
-                    <a:lstStyle/>
-                    <a:p>
-                      <a:r>
-                        <a:rPr sz="1950" b="0">
-                          <a:solidFill>
-                            <a:srgbClr val="17343C"/>
-                          </a:solidFill>
-                          <a:latin typeface="Arial"/>
-                          <a:ea typeface="Arial"/>
-                          <a:cs typeface="Arial"/>
-                        </a:rPr>
-                        <a:t>Stored and outbound data</a:t>
-                      </a:r>
-                    </a:p>
-                  </a:txBody>
-                  <a:tcPr marL="91440" marR="91440" marT="45720" marB="45720" anchor="ctr">
-                    <a:solidFill>
-                      <a:srgbClr val="FAFAF7"/>
-                    </a:solidFill>
-                  </a:tcPr>
-                </a:tc>
-                <a:tc>
-                  <a:txBody>
-                    <a:bodyPr lIns="76200" tIns="66675" rIns="114300" bIns="66675">
-                      <a:noAutofit/>
-                    </a:bodyPr>
-                    <a:lstStyle/>
-                    <a:p>
-                      <a:r>
-                        <a:rPr sz="1950" b="0">
-                          <a:solidFill>
-                            <a:srgbClr val="17343C"/>
-                          </a:solidFill>
-                          <a:latin typeface="Arial"/>
-                          <a:ea typeface="Arial"/>
-                          <a:cs typeface="Arial"/>
-                        </a:rPr>
-                        <a:t>0.20</a:t>
-                      </a:r>
-                    </a:p>
-                  </a:txBody>
-                  <a:tcPr marL="91440" marR="91440" marT="45720" marB="45720" anchor="ctr">
-                    <a:solidFill>
-                      <a:srgbClr val="FAFAF7"/>
-                    </a:solidFill>
-                  </a:tcPr>
-                </a:tc>
-              </a:tr>
-            </a:tbl>
-          </a:graphicData>
-        </a:graphic>
-      </p:graphicFrame>
-      <p:sp>
-        <p:nvSpPr>
-          <p:cNvPr id="9" name="cost-limit">
-            <a:extLst xmlns:a="http://schemas.openxmlformats.org/drawingml/2006/main">
-              <a:ext uri="{FF2B5EF4-FFF2-40B4-BE49-F238E27FC236}">
-                <a16:creationId xmlns:a16="http://schemas.microsoft.com/office/drawing/2014/main" id="{485EEF36-3830-433B-8CF6-FB3FE92324C5}"/>
-              </a:ext>
-            </a:extLst>
-          </p:cNvPr>
-          <p:cNvSpPr>
-            <a:spLocks xmlns:a="http://schemas.openxmlformats.org/drawingml/2006/main" noGrp="1"/>
-          </p:cNvSpPr>
-          <p:nvPr/>
-        </p:nvSpPr>
-        <p:spPr>
-          <a:xfrm xmlns:a="http://schemas.openxmlformats.org/drawingml/2006/main">
-            <a:off x="685800" y="5638800"/>
-            <a:ext cx="10820400" cy="742950"/>
-          </a:xfrm>
-          <a:prstGeom xmlns:a="http://schemas.openxmlformats.org/drawingml/2006/main" prst="rect">
-            <a:avLst/>
-          </a:prstGeom>
-          <a:noFill xmlns:a="http://schemas.openxmlformats.org/drawingml/2006/main"/>
-          <a:ln xmlns:a="http://schemas.openxmlformats.org/drawingml/2006/main" w="0">
-            <a:noFill/>
-          </a:ln>
-        </p:spPr>
-        <p:txBody>
-          <a:bodyPr xmlns:a="http://schemas.openxmlformats.org/drawingml/2006/main" wrap="square" lIns="0" tIns="0" rIns="0" bIns="0" anchor="t">
-            <a:noAutofit/>
-          </a:bodyPr>
-          <a:lstStyle xmlns:a="http://schemas.openxmlformats.org/drawingml/2006/main"/>
-          <a:p xmlns:a="http://schemas.openxmlformats.org/drawingml/2006/main">
-            <a:pPr algn="l">
-              <a:defRPr sz="1950" b="0">
-                <a:solidFill>
-                  <a:srgbClr val="526264"/>
-                </a:solidFill>
-                <a:latin typeface="Arial"/>
-                <a:ea typeface="Arial"/>
-                <a:cs typeface="Arial"/>
-              </a:defRPr>
-            </a:pPr>
-            <a:r>
-              <a:rPr sz="1950" b="0">
-                <a:solidFill>
-                  <a:srgbClr val="526264"/>
-                </a:solidFill>
-                <a:latin typeface="Arial"/>
-                <a:ea typeface="Arial"/>
-                <a:cs typeface="Arial"/>
-              </a:rPr>
-              <a:t>Assumed small workload, not a bill. AI, uploaded files and</a:t>
-            </a:r>
-          </a:p>
-          <a:p xmlns:a="http://schemas.openxmlformats.org/drawingml/2006/main">
-            <a:pPr algn="l">
-              <a:defRPr sz="1950" b="0">
-                <a:solidFill>
-                  <a:srgbClr val="526264"/>
-                </a:solidFill>
-                <a:latin typeface="Arial"/>
-                <a:ea typeface="Arial"/>
-                <a:cs typeface="Arial"/>
-              </a:defRPr>
-            </a:pPr>
-            <a:r>
-              <a:rPr sz="1950" b="0">
-                <a:solidFill>
-                  <a:srgbClr val="526264"/>
-                </a:solidFill>
-                <a:latin typeface="Arial"/>
-                <a:ea typeface="Arial"/>
-                <a:cs typeface="Arial"/>
-              </a:rPr>
-              <a:t>other costs still need assessment.</a:t>
+              <a:t>Ordinary search remains available if AI fails.</a:t>
             </a:r>
           </a:p>
         </p:txBody>
@@ -4186,7 +5577,7 @@
     </p:spTree>
     <p:extLst>
       <p:ext uri="{BB962C8B-B14F-4D97-AF65-F5344CB8AC3E}">
-        <p14:creationId xmlns:p14="http://schemas.microsoft.com/office/powerpoint/2010/main" val="278293578"/>
+        <p14:creationId xmlns:p14="http://schemas.microsoft.com/office/powerpoint/2010/main" val="1760740367"/>
       </p:ext>
     </p:extLst>
   </p:cSld>
@@ -4217,7 +5608,7 @@
           <p:cNvPr id="6" name="title">
             <a:extLst xmlns:a="http://schemas.openxmlformats.org/drawingml/2006/main">
               <a:ext uri="{FF2B5EF4-FFF2-40B4-BE49-F238E27FC236}">
-                <a16:creationId xmlns:a16="http://schemas.microsoft.com/office/drawing/2014/main" id="{BD19517F-19E6-45E1-B527-8C9AA3420C23}"/>
+                <a16:creationId xmlns:a16="http://schemas.microsoft.com/office/drawing/2014/main" id="{617B0D6E-879E-4CC0-9A75-B5C9B7D65A10}"/>
               </a:ext>
             </a:extLst>
           </p:cNvPr>
@@ -4228,8 +5619,8 @@
         </p:nvSpPr>
         <p:spPr>
           <a:xfrm xmlns:a="http://schemas.openxmlformats.org/drawingml/2006/main">
-            <a:off x="685800" y="514350"/>
-            <a:ext cx="10820400" cy="685800"/>
+            <a:off x="647700" y="457200"/>
+            <a:ext cx="10896600" cy="714375"/>
           </a:xfrm>
           <a:prstGeom xmlns:a="http://schemas.openxmlformats.org/drawingml/2006/main" prst="rect">
             <a:avLst/>
@@ -4264,7 +5655,7 @@
                 <a:ea typeface="Arial"/>
                 <a:cs typeface="Arial"/>
               </a:rPr>
-              <a:t>Work to finish before submission</a:t>
+              <a:t>How we will check a benefit</a:t>
             </a:r>
           </a:p>
         </p:txBody>
@@ -4274,7 +5665,7 @@
           <p:cNvPr id="2" name="presenter">
             <a:extLst xmlns:a="http://schemas.openxmlformats.org/drawingml/2006/main">
               <a:ext uri="{FF2B5EF4-FFF2-40B4-BE49-F238E27FC236}">
-                <a16:creationId xmlns:a16="http://schemas.microsoft.com/office/drawing/2014/main" id="{FA866BC8-F361-49A9-AF12-060C2BCA810F}"/>
+                <a16:creationId xmlns:a16="http://schemas.microsoft.com/office/drawing/2014/main" id="{055FACB5-B997-467B-85AE-A345A11A3857}"/>
               </a:ext>
             </a:extLst>
           </p:cNvPr>
@@ -4285,8 +5676,8 @@
         </p:nvSpPr>
         <p:spPr>
           <a:xfrm xmlns:a="http://schemas.openxmlformats.org/drawingml/2006/main">
-            <a:off x="9906000" y="6400800"/>
-            <a:ext cx="1600200" cy="247650"/>
+            <a:off x="10144125" y="6429375"/>
+            <a:ext cx="1400175" cy="238125"/>
           </a:xfrm>
           <a:prstGeom xmlns:a="http://schemas.openxmlformats.org/drawingml/2006/main" prst="rect">
             <a:avLst/>
@@ -4303,7 +5694,7 @@
           <a:lstStyle xmlns:a="http://schemas.openxmlformats.org/drawingml/2006/main"/>
           <a:p xmlns:a="http://schemas.openxmlformats.org/drawingml/2006/main">
             <a:pPr algn="l">
-              <a:defRPr sz="1425" b="0">
+              <a:defRPr sz="1350" b="0">
                 <a:solidFill>
                   <a:srgbClr val="526264"/>
                 </a:solidFill>
@@ -4313,7 +5704,7 @@
               </a:defRPr>
             </a:pPr>
             <a:r>
-              <a:rPr sz="1425" b="0">
+              <a:rPr sz="1350" b="0">
                 <a:solidFill>
                   <a:srgbClr val="526264"/>
                 </a:solidFill>
@@ -4321,7 +5712,7 @@
                 <a:ea typeface="Arial"/>
                 <a:cs typeface="Arial"/>
               </a:rPr>
-              <a:t>Sultan   6</a:t>
+              <a:t>Ghith   6</a:t>
             </a:r>
           </a:p>
         </p:txBody>
@@ -4333,21 +5724,22 @@
           <p:nvPr/>
         </p:nvGraphicFramePr>
         <p:xfrm>
-          <a:off xmlns:a="http://schemas.openxmlformats.org/drawingml/2006/main" x="685800" y="1657350"/>
-          <a:ext xmlns:a="http://schemas.openxmlformats.org/drawingml/2006/main" cx="10820400" cy="2886075"/>
+          <a:off xmlns:a="http://schemas.openxmlformats.org/drawingml/2006/main" x="647700" y="1685925"/>
+          <a:ext xmlns:a="http://schemas.openxmlformats.org/drawingml/2006/main" cx="10896600" cy="3352800"/>
         </p:xfrm>
         <a:graphic xmlns:a="http://schemas.openxmlformats.org/drawingml/2006/main">
           <a:graphicData uri="http://schemas.openxmlformats.org/drawingml/2006/table">
             <a:tbl>
               <a:tblPr firstRow="0" firstCol="0" bandRow="0"/>
               <a:tblGrid>
-                <a:gridCol w="2390775"/>
-                <a:gridCol w="8429625"/>
+                <a:gridCol w="3448050"/>
+                <a:gridCol w="3724275"/>
+                <a:gridCol w="3724275"/>
               </a:tblGrid>
-              <a:tr h="533400">
-                <a:tc>
-                  <a:txBody>
-                    <a:bodyPr lIns="76200" tIns="66675" rIns="114300" bIns="66675">
+              <a:tr h="552450">
+                <a:tc>
+                  <a:txBody>
+                    <a:bodyPr lIns="133350" tIns="85725" rIns="133350" bIns="85725">
                       <a:noAutofit/>
                     </a:bodyPr>
                     <a:lstStyle/>
@@ -4355,13 +5747,93 @@
                       <a:r>
                         <a:rPr sz="1875" b="1">
                           <a:solidFill>
-                            <a:srgbClr val="26746D"/>
-                          </a:solidFill>
-                          <a:latin typeface="Arial"/>
-                          <a:ea typeface="Arial"/>
-                          <a:cs typeface="Arial"/>
-                        </a:rPr>
-                        <a:t>Owner</a:t>
+                            <a:srgbClr val="FFFFFF"/>
+                          </a:solidFill>
+                          <a:latin typeface="Arial"/>
+                          <a:ea typeface="Arial"/>
+                          <a:cs typeface="Arial"/>
+                        </a:rPr>
+                        <a:t>Possible change</a:t>
+                      </a:r>
+                    </a:p>
+                  </a:txBody>
+                  <a:tcPr marL="91440" marR="91440" marT="45720" marB="45720" anchor="ctr">
+                    <a:solidFill>
+                      <a:srgbClr val="17343C"/>
+                    </a:solidFill>
+                  </a:tcPr>
+                </a:tc>
+                <a:tc>
+                  <a:txBody>
+                    <a:bodyPr lIns="133350" tIns="85725" rIns="133350" bIns="85725">
+                      <a:noAutofit/>
+                    </a:bodyPr>
+                    <a:lstStyle/>
+                    <a:p>
+                      <a:r>
+                        <a:rPr sz="1875" b="1">
+                          <a:solidFill>
+                            <a:srgbClr val="FFFFFF"/>
+                          </a:solidFill>
+                          <a:latin typeface="Arial"/>
+                          <a:ea typeface="Arial"/>
+                          <a:cs typeface="Arial"/>
+                        </a:rPr>
+                        <a:t>What we will measure</a:t>
+                      </a:r>
+                    </a:p>
+                  </a:txBody>
+                  <a:tcPr marL="91440" marR="91440" marT="45720" marB="45720" anchor="ctr">
+                    <a:solidFill>
+                      <a:srgbClr val="17343C"/>
+                    </a:solidFill>
+                  </a:tcPr>
+                </a:tc>
+                <a:tc>
+                  <a:txBody>
+                    <a:bodyPr lIns="133350" tIns="85725" rIns="133350" bIns="85725">
+                      <a:noAutofit/>
+                    </a:bodyPr>
+                    <a:lstStyle/>
+                    <a:p>
+                      <a:r>
+                        <a:rPr sz="1875" b="1">
+                          <a:solidFill>
+                            <a:srgbClr val="FFFFFF"/>
+                          </a:solidFill>
+                          <a:latin typeface="Arial"/>
+                          <a:ea typeface="Arial"/>
+                          <a:cs typeface="Arial"/>
+                        </a:rPr>
+                        <a:t>Extra work to count</a:t>
+                      </a:r>
+                    </a:p>
+                  </a:txBody>
+                  <a:tcPr marL="91440" marR="91440" marT="45720" marB="45720" anchor="ctr">
+                    <a:solidFill>
+                      <a:srgbClr val="17343C"/>
+                    </a:solidFill>
+                  </a:tcPr>
+                </a:tc>
+              </a:tr>
+              <a:tr h="790575">
+                <a:tc>
+                  <a:txBody>
+                    <a:bodyPr lIns="133350" tIns="85725" rIns="133350" bIns="85725">
+                      <a:noAutofit/>
+                    </a:bodyPr>
+                    <a:lstStyle/>
+                    <a:p>
+                      <a:r>
+                        <a:rPr sz="2100" b="0">
+                          <a:solidFill>
+                            <a:srgbClr val="17343C"/>
+                          </a:solidFill>
+                          <a:latin typeface="Arial"/>
+                          <a:ea typeface="Arial"/>
+                          <a:cs typeface="Arial"/>
+                        </a:rPr>
+                        <a:t>One list of spare items</a:t>
                       </a:r>
                     </a:p>
                   </a:txBody>
@@ -4373,21 +5845,21 @@
                 </a:tc>
                 <a:tc>
                   <a:txBody>
-                    <a:bodyPr lIns="76200" tIns="66675" rIns="114300" bIns="66675">
-                      <a:noAutofit/>
-                    </a:bodyPr>
-                    <a:lstStyle/>
-                    <a:p>
-                      <a:r>
-                        <a:rPr sz="1875" b="1">
-                          <a:solidFill>
-                            <a:srgbClr val="26746D"/>
-                          </a:solidFill>
-                          <a:latin typeface="Arial"/>
-                          <a:ea typeface="Arial"/>
-                          <a:cs typeface="Arial"/>
-                        </a:rPr>
-                        <a:t>Next work</a:t>
+                    <a:bodyPr lIns="133350" tIns="85725" rIns="133350" bIns="85725">
+                      <a:noAutofit/>
+                    </a:bodyPr>
+                    <a:lstStyle/>
+                    <a:p>
+                      <a:r>
+                        <a:rPr sz="2100" b="0">
+                          <a:solidFill>
+                            <a:srgbClr val="17343C"/>
+                          </a:solidFill>
+                          <a:latin typeface="Arial"/>
+                          <a:ea typeface="Arial"/>
+                          <a:cs typeface="Arial"/>
+                        </a:rPr>
+                        <a:t>Search and enquiry minutes</a:t>
                       </a:r>
                     </a:p>
                   </a:txBody>
@@ -4397,25 +5869,157 @@
                     </a:solidFill>
                   </a:tcPr>
                 </a:tc>
+                <a:tc>
+                  <a:txBody>
+                    <a:bodyPr lIns="133350" tIns="85725" rIns="133350" bIns="85725">
+                      <a:noAutofit/>
+                    </a:bodyPr>
+                    <a:lstStyle/>
+                    <a:p>
+                      <a:r>
+                        <a:rPr sz="2100" b="0">
+                          <a:solidFill>
+                            <a:srgbClr val="17343C"/>
+                          </a:solidFill>
+                          <a:latin typeface="Arial"/>
+                          <a:ea typeface="Arial"/>
+                          <a:cs typeface="Arial"/>
+                        </a:rPr>
+                        <a:t>Keeping listings accurate</a:t>
+                      </a:r>
+                    </a:p>
+                  </a:txBody>
+                  <a:tcPr marL="91440" marR="91440" marT="45720" marB="45720" anchor="ctr">
+                    <a:solidFill>
+                      <a:srgbClr val="FAFAF7"/>
+                    </a:solidFill>
+                  </a:tcPr>
+                </a:tc>
               </a:tr>
-              <a:tr h="742950">
-                <a:tc>
-                  <a:txBody>
-                    <a:bodyPr lIns="76200" tIns="66675" rIns="114300" bIns="66675">
-                      <a:noAutofit/>
-                    </a:bodyPr>
-                    <a:lstStyle/>
-                    <a:p>
-                      <a:r>
-                        <a:rPr sz="2175" b="0">
-                          <a:solidFill>
-                            <a:srgbClr val="17343C"/>
-                          </a:solidFill>
-                          <a:latin typeface="Arial"/>
-                          <a:ea typeface="Arial"/>
-                          <a:cs typeface="Arial"/>
-                        </a:rPr>
-                        <a:t>Sultan</a:t>
+              <a:tr h="1009650">
+                <a:tc>
+                  <a:txBody>
+                    <a:bodyPr lIns="133350" tIns="85725" rIns="133350" bIns="85725">
+                      <a:noAutofit/>
+                    </a:bodyPr>
+                    <a:lstStyle/>
+                    <a:p>
+                      <a:r>
+                        <a:rPr sz="2100" b="0">
+                          <a:solidFill>
+                            <a:srgbClr val="17343C"/>
+                          </a:solidFill>
+                          <a:latin typeface="Arial"/>
+                          <a:ea typeface="Arial"/>
+                          <a:cs typeface="Arial"/>
+                        </a:rPr>
+                        <a:t>Reuse item details</a:t>
+                      </a:r>
+                    </a:p>
+                  </a:txBody>
+                  <a:tcPr marL="91440" marR="91440" marT="45720" marB="45720" anchor="ctr">
+                    <a:solidFill>
+                      <a:srgbClr val="F0F4F3"/>
+                    </a:solidFill>
+                  </a:tcPr>
+                </a:tc>
+                <a:tc>
+                  <a:txBody>
+                    <a:bodyPr lIns="133350" tIns="85725" rIns="133350" bIns="85725">
+                      <a:noAutofit/>
+                    </a:bodyPr>
+                    <a:lstStyle/>
+                    <a:p>
+                      <a:r>
+                        <a:rPr sz="2100" b="0">
+                          <a:solidFill>
+                            <a:srgbClr val="17343C"/>
+                          </a:solidFill>
+                          <a:latin typeface="Arial"/>
+                          <a:ea typeface="Arial"/>
+                          <a:cs typeface="Arial"/>
+                        </a:rPr>
+                        <a:t>Repeated fields</a:t>
+                      </a:r>
+                    </a:p>
+                    <a:p>
+                      <a:r>
+                        <a:rPr sz="2100" b="0">
+                          <a:solidFill>
+                            <a:srgbClr val="17343C"/>
+                          </a:solidFill>
+                          <a:latin typeface="Arial"/>
+                          <a:ea typeface="Arial"/>
+                          <a:cs typeface="Arial"/>
+                        </a:rPr>
+                        <a:t>and corrections</a:t>
+                      </a:r>
+                    </a:p>
+                  </a:txBody>
+                  <a:tcPr marL="91440" marR="91440" marT="45720" marB="45720" anchor="ctr">
+                    <a:solidFill>
+                      <a:srgbClr val="F0F4F3"/>
+                    </a:solidFill>
+                  </a:tcPr>
+                </a:tc>
+                <a:tc>
+                  <a:txBody>
+                    <a:bodyPr lIns="133350" tIns="85725" rIns="133350" bIns="85725">
+                      <a:noAutofit/>
+                    </a:bodyPr>
+                    <a:lstStyle/>
+                    <a:p>
+                      <a:r>
+                        <a:rPr sz="2100" b="0">
+                          <a:solidFill>
+                            <a:srgbClr val="17343C"/>
+                          </a:solidFill>
+                          <a:latin typeface="Arial"/>
+                          <a:ea typeface="Arial"/>
+                          <a:cs typeface="Arial"/>
+                        </a:rPr>
+                        <a:t>Any extra entry into</a:t>
+                      </a:r>
+                    </a:p>
+                    <a:p>
+                      <a:r>
+                        <a:rPr sz="2100" b="0">
+                          <a:solidFill>
+                            <a:srgbClr val="17343C"/>
+                          </a:solidFill>
+                          <a:latin typeface="Arial"/>
+                          <a:ea typeface="Arial"/>
+                          <a:cs typeface="Arial"/>
+                        </a:rPr>
+                        <a:t>the current KU system</a:t>
+                      </a:r>
+                    </a:p>
+                  </a:txBody>
+                  <a:tcPr marL="91440" marR="91440" marT="45720" marB="45720" anchor="ctr">
+                    <a:solidFill>
+                      <a:srgbClr val="F0F4F3"/>
+                    </a:solidFill>
+                  </a:tcPr>
+                </a:tc>
+              </a:tr>
+              <a:tr h="1000125">
+                <a:tc>
+                  <a:txBody>
+                    <a:bodyPr lIns="133350" tIns="85725" rIns="133350" bIns="85725">
+                      <a:noAutofit/>
+                    </a:bodyPr>
+                    <a:lstStyle/>
+                    <a:p>
+                      <a:r>
+                        <a:rPr sz="2100" b="0">
+                          <a:solidFill>
+                            <a:srgbClr val="17343C"/>
+                          </a:solidFill>
+                          <a:latin typeface="Arial"/>
+                          <a:ea typeface="Arial"/>
+                          <a:cs typeface="Arial"/>
+                        </a:rPr>
+                        <a:t>AI suggests a match</a:t>
                       </a:r>
                     </a:p>
                   </a:txBody>
@@ -4427,21 +6031,34 @@
                 </a:tc>
                 <a:tc>
                   <a:txBody>
-                    <a:bodyPr lIns="76200" tIns="66675" rIns="114300" bIns="66675">
-                      <a:noAutofit/>
-                    </a:bodyPr>
-                    <a:lstStyle/>
-                    <a:p>
-                      <a:r>
-                        <a:rPr sz="2175" b="0">
-                          <a:solidFill>
-                            <a:srgbClr val="17343C"/>
-                          </a:solidFill>
-                          <a:latin typeface="Arial"/>
-                          <a:ea typeface="Arial"/>
-                          <a:cs typeface="Arial"/>
-                        </a:rPr>
-                        <a:t>Hosting, costs and the time plan</a:t>
+                    <a:bodyPr lIns="133350" tIns="85725" rIns="133350" bIns="85725">
+                      <a:noAutofit/>
+                    </a:bodyPr>
+                    <a:lstStyle/>
+                    <a:p>
+                      <a:r>
+                        <a:rPr sz="2100" b="0">
+                          <a:solidFill>
+                            <a:srgbClr val="17343C"/>
+                          </a:solidFill>
+                          <a:latin typeface="Arial"/>
+                          <a:ea typeface="Arial"/>
+                          <a:cs typeface="Arial"/>
+                        </a:rPr>
+                        <a:t>Useful results and</a:t>
+                      </a:r>
+                    </a:p>
+                    <a:p>
+                      <a:r>
+                        <a:rPr sz="2100" b="0">
+                          <a:solidFill>
+                            <a:srgbClr val="17343C"/>
+                          </a:solidFill>
+                          <a:latin typeface="Arial"/>
+                          <a:ea typeface="Arial"/>
+                          <a:cs typeface="Arial"/>
+                        </a:rPr>
+                        <a:t>time to check them</a:t>
                       </a:r>
                     </a:p>
                   </a:txBody>
@@ -4451,105 +6068,36 @@
                     </a:solidFill>
                   </a:tcPr>
                 </a:tc>
-              </a:tr>
-              <a:tr h="866775">
-                <a:tc>
-                  <a:txBody>
-                    <a:bodyPr lIns="76200" tIns="66675" rIns="114300" bIns="66675">
-                      <a:noAutofit/>
-                    </a:bodyPr>
-                    <a:lstStyle/>
-                    <a:p>
-                      <a:r>
-                        <a:rPr sz="2175" b="0">
-                          <a:solidFill>
-                            <a:srgbClr val="17343C"/>
-                          </a:solidFill>
-                          <a:latin typeface="Arial"/>
-                          <a:ea typeface="Arial"/>
-                          <a:cs typeface="Arial"/>
-                        </a:rPr>
-                        <a:t>Zayed</a:t>
-                      </a:r>
-                    </a:p>
-                  </a:txBody>
-                  <a:tcPr marL="91440" marR="91440" marT="45720" marB="45720" anchor="ctr">
-                    <a:solidFill>
-                      <a:srgbClr val="FAFAF7"/>
-                    </a:solidFill>
-                  </a:tcPr>
-                </a:tc>
-                <a:tc>
-                  <a:txBody>
-                    <a:bodyPr lIns="76200" tIns="66675" rIns="114300" bIns="66675">
-                      <a:noAutofit/>
-                    </a:bodyPr>
-                    <a:lstStyle/>
-                    <a:p>
-                      <a:r>
-                        <a:rPr sz="2175" b="0">
-                          <a:solidFill>
-                            <a:srgbClr val="17343C"/>
-                          </a:solidFill>
-                          <a:latin typeface="Arial"/>
-                          <a:ea typeface="Arial"/>
-                          <a:cs typeface="Arial"/>
-                        </a:rPr>
-                        <a:t>KU process, scenario, staff needs and rules</a:t>
-                      </a:r>
-                    </a:p>
-                  </a:txBody>
-                  <a:tcPr marL="91440" marR="91440" marT="45720" marB="45720" anchor="ctr">
-                    <a:solidFill>
-                      <a:srgbClr val="FAFAF7"/>
-                    </a:solidFill>
-                  </a:tcPr>
-                </a:tc>
-              </a:tr>
-              <a:tr h="742950">
-                <a:tc>
-                  <a:txBody>
-                    <a:bodyPr lIns="76200" tIns="66675" rIns="114300" bIns="66675">
-                      <a:noAutofit/>
-                    </a:bodyPr>
-                    <a:lstStyle/>
-                    <a:p>
-                      <a:r>
-                        <a:rPr sz="2175" b="0">
-                          <a:solidFill>
-                            <a:srgbClr val="17343C"/>
-                          </a:solidFill>
-                          <a:latin typeface="Arial"/>
-                          <a:ea typeface="Arial"/>
-                          <a:cs typeface="Arial"/>
-                        </a:rPr>
-                        <a:t>Ghith</a:t>
-                      </a:r>
-                    </a:p>
-                  </a:txBody>
-                  <a:tcPr marL="91440" marR="91440" marT="45720" marB="45720" anchor="ctr">
-                    <a:solidFill>
-                      <a:srgbClr val="FAFAF7"/>
-                    </a:solidFill>
-                  </a:tcPr>
-                </a:tc>
-                <a:tc>
-                  <a:txBody>
-                    <a:bodyPr lIns="76200" tIns="66675" rIns="114300" bIns="66675">
-                      <a:noAutofit/>
-                    </a:bodyPr>
-                    <a:lstStyle/>
-                    <a:p>
-                      <a:r>
-                        <a:rPr sz="2175" b="0">
-                          <a:solidFill>
-                            <a:srgbClr val="17343C"/>
-                          </a:solidFill>
-                          <a:latin typeface="Arial"/>
-                          <a:ea typeface="Arial"/>
-                          <a:cs typeface="Arial"/>
-                        </a:rPr>
-                        <a:t>Technology, data and an AI trial</a:t>
+                <a:tc>
+                  <a:txBody>
+                    <a:bodyPr lIns="133350" tIns="85725" rIns="133350" bIns="85725">
+                      <a:noAutofit/>
+                    </a:bodyPr>
+                    <a:lstStyle/>
+                    <a:p>
+                      <a:r>
+                        <a:rPr sz="2100" b="0">
+                          <a:solidFill>
+                            <a:srgbClr val="17343C"/>
+                          </a:solidFill>
+                          <a:latin typeface="Arial"/>
+                          <a:ea typeface="Arial"/>
+                          <a:cs typeface="Arial"/>
+                        </a:rPr>
+                        <a:t>Wrong matches, retries</a:t>
+                      </a:r>
+                    </a:p>
+                    <a:p>
+                      <a:r>
+                        <a:rPr sz="2100" b="0">
+                          <a:solidFill>
+                            <a:srgbClr val="17343C"/>
+                          </a:solidFill>
+                          <a:latin typeface="Arial"/>
+                          <a:ea typeface="Arial"/>
+                          <a:cs typeface="Arial"/>
+                        </a:rPr>
+                        <a:t>and staff review</a:t>
                       </a:r>
                     </a:p>
                   </a:txBody>
@@ -4566,10 +6114,10 @@
       </p:graphicFrame>
       <p:sp>
         <p:nvSpPr>
-          <p:cNvPr id="4" name="joint">
+          <p:cNvPr id="4" name="measure-rule">
             <a:extLst xmlns:a="http://schemas.openxmlformats.org/drawingml/2006/main">
               <a:ext uri="{FF2B5EF4-FFF2-40B4-BE49-F238E27FC236}">
-                <a16:creationId xmlns:a16="http://schemas.microsoft.com/office/drawing/2014/main" id="{C360794A-AD9A-4F75-A35B-03833F84B87B}"/>
+                <a16:creationId xmlns:a16="http://schemas.microsoft.com/office/drawing/2014/main" id="{086110E8-0316-4382-813D-2CBA5DB45382}"/>
               </a:ext>
             </a:extLst>
           </p:cNvPr>
@@ -4580,8 +6128,8 @@
         </p:nvSpPr>
         <p:spPr>
           <a:xfrm xmlns:a="http://schemas.openxmlformats.org/drawingml/2006/main">
-            <a:off x="685800" y="4924425"/>
-            <a:ext cx="10820400" cy="714375"/>
+            <a:off x="647700" y="5343525"/>
+            <a:ext cx="10896600" cy="419100"/>
           </a:xfrm>
           <a:prstGeom xmlns:a="http://schemas.openxmlformats.org/drawingml/2006/main" prst="rect">
             <a:avLst/>
@@ -4598,9 +6146,9 @@
           <a:lstStyle xmlns:a="http://schemas.openxmlformats.org/drawingml/2006/main"/>
           <a:p xmlns:a="http://schemas.openxmlformats.org/drawingml/2006/main">
             <a:pPr algn="l">
-              <a:defRPr sz="2250" b="1">
-                <a:solidFill>
-                  <a:srgbClr val="17343C"/>
+              <a:defRPr sz="2400" b="1">
+                <a:solidFill>
+                  <a:srgbClr val="26746D"/>
                 </a:solidFill>
                 <a:latin typeface="Arial"/>
                 <a:ea typeface="Arial"/>
@@ -4608,25 +6156,25 @@
               </a:defRPr>
             </a:pPr>
             <a:r>
-              <a:rPr sz="2250" b="1">
-                <a:solidFill>
-                  <a:srgbClr val="17343C"/>
+              <a:rPr sz="2400" b="1">
+                <a:solidFill>
+                  <a:srgbClr val="26746D"/>
                 </a:solidFill>
                 <a:latin typeface="Arial"/>
                 <a:ea typeface="Arial"/>
                 <a:cs typeface="Arial"/>
               </a:rPr>
-              <a:t>Together: finish the six feasibility checks and review the report</a:t>
+              <a:t>Same task, same outcome, all staff involved</a:t>
             </a:r>
           </a:p>
         </p:txBody>
       </p:sp>
       <p:sp>
         <p:nvSpPr>
-          <p:cNvPr id="5" name="doctor">
+          <p:cNvPr id="5" name="money">
             <a:extLst xmlns:a="http://schemas.openxmlformats.org/drawingml/2006/main">
               <a:ext uri="{FF2B5EF4-FFF2-40B4-BE49-F238E27FC236}">
-                <a16:creationId xmlns:a16="http://schemas.microsoft.com/office/drawing/2014/main" id="{39F95F37-E0CA-45CA-935E-697320A156A4}"/>
+                <a16:creationId xmlns:a16="http://schemas.microsoft.com/office/drawing/2014/main" id="{BC50924B-90E3-4122-9CAA-B98EE1B5A253}"/>
               </a:ext>
             </a:extLst>
           </p:cNvPr>
@@ -4637,8 +6185,8 @@
         </p:nvSpPr>
         <p:spPr>
           <a:xfrm xmlns:a="http://schemas.openxmlformats.org/drawingml/2006/main">
-            <a:off x="685800" y="5772150"/>
-            <a:ext cx="10820400" cy="619125"/>
+            <a:off x="647700" y="5867400"/>
+            <a:ext cx="10896600" cy="590550"/>
           </a:xfrm>
           <a:prstGeom xmlns:a="http://schemas.openxmlformats.org/drawingml/2006/main" prst="rect">
             <a:avLst/>
@@ -4673,7 +6221,7 @@
                 <a:ea typeface="Arial"/>
                 <a:cs typeface="Arial"/>
               </a:rPr>
-              <a:t>Today we need to confirm the KU system, our scenario owner</a:t>
+              <a:t>Money saved needs extra purchases avoided, less reuse and running costs.</a:t>
             </a:r>
           </a:p>
           <a:p xmlns:a="http://schemas.openxmlformats.org/drawingml/2006/main">
@@ -4696,7 +6244,7 @@
                 <a:ea typeface="Arial"/>
                 <a:cs typeface="Arial"/>
               </a:rPr>
-              <a:t>and access to evidence. The exact submission day is still to confirm.</a:t>
+              <a:t>Working minutes and waiting time stay separate. Results are still to collect.</a:t>
             </a:r>
           </a:p>
         </p:txBody>
@@ -4704,7 +6252,1883 @@
     </p:spTree>
     <p:extLst>
       <p:ext uri="{BB962C8B-B14F-4D97-AF65-F5344CB8AC3E}">
-        <p14:creationId xmlns:p14="http://schemas.microsoft.com/office/powerpoint/2010/main" val="1191974455"/>
+        <p14:creationId xmlns:p14="http://schemas.microsoft.com/office/powerpoint/2010/main" val="360190644"/>
+      </p:ext>
+    </p:extLst>
+  </p:cSld>
+</p:sld>
+</file>
+
+<file path=ppt/slides/slide7.xml><?xml version="1.0" encoding="utf-8"?>
+<p:sld xmlns:p="http://schemas.openxmlformats.org/presentationml/2006/main">
+  <p:cSld>
+    <p:bg>
+      <p:bgPr>
+        <a:solidFill xmlns:a="http://schemas.openxmlformats.org/drawingml/2006/main">
+          <a:srgbClr val="FAFAF7"/>
+        </a:solidFill>
+      </p:bgPr>
+    </p:bg>
+    <p:spTree>
+      <p:nvGrpSpPr>
+        <p:cNvPr id="1" name=""/>
+        <p:cNvGrpSpPr/>
+        <p:nvPr/>
+      </p:nvGrpSpPr>
+      <p:grpSpPr>
+        <a:xfrm xmlns:a="http://schemas.openxmlformats.org/drawingml/2006/main"/>
+      </p:grpSpPr>
+      <p:sp>
+        <p:nvSpPr>
+          <p:cNvPr id="5" name="title">
+            <a:extLst xmlns:a="http://schemas.openxmlformats.org/drawingml/2006/main">
+              <a:ext uri="{FF2B5EF4-FFF2-40B4-BE49-F238E27FC236}">
+                <a16:creationId xmlns:a16="http://schemas.microsoft.com/office/drawing/2014/main" id="{1226A7D7-D842-4741-AAA0-80CBC7A0D156}"/>
+              </a:ext>
+            </a:extLst>
+          </p:cNvPr>
+          <p:cNvSpPr>
+            <a:spLocks xmlns:a="http://schemas.openxmlformats.org/drawingml/2006/main" noGrp="1"/>
+          </p:cNvSpPr>
+          <p:nvPr/>
+        </p:nvSpPr>
+        <p:spPr>
+          <a:xfrm xmlns:a="http://schemas.openxmlformats.org/drawingml/2006/main">
+            <a:off x="647700" y="457200"/>
+            <a:ext cx="10896600" cy="714375"/>
+          </a:xfrm>
+          <a:prstGeom xmlns:a="http://schemas.openxmlformats.org/drawingml/2006/main" prst="rect">
+            <a:avLst/>
+          </a:prstGeom>
+          <a:noFill xmlns:a="http://schemas.openxmlformats.org/drawingml/2006/main"/>
+          <a:ln xmlns:a="http://schemas.openxmlformats.org/drawingml/2006/main" w="0">
+            <a:noFill/>
+          </a:ln>
+        </p:spPr>
+        <p:txBody>
+          <a:bodyPr xmlns:a="http://schemas.openxmlformats.org/drawingml/2006/main" wrap="square" lIns="0" tIns="0" rIns="0" bIns="0" anchor="t">
+            <a:noAutofit/>
+          </a:bodyPr>
+          <a:lstStyle xmlns:a="http://schemas.openxmlformats.org/drawingml/2006/main"/>
+          <a:p xmlns:a="http://schemas.openxmlformats.org/drawingml/2006/main">
+            <a:pPr algn="l">
+              <a:defRPr sz="3450" b="1">
+                <a:solidFill>
+                  <a:srgbClr val="17343C"/>
+                </a:solidFill>
+                <a:latin typeface="Arial"/>
+                <a:ea typeface="Arial"/>
+                <a:cs typeface="Arial"/>
+              </a:defRPr>
+            </a:pPr>
+            <a:r>
+              <a:rPr sz="3450" b="1">
+                <a:solidFill>
+                  <a:srgbClr val="17343C"/>
+                </a:solidFill>
+                <a:latin typeface="Arial"/>
+                <a:ea typeface="Arial"/>
+                <a:cs typeface="Arial"/>
+              </a:rPr>
+              <a:t>Feasibility work so far</a:t>
+            </a:r>
+          </a:p>
+        </p:txBody>
+      </p:sp>
+      <p:sp>
+        <p:nvSpPr>
+          <p:cNvPr id="2" name="presenter">
+            <a:extLst xmlns:a="http://schemas.openxmlformats.org/drawingml/2006/main">
+              <a:ext uri="{FF2B5EF4-FFF2-40B4-BE49-F238E27FC236}">
+                <a16:creationId xmlns:a16="http://schemas.microsoft.com/office/drawing/2014/main" id="{F85C3F66-65C0-450F-8998-79139AEE5B81}"/>
+              </a:ext>
+            </a:extLst>
+          </p:cNvPr>
+          <p:cNvSpPr>
+            <a:spLocks xmlns:a="http://schemas.openxmlformats.org/drawingml/2006/main" noGrp="1"/>
+          </p:cNvSpPr>
+          <p:nvPr/>
+        </p:nvSpPr>
+        <p:spPr>
+          <a:xfrm xmlns:a="http://schemas.openxmlformats.org/drawingml/2006/main">
+            <a:off x="10144125" y="6429375"/>
+            <a:ext cx="1400175" cy="238125"/>
+          </a:xfrm>
+          <a:prstGeom xmlns:a="http://schemas.openxmlformats.org/drawingml/2006/main" prst="rect">
+            <a:avLst/>
+          </a:prstGeom>
+          <a:noFill xmlns:a="http://schemas.openxmlformats.org/drawingml/2006/main"/>
+          <a:ln xmlns:a="http://schemas.openxmlformats.org/drawingml/2006/main" w="0">
+            <a:noFill/>
+          </a:ln>
+        </p:spPr>
+        <p:txBody>
+          <a:bodyPr xmlns:a="http://schemas.openxmlformats.org/drawingml/2006/main" wrap="square" lIns="0" tIns="0" rIns="0" bIns="0" anchor="t">
+            <a:noAutofit/>
+          </a:bodyPr>
+          <a:lstStyle xmlns:a="http://schemas.openxmlformats.org/drawingml/2006/main"/>
+          <a:p xmlns:a="http://schemas.openxmlformats.org/drawingml/2006/main">
+            <a:pPr algn="l">
+              <a:defRPr sz="1350" b="0">
+                <a:solidFill>
+                  <a:srgbClr val="526264"/>
+                </a:solidFill>
+                <a:latin typeface="Arial"/>
+                <a:ea typeface="Arial"/>
+                <a:cs typeface="Arial"/>
+              </a:defRPr>
+            </a:pPr>
+            <a:r>
+              <a:rPr sz="1350" b="0">
+                <a:solidFill>
+                  <a:srgbClr val="526264"/>
+                </a:solidFill>
+                <a:latin typeface="Arial"/>
+                <a:ea typeface="Arial"/>
+                <a:cs typeface="Arial"/>
+              </a:rPr>
+              <a:t>Ghith   7</a:t>
+            </a:r>
+          </a:p>
+        </p:txBody>
+      </p:sp>
+      <p:graphicFrame>
+        <p:nvGraphicFramePr>
+          <p:cNvPr id="7" name=""/>
+          <p:cNvGraphicFramePr/>
+          <p:nvPr/>
+        </p:nvGraphicFramePr>
+        <p:xfrm>
+          <a:off xmlns:a="http://schemas.openxmlformats.org/drawingml/2006/main" x="647700" y="1581150"/>
+          <a:ext xmlns:a="http://schemas.openxmlformats.org/drawingml/2006/main" cx="10896600" cy="4429125"/>
+        </p:xfrm>
+        <a:graphic xmlns:a="http://schemas.openxmlformats.org/drawingml/2006/main">
+          <a:graphicData uri="http://schemas.openxmlformats.org/drawingml/2006/table">
+            <a:tbl>
+              <a:tblPr firstRow="0" firstCol="0" bandRow="0"/>
+              <a:tblGrid>
+                <a:gridCol w="2238375"/>
+                <a:gridCol w="3810000"/>
+                <a:gridCol w="4848225"/>
+              </a:tblGrid>
+              <a:tr h="552450">
+                <a:tc>
+                  <a:txBody>
+                    <a:bodyPr lIns="133350" tIns="85725" rIns="133350" bIns="85725">
+                      <a:noAutofit/>
+                    </a:bodyPr>
+                    <a:lstStyle/>
+                    <a:p>
+                      <a:r>
+                        <a:rPr sz="1875" b="1">
+                          <a:solidFill>
+                            <a:srgbClr val="FFFFFF"/>
+                          </a:solidFill>
+                          <a:latin typeface="Arial"/>
+                          <a:ea typeface="Arial"/>
+                          <a:cs typeface="Arial"/>
+                        </a:rPr>
+                        <a:t>Area</a:t>
+                      </a:r>
+                    </a:p>
+                  </a:txBody>
+                  <a:tcPr marL="91440" marR="91440" marT="45720" marB="45720" anchor="ctr">
+                    <a:solidFill>
+                      <a:srgbClr val="17343C"/>
+                    </a:solidFill>
+                  </a:tcPr>
+                </a:tc>
+                <a:tc>
+                  <a:txBody>
+                    <a:bodyPr lIns="133350" tIns="85725" rIns="133350" bIns="85725">
+                      <a:noAutofit/>
+                    </a:bodyPr>
+                    <a:lstStyle/>
+                    <a:p>
+                      <a:r>
+                        <a:rPr sz="1875" b="1">
+                          <a:solidFill>
+                            <a:srgbClr val="FFFFFF"/>
+                          </a:solidFill>
+                          <a:latin typeface="Arial"/>
+                          <a:ea typeface="Arial"/>
+                          <a:cs typeface="Arial"/>
+                        </a:rPr>
+                        <a:t>Work started</a:t>
+                      </a:r>
+                    </a:p>
+                  </a:txBody>
+                  <a:tcPr marL="91440" marR="91440" marT="45720" marB="45720" anchor="ctr">
+                    <a:solidFill>
+                      <a:srgbClr val="17343C"/>
+                    </a:solidFill>
+                  </a:tcPr>
+                </a:tc>
+                <a:tc>
+                  <a:txBody>
+                    <a:bodyPr lIns="133350" tIns="85725" rIns="133350" bIns="85725">
+                      <a:noAutofit/>
+                    </a:bodyPr>
+                    <a:lstStyle/>
+                    <a:p>
+                      <a:r>
+                        <a:rPr sz="1875" b="1">
+                          <a:solidFill>
+                            <a:srgbClr val="FFFFFF"/>
+                          </a:solidFill>
+                          <a:latin typeface="Arial"/>
+                          <a:ea typeface="Arial"/>
+                          <a:cs typeface="Arial"/>
+                        </a:rPr>
+                        <a:t>Still needed</a:t>
+                      </a:r>
+                    </a:p>
+                  </a:txBody>
+                  <a:tcPr marL="91440" marR="91440" marT="45720" marB="45720" anchor="ctr">
+                    <a:solidFill>
+                      <a:srgbClr val="17343C"/>
+                    </a:solidFill>
+                  </a:tcPr>
+                </a:tc>
+              </a:tr>
+              <a:tr h="590550">
+                <a:tc>
+                  <a:txBody>
+                    <a:bodyPr lIns="133350" tIns="85725" rIns="133350" bIns="85725">
+                      <a:noAutofit/>
+                    </a:bodyPr>
+                    <a:lstStyle/>
+                    <a:p>
+                      <a:r>
+                        <a:rPr sz="2025" b="0">
+                          <a:solidFill>
+                            <a:srgbClr val="17343C"/>
+                          </a:solidFill>
+                          <a:latin typeface="Arial"/>
+                          <a:ea typeface="Arial"/>
+                          <a:cs typeface="Arial"/>
+                        </a:rPr>
+                        <a:t>Technical</a:t>
+                      </a:r>
+                    </a:p>
+                  </a:txBody>
+                  <a:tcPr marL="91440" marR="91440" marT="45720" marB="45720" anchor="ctr">
+                    <a:solidFill>
+                      <a:srgbClr val="FAFAF7"/>
+                    </a:solidFill>
+                  </a:tcPr>
+                </a:tc>
+                <a:tc>
+                  <a:txBody>
+                    <a:bodyPr lIns="133350" tIns="85725" rIns="133350" bIns="85725">
+                      <a:noAutofit/>
+                    </a:bodyPr>
+                    <a:lstStyle/>
+                    <a:p>
+                      <a:r>
+                        <a:rPr sz="2025" b="0">
+                          <a:solidFill>
+                            <a:srgbClr val="17343C"/>
+                          </a:solidFill>
+                          <a:latin typeface="Arial"/>
+                          <a:ea typeface="Arial"/>
+                          <a:cs typeface="Arial"/>
+                        </a:rPr>
+                        <a:t>Hosting options listed</a:t>
+                      </a:r>
+                    </a:p>
+                  </a:txBody>
+                  <a:tcPr marL="91440" marR="91440" marT="45720" marB="45720" anchor="ctr">
+                    <a:solidFill>
+                      <a:srgbClr val="FAFAF7"/>
+                    </a:solidFill>
+                  </a:tcPr>
+                </a:tc>
+                <a:tc>
+                  <a:txBody>
+                    <a:bodyPr lIns="133350" tIns="85725" rIns="133350" bIns="85725">
+                      <a:noAutofit/>
+                    </a:bodyPr>
+                    <a:lstStyle/>
+                    <a:p>
+                      <a:r>
+                        <a:rPr sz="2025" b="0">
+                          <a:solidFill>
+                            <a:srgbClr val="17343C"/>
+                          </a:solidFill>
+                          <a:latin typeface="Arial"/>
+                          <a:ea typeface="Arial"/>
+                          <a:cs typeface="Arial"/>
+                        </a:rPr>
+                        <a:t>Test a suitable stack</a:t>
+                      </a:r>
+                    </a:p>
+                  </a:txBody>
+                  <a:tcPr marL="91440" marR="91440" marT="45720" marB="45720" anchor="ctr">
+                    <a:solidFill>
+                      <a:srgbClr val="FAFAF7"/>
+                    </a:solidFill>
+                  </a:tcPr>
+                </a:tc>
+              </a:tr>
+              <a:tr h="638175">
+                <a:tc>
+                  <a:txBody>
+                    <a:bodyPr lIns="133350" tIns="85725" rIns="133350" bIns="85725">
+                      <a:noAutofit/>
+                    </a:bodyPr>
+                    <a:lstStyle/>
+                    <a:p>
+                      <a:r>
+                        <a:rPr sz="2025" b="0">
+                          <a:solidFill>
+                            <a:srgbClr val="17343C"/>
+                          </a:solidFill>
+                          <a:latin typeface="Arial"/>
+                          <a:ea typeface="Arial"/>
+                          <a:cs typeface="Arial"/>
+                        </a:rPr>
+                        <a:t>Financial</a:t>
+                      </a:r>
+                    </a:p>
+                  </a:txBody>
+                  <a:tcPr marL="91440" marR="91440" marT="45720" marB="45720" anchor="ctr">
+                    <a:solidFill>
+                      <a:srgbClr val="F0F4F3"/>
+                    </a:solidFill>
+                  </a:tcPr>
+                </a:tc>
+                <a:tc>
+                  <a:txBody>
+                    <a:bodyPr lIns="133350" tIns="85725" rIns="133350" bIns="85725">
+                      <a:noAutofit/>
+                    </a:bodyPr>
+                    <a:lstStyle/>
+                    <a:p>
+                      <a:r>
+                        <a:rPr sz="2025" b="0">
+                          <a:solidFill>
+                            <a:srgbClr val="17343C"/>
+                          </a:solidFill>
+                          <a:latin typeface="Arial"/>
+                          <a:ea typeface="Arial"/>
+                          <a:cs typeface="Arial"/>
+                        </a:rPr>
+                        <a:t>Example hosting cost</a:t>
+                      </a:r>
+                    </a:p>
+                  </a:txBody>
+                  <a:tcPr marL="91440" marR="91440" marT="45720" marB="45720" anchor="ctr">
+                    <a:solidFill>
+                      <a:srgbClr val="F0F4F3"/>
+                    </a:solidFill>
+                  </a:tcPr>
+                </a:tc>
+                <a:tc>
+                  <a:txBody>
+                    <a:bodyPr lIns="133350" tIns="85725" rIns="133350" bIns="85725">
+                      <a:noAutofit/>
+                    </a:bodyPr>
+                    <a:lstStyle/>
+                    <a:p>
+                      <a:r>
+                        <a:rPr sz="2025" b="0">
+                          <a:solidFill>
+                            <a:srgbClr val="17343C"/>
+                          </a:solidFill>
+                          <a:latin typeface="Arial"/>
+                          <a:ea typeface="Arial"/>
+                          <a:cs typeface="Arial"/>
+                        </a:rPr>
+                        <a:t>Actual use and supported benefits</a:t>
+                      </a:r>
+                    </a:p>
+                  </a:txBody>
+                  <a:tcPr marL="91440" marR="91440" marT="45720" marB="45720" anchor="ctr">
+                    <a:solidFill>
+                      <a:srgbClr val="F0F4F3"/>
+                    </a:solidFill>
+                  </a:tcPr>
+                </a:tc>
+              </a:tr>
+              <a:tr h="685800">
+                <a:tc>
+                  <a:txBody>
+                    <a:bodyPr lIns="133350" tIns="85725" rIns="133350" bIns="85725">
+                      <a:noAutofit/>
+                    </a:bodyPr>
+                    <a:lstStyle/>
+                    <a:p>
+                      <a:r>
+                        <a:rPr sz="2025" b="0">
+                          <a:solidFill>
+                            <a:srgbClr val="17343C"/>
+                          </a:solidFill>
+                          <a:latin typeface="Arial"/>
+                          <a:ea typeface="Arial"/>
+                          <a:cs typeface="Arial"/>
+                        </a:rPr>
+                        <a:t>Operational</a:t>
+                      </a:r>
+                    </a:p>
+                  </a:txBody>
+                  <a:tcPr marL="91440" marR="91440" marT="45720" marB="45720" anchor="ctr">
+                    <a:solidFill>
+                      <a:srgbClr val="FAFAF7"/>
+                    </a:solidFill>
+                  </a:tcPr>
+                </a:tc>
+                <a:tc>
+                  <a:txBody>
+                    <a:bodyPr lIns="133350" tIns="85725" rIns="133350" bIns="85725">
+                      <a:noAutofit/>
+                    </a:bodyPr>
+                    <a:lstStyle/>
+                    <a:p>
+                      <a:r>
+                        <a:rPr sz="2025" b="0">
+                          <a:solidFill>
+                            <a:srgbClr val="17343C"/>
+                          </a:solidFill>
+                          <a:latin typeface="Arial"/>
+                          <a:ea typeface="Arial"/>
+                          <a:cs typeface="Arial"/>
+                        </a:rPr>
+                        <a:t>Scenario drafted</a:t>
+                      </a:r>
+                    </a:p>
+                  </a:txBody>
+                  <a:tcPr marL="91440" marR="91440" marT="45720" marB="45720" anchor="ctr">
+                    <a:solidFill>
+                      <a:srgbClr val="FAFAF7"/>
+                    </a:solidFill>
+                  </a:tcPr>
+                </a:tc>
+                <a:tc>
+                  <a:txBody>
+                    <a:bodyPr lIns="133350" tIns="85725" rIns="133350" bIns="85725">
+                      <a:noAutofit/>
+                    </a:bodyPr>
+                    <a:lstStyle/>
+                    <a:p>
+                      <a:r>
+                        <a:rPr sz="2025" b="0">
+                          <a:solidFill>
+                            <a:srgbClr val="17343C"/>
+                          </a:solidFill>
+                          <a:latin typeface="Arial"/>
+                          <a:ea typeface="Arial"/>
+                          <a:cs typeface="Arial"/>
+                        </a:rPr>
+                        <a:t>Current KU steps and staff needs</a:t>
+                      </a:r>
+                    </a:p>
+                  </a:txBody>
+                  <a:tcPr marL="91440" marR="91440" marT="45720" marB="45720" anchor="ctr">
+                    <a:solidFill>
+                      <a:srgbClr val="FAFAF7"/>
+                    </a:solidFill>
+                  </a:tcPr>
+                </a:tc>
+              </a:tr>
+              <a:tr h="590550">
+                <a:tc>
+                  <a:txBody>
+                    <a:bodyPr lIns="133350" tIns="85725" rIns="133350" bIns="85725">
+                      <a:noAutofit/>
+                    </a:bodyPr>
+                    <a:lstStyle/>
+                    <a:p>
+                      <a:r>
+                        <a:rPr sz="2025" b="0">
+                          <a:solidFill>
+                            <a:srgbClr val="17343C"/>
+                          </a:solidFill>
+                          <a:latin typeface="Arial"/>
+                          <a:ea typeface="Arial"/>
+                          <a:cs typeface="Arial"/>
+                        </a:rPr>
+                        <a:t>Schedule</a:t>
+                      </a:r>
+                    </a:p>
+                  </a:txBody>
+                  <a:tcPr marL="91440" marR="91440" marT="45720" marB="45720" anchor="ctr">
+                    <a:solidFill>
+                      <a:srgbClr val="F0F4F3"/>
+                    </a:solidFill>
+                  </a:tcPr>
+                </a:tc>
+                <a:tc>
+                  <a:txBody>
+                    <a:bodyPr lIns="133350" tIns="85725" rIns="133350" bIns="85725">
+                      <a:noAutofit/>
+                    </a:bodyPr>
+                    <a:lstStyle/>
+                    <a:p>
+                      <a:r>
+                        <a:rPr sz="2025" b="0">
+                          <a:solidFill>
+                            <a:srgbClr val="17343C"/>
+                          </a:solidFill>
+                          <a:latin typeface="Arial"/>
+                          <a:ea typeface="Arial"/>
+                          <a:cs typeface="Arial"/>
+                        </a:rPr>
+                        <a:t>Tasks divided</a:t>
+                      </a:r>
+                    </a:p>
+                  </a:txBody>
+                  <a:tcPr marL="91440" marR="91440" marT="45720" marB="45720" anchor="ctr">
+                    <a:solidFill>
+                      <a:srgbClr val="F0F4F3"/>
+                    </a:solidFill>
+                  </a:tcPr>
+                </a:tc>
+                <a:tc>
+                  <a:txBody>
+                    <a:bodyPr lIns="133350" tIns="85725" rIns="133350" bIns="85725">
+                      <a:noAutofit/>
+                    </a:bodyPr>
+                    <a:lstStyle/>
+                    <a:p>
+                      <a:r>
+                        <a:rPr sz="2025" b="0">
+                          <a:solidFill>
+                            <a:srgbClr val="17343C"/>
+                          </a:solidFill>
+                          <a:latin typeface="Arial"/>
+                          <a:ea typeface="Arial"/>
+                          <a:cs typeface="Arial"/>
+                        </a:rPr>
+                        <a:t>Deadline and available hours</a:t>
+                      </a:r>
+                    </a:p>
+                  </a:txBody>
+                  <a:tcPr marL="91440" marR="91440" marT="45720" marB="45720" anchor="ctr">
+                    <a:solidFill>
+                      <a:srgbClr val="F0F4F3"/>
+                    </a:solidFill>
+                  </a:tcPr>
+                </a:tc>
+              </a:tr>
+              <a:tr h="638175">
+                <a:tc>
+                  <a:txBody>
+                    <a:bodyPr lIns="133350" tIns="85725" rIns="133350" bIns="85725">
+                      <a:noAutofit/>
+                    </a:bodyPr>
+                    <a:lstStyle/>
+                    <a:p>
+                      <a:r>
+                        <a:rPr sz="2025" b="0">
+                          <a:solidFill>
+                            <a:srgbClr val="17343C"/>
+                          </a:solidFill>
+                          <a:latin typeface="Arial"/>
+                          <a:ea typeface="Arial"/>
+                          <a:cs typeface="Arial"/>
+                        </a:rPr>
+                        <a:t>Data and AI</a:t>
+                      </a:r>
+                    </a:p>
+                  </a:txBody>
+                  <a:tcPr marL="91440" marR="91440" marT="45720" marB="45720" anchor="ctr">
+                    <a:solidFill>
+                      <a:srgbClr val="FAFAF7"/>
+                    </a:solidFill>
+                  </a:tcPr>
+                </a:tc>
+                <a:tc>
+                  <a:txBody>
+                    <a:bodyPr lIns="133350" tIns="85725" rIns="133350" bIns="85725">
+                      <a:noAutofit/>
+                    </a:bodyPr>
+                    <a:lstStyle/>
+                    <a:p>
+                      <a:r>
+                        <a:rPr sz="2025" b="0">
+                          <a:solidFill>
+                            <a:srgbClr val="17343C"/>
+                          </a:solidFill>
+                          <a:latin typeface="Arial"/>
+                          <a:ea typeface="Arial"/>
+                          <a:cs typeface="Arial"/>
+                        </a:rPr>
+                        <a:t>Trial approach planned</a:t>
+                      </a:r>
+                    </a:p>
+                  </a:txBody>
+                  <a:tcPr marL="91440" marR="91440" marT="45720" marB="45720" anchor="ctr">
+                    <a:solidFill>
+                      <a:srgbClr val="FAFAF7"/>
+                    </a:solidFill>
+                  </a:tcPr>
+                </a:tc>
+                <a:tc>
+                  <a:txBody>
+                    <a:bodyPr lIns="133350" tIns="85725" rIns="133350" bIns="85725">
+                      <a:noAutofit/>
+                    </a:bodyPr>
+                    <a:lstStyle/>
+                    <a:p>
+                      <a:r>
+                        <a:rPr sz="2025" b="0">
+                          <a:solidFill>
+                            <a:srgbClr val="17343C"/>
+                          </a:solidFill>
+                          <a:latin typeface="Arial"/>
+                          <a:ea typeface="Arial"/>
+                          <a:cs typeface="Arial"/>
+                        </a:rPr>
+                        <a:t>Data access and model trial</a:t>
+                      </a:r>
+                    </a:p>
+                  </a:txBody>
+                  <a:tcPr marL="91440" marR="91440" marT="45720" marB="45720" anchor="ctr">
+                    <a:solidFill>
+                      <a:srgbClr val="FAFAF7"/>
+                    </a:solidFill>
+                  </a:tcPr>
+                </a:tc>
+              </a:tr>
+              <a:tr h="733425">
+                <a:tc>
+                  <a:txBody>
+                    <a:bodyPr lIns="133350" tIns="85725" rIns="133350" bIns="85725">
+                      <a:noAutofit/>
+                    </a:bodyPr>
+                    <a:lstStyle/>
+                    <a:p>
+                      <a:r>
+                        <a:rPr sz="2025" b="0">
+                          <a:solidFill>
+                            <a:srgbClr val="17343C"/>
+                          </a:solidFill>
+                          <a:latin typeface="Arial"/>
+                          <a:ea typeface="Arial"/>
+                          <a:cs typeface="Arial"/>
+                        </a:rPr>
+                        <a:t>Rules and ethics</a:t>
+                      </a:r>
+                    </a:p>
+                  </a:txBody>
+                  <a:tcPr marL="91440" marR="91440" marT="45720" marB="45720" anchor="ctr">
+                    <a:solidFill>
+                      <a:srgbClr val="F0F4F3"/>
+                    </a:solidFill>
+                  </a:tcPr>
+                </a:tc>
+                <a:tc>
+                  <a:txBody>
+                    <a:bodyPr lIns="133350" tIns="85725" rIns="133350" bIns="85725">
+                      <a:noAutofit/>
+                    </a:bodyPr>
+                    <a:lstStyle/>
+                    <a:p>
+                      <a:r>
+                        <a:rPr sz="2025" b="0">
+                          <a:solidFill>
+                            <a:srgbClr val="17343C"/>
+                          </a:solidFill>
+                          <a:latin typeface="Arial"/>
+                          <a:ea typeface="Arial"/>
+                          <a:cs typeface="Arial"/>
+                        </a:rPr>
+                        <a:t>Data and approval risks noted</a:t>
+                      </a:r>
+                    </a:p>
+                  </a:txBody>
+                  <a:tcPr marL="91440" marR="91440" marT="45720" marB="45720" anchor="ctr">
+                    <a:solidFill>
+                      <a:srgbClr val="F0F4F3"/>
+                    </a:solidFill>
+                  </a:tcPr>
+                </a:tc>
+                <a:tc>
+                  <a:txBody>
+                    <a:bodyPr lIns="133350" tIns="85725" rIns="133350" bIns="85725">
+                      <a:noAutofit/>
+                    </a:bodyPr>
+                    <a:lstStyle/>
+                    <a:p>
+                      <a:r>
+                        <a:rPr sz="2025" b="0">
+                          <a:solidFill>
+                            <a:srgbClr val="17343C"/>
+                          </a:solidFill>
+                          <a:latin typeface="Arial"/>
+                          <a:ea typeface="Arial"/>
+                          <a:cs typeface="Arial"/>
+                        </a:rPr>
+                        <a:t>Relevant KU rules and controls</a:t>
+                      </a:r>
+                    </a:p>
+                  </a:txBody>
+                  <a:tcPr marL="91440" marR="91440" marT="45720" marB="45720" anchor="ctr">
+                    <a:solidFill>
+                      <a:srgbClr val="F0F4F3"/>
+                    </a:solidFill>
+                  </a:tcPr>
+                </a:tc>
+              </a:tr>
+            </a:tbl>
+          </a:graphicData>
+        </a:graphic>
+      </p:graphicFrame>
+      <p:sp>
+        <p:nvSpPr>
+          <p:cNvPr id="4" name="readiness">
+            <a:extLst xmlns:a="http://schemas.openxmlformats.org/drawingml/2006/main">
+              <a:ext uri="{FF2B5EF4-FFF2-40B4-BE49-F238E27FC236}">
+                <a16:creationId xmlns:a16="http://schemas.microsoft.com/office/drawing/2014/main" id="{F1C78BAE-DCFB-4F98-94CA-E6BA0E7CBC21}"/>
+              </a:ext>
+            </a:extLst>
+          </p:cNvPr>
+          <p:cNvSpPr>
+            <a:spLocks xmlns:a="http://schemas.openxmlformats.org/drawingml/2006/main" noGrp="1"/>
+          </p:cNvSpPr>
+          <p:nvPr/>
+        </p:nvSpPr>
+        <p:spPr>
+          <a:xfrm xmlns:a="http://schemas.openxmlformats.org/drawingml/2006/main">
+            <a:off x="647700" y="6172200"/>
+            <a:ext cx="10896600" cy="400050"/>
+          </a:xfrm>
+          <a:prstGeom xmlns:a="http://schemas.openxmlformats.org/drawingml/2006/main" prst="rect">
+            <a:avLst/>
+          </a:prstGeom>
+          <a:noFill xmlns:a="http://schemas.openxmlformats.org/drawingml/2006/main"/>
+          <a:ln xmlns:a="http://schemas.openxmlformats.org/drawingml/2006/main" w="0">
+            <a:noFill/>
+          </a:ln>
+        </p:spPr>
+        <p:txBody>
+          <a:bodyPr xmlns:a="http://schemas.openxmlformats.org/drawingml/2006/main" wrap="square" lIns="0" tIns="0" rIns="0" bIns="0" anchor="t">
+            <a:noAutofit/>
+          </a:bodyPr>
+          <a:lstStyle xmlns:a="http://schemas.openxmlformats.org/drawingml/2006/main"/>
+          <a:p xmlns:a="http://schemas.openxmlformats.org/drawingml/2006/main">
+            <a:pPr algn="l">
+              <a:defRPr sz="2025" b="1">
+                <a:solidFill>
+                  <a:srgbClr val="17343C"/>
+                </a:solidFill>
+                <a:latin typeface="Arial"/>
+                <a:ea typeface="Arial"/>
+                <a:cs typeface="Arial"/>
+              </a:defRPr>
+            </a:pPr>
+            <a:r>
+              <a:rPr sz="2025" b="1">
+                <a:solidFill>
+                  <a:srgbClr val="17343C"/>
+                </a:solidFill>
+                <a:latin typeface="Arial"/>
+                <a:ea typeface="Arial"/>
+                <a:cs typeface="Arial"/>
+              </a:rPr>
+              <a:t>These are draft findings. The final report needs all six checks.</a:t>
+            </a:r>
+          </a:p>
+        </p:txBody>
+      </p:sp>
+    </p:spTree>
+    <p:extLst>
+      <p:ext uri="{BB962C8B-B14F-4D97-AF65-F5344CB8AC3E}">
+        <p14:creationId xmlns:p14="http://schemas.microsoft.com/office/powerpoint/2010/main" val="472153283"/>
+      </p:ext>
+    </p:extLst>
+  </p:cSld>
+</p:sld>
+</file>
+
+<file path=ppt/slides/slide8.xml><?xml version="1.0" encoding="utf-8"?>
+<p:sld xmlns:p="http://schemas.openxmlformats.org/presentationml/2006/main">
+  <p:cSld>
+    <p:bg>
+      <p:bgPr>
+        <a:solidFill xmlns:a="http://schemas.openxmlformats.org/drawingml/2006/main">
+          <a:srgbClr val="FAFAF7"/>
+        </a:solidFill>
+      </p:bgPr>
+    </p:bg>
+    <p:spTree>
+      <p:nvGrpSpPr>
+        <p:cNvPr id="1" name=""/>
+        <p:cNvGrpSpPr/>
+        <p:nvPr/>
+      </p:nvGrpSpPr>
+      <p:grpSpPr>
+        <a:xfrm xmlns:a="http://schemas.openxmlformats.org/drawingml/2006/main"/>
+      </p:grpSpPr>
+      <p:sp>
+        <p:nvSpPr>
+          <p:cNvPr id="9" name="title">
+            <a:extLst xmlns:a="http://schemas.openxmlformats.org/drawingml/2006/main">
+              <a:ext uri="{FF2B5EF4-FFF2-40B4-BE49-F238E27FC236}">
+                <a16:creationId xmlns:a16="http://schemas.microsoft.com/office/drawing/2014/main" id="{A4F3B1BB-C555-44C7-A81C-E058C958D622}"/>
+              </a:ext>
+            </a:extLst>
+          </p:cNvPr>
+          <p:cNvSpPr>
+            <a:spLocks xmlns:a="http://schemas.openxmlformats.org/drawingml/2006/main" noGrp="1"/>
+          </p:cNvSpPr>
+          <p:nvPr/>
+        </p:nvSpPr>
+        <p:spPr>
+          <a:xfrm xmlns:a="http://schemas.openxmlformats.org/drawingml/2006/main">
+            <a:off x="647700" y="457200"/>
+            <a:ext cx="10896600" cy="714375"/>
+          </a:xfrm>
+          <a:prstGeom xmlns:a="http://schemas.openxmlformats.org/drawingml/2006/main" prst="rect">
+            <a:avLst/>
+          </a:prstGeom>
+          <a:noFill xmlns:a="http://schemas.openxmlformats.org/drawingml/2006/main"/>
+          <a:ln xmlns:a="http://schemas.openxmlformats.org/drawingml/2006/main" w="0">
+            <a:noFill/>
+          </a:ln>
+        </p:spPr>
+        <p:txBody>
+          <a:bodyPr xmlns:a="http://schemas.openxmlformats.org/drawingml/2006/main" wrap="square" lIns="0" tIns="0" rIns="0" bIns="0" anchor="t">
+            <a:noAutofit/>
+          </a:bodyPr>
+          <a:lstStyle xmlns:a="http://schemas.openxmlformats.org/drawingml/2006/main"/>
+          <a:p xmlns:a="http://schemas.openxmlformats.org/drawingml/2006/main">
+            <a:pPr algn="l">
+              <a:defRPr sz="3450" b="1">
+                <a:solidFill>
+                  <a:srgbClr val="17343C"/>
+                </a:solidFill>
+                <a:latin typeface="Arial"/>
+                <a:ea typeface="Arial"/>
+                <a:cs typeface="Arial"/>
+              </a:defRPr>
+            </a:pPr>
+            <a:r>
+              <a:rPr sz="3450" b="1">
+                <a:solidFill>
+                  <a:srgbClr val="17343C"/>
+                </a:solidFill>
+                <a:latin typeface="Arial"/>
+                <a:ea typeface="Arial"/>
+                <a:cs typeface="Arial"/>
+              </a:rPr>
+              <a:t>Our first hosting cost estimate</a:t>
+            </a:r>
+          </a:p>
+        </p:txBody>
+      </p:sp>
+      <p:sp>
+        <p:nvSpPr>
+          <p:cNvPr id="2" name="presenter">
+            <a:extLst xmlns:a="http://schemas.openxmlformats.org/drawingml/2006/main">
+              <a:ext uri="{FF2B5EF4-FFF2-40B4-BE49-F238E27FC236}">
+                <a16:creationId xmlns:a16="http://schemas.microsoft.com/office/drawing/2014/main" id="{FF4443D7-236D-4C3D-8318-7C170E6B3EF3}"/>
+              </a:ext>
+            </a:extLst>
+          </p:cNvPr>
+          <p:cNvSpPr>
+            <a:spLocks xmlns:a="http://schemas.openxmlformats.org/drawingml/2006/main" noGrp="1"/>
+          </p:cNvSpPr>
+          <p:nvPr/>
+        </p:nvSpPr>
+        <p:spPr>
+          <a:xfrm xmlns:a="http://schemas.openxmlformats.org/drawingml/2006/main">
+            <a:off x="10144125" y="6429375"/>
+            <a:ext cx="1400175" cy="238125"/>
+          </a:xfrm>
+          <a:prstGeom xmlns:a="http://schemas.openxmlformats.org/drawingml/2006/main" prst="rect">
+            <a:avLst/>
+          </a:prstGeom>
+          <a:noFill xmlns:a="http://schemas.openxmlformats.org/drawingml/2006/main"/>
+          <a:ln xmlns:a="http://schemas.openxmlformats.org/drawingml/2006/main" w="0">
+            <a:noFill/>
+          </a:ln>
+        </p:spPr>
+        <p:txBody>
+          <a:bodyPr xmlns:a="http://schemas.openxmlformats.org/drawingml/2006/main" wrap="square" lIns="0" tIns="0" rIns="0" bIns="0" anchor="t">
+            <a:noAutofit/>
+          </a:bodyPr>
+          <a:lstStyle xmlns:a="http://schemas.openxmlformats.org/drawingml/2006/main"/>
+          <a:p xmlns:a="http://schemas.openxmlformats.org/drawingml/2006/main">
+            <a:pPr algn="l">
+              <a:defRPr sz="1350" b="0">
+                <a:solidFill>
+                  <a:srgbClr val="526264"/>
+                </a:solidFill>
+                <a:latin typeface="Arial"/>
+                <a:ea typeface="Arial"/>
+                <a:cs typeface="Arial"/>
+              </a:defRPr>
+            </a:pPr>
+            <a:r>
+              <a:rPr sz="1350" b="0">
+                <a:solidFill>
+                  <a:srgbClr val="526264"/>
+                </a:solidFill>
+                <a:latin typeface="Arial"/>
+                <a:ea typeface="Arial"/>
+                <a:cs typeface="Arial"/>
+              </a:rPr>
+              <a:t>Sultan   8</a:t>
+            </a:r>
+          </a:p>
+        </p:txBody>
+      </p:sp>
+      <p:sp>
+        <p:nvSpPr>
+          <p:cNvPr id="3" name="total">
+            <a:extLst xmlns:a="http://schemas.openxmlformats.org/drawingml/2006/main">
+              <a:ext uri="{FF2B5EF4-FFF2-40B4-BE49-F238E27FC236}">
+                <a16:creationId xmlns:a16="http://schemas.microsoft.com/office/drawing/2014/main" id="{BD3B3339-BD29-4360-91D8-2B6972992275}"/>
+              </a:ext>
+            </a:extLst>
+          </p:cNvPr>
+          <p:cNvSpPr>
+            <a:spLocks xmlns:a="http://schemas.openxmlformats.org/drawingml/2006/main" noGrp="1"/>
+          </p:cNvSpPr>
+          <p:nvPr/>
+        </p:nvSpPr>
+        <p:spPr>
+          <a:xfrm xmlns:a="http://schemas.openxmlformats.org/drawingml/2006/main">
+            <a:off x="647700" y="1771650"/>
+            <a:ext cx="3895725" cy="895350"/>
+          </a:xfrm>
+          <a:prstGeom xmlns:a="http://schemas.openxmlformats.org/drawingml/2006/main" prst="rect">
+            <a:avLst/>
+          </a:prstGeom>
+          <a:noFill xmlns:a="http://schemas.openxmlformats.org/drawingml/2006/main"/>
+          <a:ln xmlns:a="http://schemas.openxmlformats.org/drawingml/2006/main" w="0">
+            <a:noFill/>
+          </a:ln>
+        </p:spPr>
+        <p:txBody>
+          <a:bodyPr xmlns:a="http://schemas.openxmlformats.org/drawingml/2006/main" wrap="square" lIns="0" tIns="0" rIns="0" bIns="0" anchor="t">
+            <a:noAutofit/>
+          </a:bodyPr>
+          <a:lstStyle xmlns:a="http://schemas.openxmlformats.org/drawingml/2006/main"/>
+          <a:p xmlns:a="http://schemas.openxmlformats.org/drawingml/2006/main">
+            <a:pPr algn="l">
+              <a:defRPr sz="4950" b="1">
+                <a:solidFill>
+                  <a:srgbClr val="17343C"/>
+                </a:solidFill>
+                <a:latin typeface="Arial"/>
+                <a:ea typeface="Arial"/>
+                <a:cs typeface="Arial"/>
+              </a:defRPr>
+            </a:pPr>
+            <a:r>
+              <a:rPr sz="4950" b="1">
+                <a:solidFill>
+                  <a:srgbClr val="17343C"/>
+                </a:solidFill>
+                <a:latin typeface="Arial"/>
+                <a:ea typeface="Arial"/>
+                <a:cs typeface="Arial"/>
+              </a:rPr>
+              <a:t>USD 6.20</a:t>
+            </a:r>
+          </a:p>
+        </p:txBody>
+      </p:sp>
+      <p:sp>
+        <p:nvSpPr>
+          <p:cNvPr id="4" name="total-caption">
+            <a:extLst xmlns:a="http://schemas.openxmlformats.org/drawingml/2006/main">
+              <a:ext uri="{FF2B5EF4-FFF2-40B4-BE49-F238E27FC236}">
+                <a16:creationId xmlns:a16="http://schemas.microsoft.com/office/drawing/2014/main" id="{7097A24D-51C0-4294-B820-856545391608}"/>
+              </a:ext>
+            </a:extLst>
+          </p:cNvPr>
+          <p:cNvSpPr>
+            <a:spLocks xmlns:a="http://schemas.openxmlformats.org/drawingml/2006/main" noGrp="1"/>
+          </p:cNvSpPr>
+          <p:nvPr/>
+        </p:nvSpPr>
+        <p:spPr>
+          <a:xfrm xmlns:a="http://schemas.openxmlformats.org/drawingml/2006/main">
+            <a:off x="647700" y="2781300"/>
+            <a:ext cx="3829050" cy="828675"/>
+          </a:xfrm>
+          <a:prstGeom xmlns:a="http://schemas.openxmlformats.org/drawingml/2006/main" prst="rect">
+            <a:avLst/>
+          </a:prstGeom>
+          <a:noFill xmlns:a="http://schemas.openxmlformats.org/drawingml/2006/main"/>
+          <a:ln xmlns:a="http://schemas.openxmlformats.org/drawingml/2006/main" w="0">
+            <a:noFill/>
+          </a:ln>
+        </p:spPr>
+        <p:txBody>
+          <a:bodyPr xmlns:a="http://schemas.openxmlformats.org/drawingml/2006/main" wrap="square" lIns="0" tIns="0" rIns="0" bIns="0" anchor="t">
+            <a:noAutofit/>
+          </a:bodyPr>
+          <a:lstStyle xmlns:a="http://schemas.openxmlformats.org/drawingml/2006/main"/>
+          <a:p xmlns:a="http://schemas.openxmlformats.org/drawingml/2006/main">
+            <a:pPr algn="l">
+              <a:defRPr sz="2250" b="1">
+                <a:solidFill>
+                  <a:srgbClr val="26746D"/>
+                </a:solidFill>
+                <a:latin typeface="Arial"/>
+                <a:ea typeface="Arial"/>
+                <a:cs typeface="Arial"/>
+              </a:defRPr>
+            </a:pPr>
+            <a:r>
+              <a:rPr sz="2250" b="1">
+                <a:solidFill>
+                  <a:srgbClr val="26746D"/>
+                </a:solidFill>
+                <a:latin typeface="Arial"/>
+                <a:ea typeface="Arial"/>
+                <a:cs typeface="Arial"/>
+              </a:rPr>
+              <a:t>Illustrative monthly</a:t>
+            </a:r>
+          </a:p>
+          <a:p xmlns:a="http://schemas.openxmlformats.org/drawingml/2006/main">
+            <a:pPr algn="l">
+              <a:defRPr sz="2250" b="1">
+                <a:solidFill>
+                  <a:srgbClr val="26746D"/>
+                </a:solidFill>
+                <a:latin typeface="Arial"/>
+                <a:ea typeface="Arial"/>
+                <a:cs typeface="Arial"/>
+              </a:defRPr>
+            </a:pPr>
+            <a:r>
+              <a:rPr sz="2250" b="1">
+                <a:solidFill>
+                  <a:srgbClr val="26746D"/>
+                </a:solidFill>
+                <a:latin typeface="Arial"/>
+                <a:ea typeface="Arial"/>
+                <a:cs typeface="Arial"/>
+              </a:rPr>
+              <a:t>Railway hosting cost</a:t>
+            </a:r>
+          </a:p>
+        </p:txBody>
+      </p:sp>
+      <p:sp>
+        <p:nvSpPr>
+          <p:cNvPr id="5" name="free-option">
+            <a:extLst xmlns:a="http://schemas.openxmlformats.org/drawingml/2006/main">
+              <a:ext uri="{FF2B5EF4-FFF2-40B4-BE49-F238E27FC236}">
+                <a16:creationId xmlns:a16="http://schemas.microsoft.com/office/drawing/2014/main" id="{BB3035E6-260F-433B-819A-CD85AF45B57A}"/>
+              </a:ext>
+            </a:extLst>
+          </p:cNvPr>
+          <p:cNvSpPr>
+            <a:spLocks xmlns:a="http://schemas.openxmlformats.org/drawingml/2006/main" noGrp="1"/>
+          </p:cNvSpPr>
+          <p:nvPr/>
+        </p:nvSpPr>
+        <p:spPr>
+          <a:xfrm xmlns:a="http://schemas.openxmlformats.org/drawingml/2006/main">
+            <a:off x="647700" y="4114800"/>
+            <a:ext cx="3829050" cy="762000"/>
+          </a:xfrm>
+          <a:prstGeom xmlns:a="http://schemas.openxmlformats.org/drawingml/2006/main" prst="rect">
+            <a:avLst/>
+          </a:prstGeom>
+          <a:noFill xmlns:a="http://schemas.openxmlformats.org/drawingml/2006/main"/>
+          <a:ln xmlns:a="http://schemas.openxmlformats.org/drawingml/2006/main" w="0">
+            <a:noFill/>
+          </a:ln>
+        </p:spPr>
+        <p:txBody>
+          <a:bodyPr xmlns:a="http://schemas.openxmlformats.org/drawingml/2006/main" wrap="square" lIns="0" tIns="0" rIns="0" bIns="0" anchor="t">
+            <a:noAutofit/>
+          </a:bodyPr>
+          <a:lstStyle xmlns:a="http://schemas.openxmlformats.org/drawingml/2006/main"/>
+          <a:p xmlns:a="http://schemas.openxmlformats.org/drawingml/2006/main">
+            <a:pPr algn="l">
+              <a:defRPr sz="2100" b="1">
+                <a:solidFill>
+                  <a:srgbClr val="17343C"/>
+                </a:solidFill>
+                <a:latin typeface="Arial"/>
+                <a:ea typeface="Arial"/>
+                <a:cs typeface="Arial"/>
+              </a:defRPr>
+            </a:pPr>
+            <a:r>
+              <a:rPr sz="2100" b="1">
+                <a:solidFill>
+                  <a:srgbClr val="17343C"/>
+                </a:solidFill>
+                <a:latin typeface="Arial"/>
+                <a:ea typeface="Arial"/>
+                <a:cs typeface="Arial"/>
+              </a:rPr>
+              <a:t>Free option to test</a:t>
+            </a:r>
+          </a:p>
+          <a:p xmlns:a="http://schemas.openxmlformats.org/drawingml/2006/main">
+            <a:pPr algn="l">
+              <a:defRPr sz="2100" b="1">
+                <a:solidFill>
+                  <a:srgbClr val="17343C"/>
+                </a:solidFill>
+                <a:latin typeface="Arial"/>
+                <a:ea typeface="Arial"/>
+                <a:cs typeface="Arial"/>
+              </a:defRPr>
+            </a:pPr>
+            <a:r>
+              <a:rPr sz="2100" b="1">
+                <a:solidFill>
+                  <a:srgbClr val="17343C"/>
+                </a:solidFill>
+                <a:latin typeface="Arial"/>
+                <a:ea typeface="Arial"/>
+                <a:cs typeface="Arial"/>
+              </a:rPr>
+              <a:t>Render + Neon</a:t>
+            </a:r>
+          </a:p>
+        </p:txBody>
+      </p:sp>
+      <p:sp>
+        <p:nvSpPr>
+          <p:cNvPr id="6" name="free-limit">
+            <a:extLst xmlns:a="http://schemas.openxmlformats.org/drawingml/2006/main">
+              <a:ext uri="{FF2B5EF4-FFF2-40B4-BE49-F238E27FC236}">
+                <a16:creationId xmlns:a16="http://schemas.microsoft.com/office/drawing/2014/main" id="{9AB1F5E1-6B78-487B-93EE-4306D44A5096}"/>
+              </a:ext>
+            </a:extLst>
+          </p:cNvPr>
+          <p:cNvSpPr>
+            <a:spLocks xmlns:a="http://schemas.openxmlformats.org/drawingml/2006/main" noGrp="1"/>
+          </p:cNvSpPr>
+          <p:nvPr/>
+        </p:nvSpPr>
+        <p:spPr>
+          <a:xfrm xmlns:a="http://schemas.openxmlformats.org/drawingml/2006/main">
+            <a:off x="647700" y="5029200"/>
+            <a:ext cx="3924300" cy="742950"/>
+          </a:xfrm>
+          <a:prstGeom xmlns:a="http://schemas.openxmlformats.org/drawingml/2006/main" prst="rect">
+            <a:avLst/>
+          </a:prstGeom>
+          <a:noFill xmlns:a="http://schemas.openxmlformats.org/drawingml/2006/main"/>
+          <a:ln xmlns:a="http://schemas.openxmlformats.org/drawingml/2006/main" w="0">
+            <a:noFill/>
+          </a:ln>
+        </p:spPr>
+        <p:txBody>
+          <a:bodyPr xmlns:a="http://schemas.openxmlformats.org/drawingml/2006/main" wrap="square" lIns="0" tIns="0" rIns="0" bIns="0" anchor="t">
+            <a:noAutofit/>
+          </a:bodyPr>
+          <a:lstStyle xmlns:a="http://schemas.openxmlformats.org/drawingml/2006/main"/>
+          <a:p xmlns:a="http://schemas.openxmlformats.org/drawingml/2006/main">
+            <a:pPr algn="l">
+              <a:defRPr sz="1800" b="0">
+                <a:solidFill>
+                  <a:srgbClr val="526264"/>
+                </a:solidFill>
+                <a:latin typeface="Arial"/>
+                <a:ea typeface="Arial"/>
+                <a:cs typeface="Arial"/>
+              </a:defRPr>
+            </a:pPr>
+            <a:r>
+              <a:rPr sz="1800" b="0">
+                <a:solidFill>
+                  <a:srgbClr val="526264"/>
+                </a:solidFill>
+                <a:latin typeface="Arial"/>
+                <a:ea typeface="Arial"/>
+                <a:cs typeface="Arial"/>
+              </a:rPr>
+              <a:t>Free limits and idle sleep apply.</a:t>
+            </a:r>
+          </a:p>
+          <a:p xmlns:a="http://schemas.openxmlformats.org/drawingml/2006/main">
+            <a:pPr algn="l">
+              <a:defRPr sz="1800" b="0">
+                <a:solidFill>
+                  <a:srgbClr val="526264"/>
+                </a:solidFill>
+                <a:latin typeface="Arial"/>
+                <a:ea typeface="Arial"/>
+                <a:cs typeface="Arial"/>
+              </a:defRPr>
+            </a:pPr>
+            <a:r>
+              <a:rPr sz="1800" b="0">
+                <a:solidFill>
+                  <a:srgbClr val="526264"/>
+                </a:solidFill>
+                <a:latin typeface="Arial"/>
+                <a:ea typeface="Arial"/>
+                <a:cs typeface="Arial"/>
+              </a:rPr>
+              <a:t>Upload storage still needs a plan.</a:t>
+            </a:r>
+          </a:p>
+        </p:txBody>
+      </p:sp>
+      <p:graphicFrame>
+        <p:nvGraphicFramePr>
+          <p:cNvPr id="15" name="Chart"/>
+          <p:cNvGraphicFramePr/>
+          <p:nvPr/>
+        </p:nvGraphicFramePr>
+        <p:xfrm>
+          <a:off xmlns:a="http://schemas.openxmlformats.org/drawingml/2006/main" x="4810125" y="1695450"/>
+          <a:ext xmlns:a="http://schemas.openxmlformats.org/drawingml/2006/main" cx="6734175" cy="3629025"/>
+        </p:xfrm>
+        <a:graphic xmlns:a="http://schemas.openxmlformats.org/drawingml/2006/main">
+          <a:graphicData uri="http://schemas.openxmlformats.org/drawingml/2006/chart">
+            <c:chart xmlns:r="http://schemas.openxmlformats.org/officeDocument/2006/relationships" xmlns:c="http://schemas.openxmlformats.org/drawingml/2006/chart" r:id="R44235931d0454288"/>
+          </a:graphicData>
+        </a:graphic>
+      </p:graphicFrame>
+      <p:sp>
+        <p:nvSpPr>
+          <p:cNvPr id="8" name="assumption">
+            <a:extLst xmlns:a="http://schemas.openxmlformats.org/drawingml/2006/main">
+              <a:ext uri="{FF2B5EF4-FFF2-40B4-BE49-F238E27FC236}">
+                <a16:creationId xmlns:a16="http://schemas.microsoft.com/office/drawing/2014/main" id="{FBB911E9-EB17-4929-BFB9-ECA4B5CF393B}"/>
+              </a:ext>
+            </a:extLst>
+          </p:cNvPr>
+          <p:cNvSpPr>
+            <a:spLocks xmlns:a="http://schemas.openxmlformats.org/drawingml/2006/main" noGrp="1"/>
+          </p:cNvSpPr>
+          <p:nvPr/>
+        </p:nvSpPr>
+        <p:spPr>
+          <a:xfrm xmlns:a="http://schemas.openxmlformats.org/drawingml/2006/main">
+            <a:off x="647700" y="5934075"/>
+            <a:ext cx="10896600" cy="552450"/>
+          </a:xfrm>
+          <a:prstGeom xmlns:a="http://schemas.openxmlformats.org/drawingml/2006/main" prst="rect">
+            <a:avLst/>
+          </a:prstGeom>
+          <a:noFill xmlns:a="http://schemas.openxmlformats.org/drawingml/2006/main"/>
+          <a:ln xmlns:a="http://schemas.openxmlformats.org/drawingml/2006/main" w="0">
+            <a:noFill/>
+          </a:ln>
+        </p:spPr>
+        <p:txBody>
+          <a:bodyPr xmlns:a="http://schemas.openxmlformats.org/drawingml/2006/main" wrap="square" lIns="0" tIns="0" rIns="0" bIns="0" anchor="t">
+            <a:noAutofit/>
+          </a:bodyPr>
+          <a:lstStyle xmlns:a="http://schemas.openxmlformats.org/drawingml/2006/main"/>
+          <a:p xmlns:a="http://schemas.openxmlformats.org/drawingml/2006/main">
+            <a:pPr algn="l">
+              <a:defRPr sz="1725" b="0">
+                <a:solidFill>
+                  <a:srgbClr val="526264"/>
+                </a:solidFill>
+                <a:latin typeface="Arial"/>
+                <a:ea typeface="Arial"/>
+                <a:cs typeface="Arial"/>
+              </a:defRPr>
+            </a:pPr>
+            <a:r>
+              <a:rPr sz="1725" b="0">
+                <a:solidFill>
+                  <a:srgbClr val="526264"/>
+                </a:solidFill>
+                <a:latin typeface="Arial"/>
+                <a:ea typeface="Arial"/>
+                <a:cs typeface="Arial"/>
+              </a:rPr>
+              <a:t>Assumed use: 0.5 GB memory, 0.05 CPU cores, 1 GB stored, 1 GB sent.</a:t>
+            </a:r>
+          </a:p>
+          <a:p xmlns:a="http://schemas.openxmlformats.org/drawingml/2006/main">
+            <a:pPr algn="l">
+              <a:defRPr sz="1725" b="0">
+                <a:solidFill>
+                  <a:srgbClr val="526264"/>
+                </a:solidFill>
+                <a:latin typeface="Arial"/>
+                <a:ea typeface="Arial"/>
+                <a:cs typeface="Arial"/>
+              </a:defRPr>
+            </a:pPr>
+            <a:r>
+              <a:rPr sz="1725" b="0">
+                <a:solidFill>
+                  <a:srgbClr val="526264"/>
+                </a:solidFill>
+                <a:latin typeface="Arial"/>
+                <a:ea typeface="Arial"/>
+                <a:cs typeface="Arial"/>
+              </a:rPr>
+              <a:t>Across the app and database. AI, upload storage and other costs still to add.</a:t>
+            </a:r>
+          </a:p>
+        </p:txBody>
+      </p:sp>
+    </p:spTree>
+    <p:extLst>
+      <p:ext uri="{BB962C8B-B14F-4D97-AF65-F5344CB8AC3E}">
+        <p14:creationId xmlns:p14="http://schemas.microsoft.com/office/powerpoint/2010/main" val="393359676"/>
+      </p:ext>
+    </p:extLst>
+  </p:cSld>
+</p:sld>
+</file>
+
+<file path=ppt/slides/slide9.xml><?xml version="1.0" encoding="utf-8"?>
+<p:sld xmlns:p="http://schemas.openxmlformats.org/presentationml/2006/main">
+  <p:cSld>
+    <p:bg>
+      <p:bgPr>
+        <a:solidFill xmlns:a="http://schemas.openxmlformats.org/drawingml/2006/main">
+          <a:srgbClr val="FAFAF7"/>
+        </a:solidFill>
+      </p:bgPr>
+    </p:bg>
+    <p:spTree>
+      <p:nvGrpSpPr>
+        <p:cNvPr id="1" name=""/>
+        <p:cNvGrpSpPr/>
+        <p:nvPr/>
+      </p:nvGrpSpPr>
+      <p:grpSpPr>
+        <a:xfrm xmlns:a="http://schemas.openxmlformats.org/drawingml/2006/main"/>
+      </p:grpSpPr>
+      <p:sp>
+        <p:nvSpPr>
+          <p:cNvPr id="6" name="title">
+            <a:extLst xmlns:a="http://schemas.openxmlformats.org/drawingml/2006/main">
+              <a:ext uri="{FF2B5EF4-FFF2-40B4-BE49-F238E27FC236}">
+                <a16:creationId xmlns:a16="http://schemas.microsoft.com/office/drawing/2014/main" id="{10B5F09F-EF3A-4103-A34F-137AB9E84419}"/>
+              </a:ext>
+            </a:extLst>
+          </p:cNvPr>
+          <p:cNvSpPr>
+            <a:spLocks xmlns:a="http://schemas.openxmlformats.org/drawingml/2006/main" noGrp="1"/>
+          </p:cNvSpPr>
+          <p:nvPr/>
+        </p:nvSpPr>
+        <p:spPr>
+          <a:xfrm xmlns:a="http://schemas.openxmlformats.org/drawingml/2006/main">
+            <a:off x="647700" y="457200"/>
+            <a:ext cx="10896600" cy="714375"/>
+          </a:xfrm>
+          <a:prstGeom xmlns:a="http://schemas.openxmlformats.org/drawingml/2006/main" prst="rect">
+            <a:avLst/>
+          </a:prstGeom>
+          <a:noFill xmlns:a="http://schemas.openxmlformats.org/drawingml/2006/main"/>
+          <a:ln xmlns:a="http://schemas.openxmlformats.org/drawingml/2006/main" w="0">
+            <a:noFill/>
+          </a:ln>
+        </p:spPr>
+        <p:txBody>
+          <a:bodyPr xmlns:a="http://schemas.openxmlformats.org/drawingml/2006/main" wrap="square" lIns="0" tIns="0" rIns="0" bIns="0" anchor="t">
+            <a:noAutofit/>
+          </a:bodyPr>
+          <a:lstStyle xmlns:a="http://schemas.openxmlformats.org/drawingml/2006/main"/>
+          <a:p xmlns:a="http://schemas.openxmlformats.org/drawingml/2006/main">
+            <a:pPr algn="l">
+              <a:defRPr sz="3450" b="1">
+                <a:solidFill>
+                  <a:srgbClr val="17343C"/>
+                </a:solidFill>
+                <a:latin typeface="Arial"/>
+                <a:ea typeface="Arial"/>
+                <a:cs typeface="Arial"/>
+              </a:defRPr>
+            </a:pPr>
+            <a:r>
+              <a:rPr sz="3450" b="1">
+                <a:solidFill>
+                  <a:srgbClr val="17343C"/>
+                </a:solidFill>
+                <a:latin typeface="Arial"/>
+                <a:ea typeface="Arial"/>
+                <a:cs typeface="Arial"/>
+              </a:rPr>
+              <a:t>What we will finish next</a:t>
+            </a:r>
+          </a:p>
+        </p:txBody>
+      </p:sp>
+      <p:sp>
+        <p:nvSpPr>
+          <p:cNvPr id="2" name="presenter">
+            <a:extLst xmlns:a="http://schemas.openxmlformats.org/drawingml/2006/main">
+              <a:ext uri="{FF2B5EF4-FFF2-40B4-BE49-F238E27FC236}">
+                <a16:creationId xmlns:a16="http://schemas.microsoft.com/office/drawing/2014/main" id="{4C1C102D-CADB-445E-94FF-B08FDAB55E69}"/>
+              </a:ext>
+            </a:extLst>
+          </p:cNvPr>
+          <p:cNvSpPr>
+            <a:spLocks xmlns:a="http://schemas.openxmlformats.org/drawingml/2006/main" noGrp="1"/>
+          </p:cNvSpPr>
+          <p:nvPr/>
+        </p:nvSpPr>
+        <p:spPr>
+          <a:xfrm xmlns:a="http://schemas.openxmlformats.org/drawingml/2006/main">
+            <a:off x="10144125" y="6429375"/>
+            <a:ext cx="1400175" cy="238125"/>
+          </a:xfrm>
+          <a:prstGeom xmlns:a="http://schemas.openxmlformats.org/drawingml/2006/main" prst="rect">
+            <a:avLst/>
+          </a:prstGeom>
+          <a:noFill xmlns:a="http://schemas.openxmlformats.org/drawingml/2006/main"/>
+          <a:ln xmlns:a="http://schemas.openxmlformats.org/drawingml/2006/main" w="0">
+            <a:noFill/>
+          </a:ln>
+        </p:spPr>
+        <p:txBody>
+          <a:bodyPr xmlns:a="http://schemas.openxmlformats.org/drawingml/2006/main" wrap="square" lIns="0" tIns="0" rIns="0" bIns="0" anchor="t">
+            <a:noAutofit/>
+          </a:bodyPr>
+          <a:lstStyle xmlns:a="http://schemas.openxmlformats.org/drawingml/2006/main"/>
+          <a:p xmlns:a="http://schemas.openxmlformats.org/drawingml/2006/main">
+            <a:pPr algn="l">
+              <a:defRPr sz="1350" b="0">
+                <a:solidFill>
+                  <a:srgbClr val="526264"/>
+                </a:solidFill>
+                <a:latin typeface="Arial"/>
+                <a:ea typeface="Arial"/>
+                <a:cs typeface="Arial"/>
+              </a:defRPr>
+            </a:pPr>
+            <a:r>
+              <a:rPr sz="1350" b="0">
+                <a:solidFill>
+                  <a:srgbClr val="526264"/>
+                </a:solidFill>
+                <a:latin typeface="Arial"/>
+                <a:ea typeface="Arial"/>
+                <a:cs typeface="Arial"/>
+              </a:rPr>
+              <a:t>Sultan   9</a:t>
+            </a:r>
+          </a:p>
+        </p:txBody>
+      </p:sp>
+      <p:graphicFrame>
+        <p:nvGraphicFramePr>
+          <p:cNvPr id="8" name=""/>
+          <p:cNvGraphicFramePr/>
+          <p:nvPr/>
+        </p:nvGraphicFramePr>
+        <p:xfrm>
+          <a:off xmlns:a="http://schemas.openxmlformats.org/drawingml/2006/main" x="647700" y="1704975"/>
+          <a:ext xmlns:a="http://schemas.openxmlformats.org/drawingml/2006/main" cx="10896600" cy="3619500"/>
+        </p:xfrm>
+        <a:graphic xmlns:a="http://schemas.openxmlformats.org/drawingml/2006/main">
+          <a:graphicData uri="http://schemas.openxmlformats.org/drawingml/2006/table">
+            <a:tbl>
+              <a:tblPr firstRow="0" firstCol="0" bandRow="0"/>
+              <a:tblGrid>
+                <a:gridCol w="2133600"/>
+                <a:gridCol w="8763000"/>
+              </a:tblGrid>
+              <a:tr h="561975">
+                <a:tc>
+                  <a:txBody>
+                    <a:bodyPr lIns="133350" tIns="85725" rIns="133350" bIns="85725">
+                      <a:noAutofit/>
+                    </a:bodyPr>
+                    <a:lstStyle/>
+                    <a:p>
+                      <a:r>
+                        <a:rPr sz="1875" b="1">
+                          <a:solidFill>
+                            <a:srgbClr val="FFFFFF"/>
+                          </a:solidFill>
+                          <a:latin typeface="Arial"/>
+                          <a:ea typeface="Arial"/>
+                          <a:cs typeface="Arial"/>
+                        </a:rPr>
+                        <a:t>Owner</a:t>
+                      </a:r>
+                    </a:p>
+                  </a:txBody>
+                  <a:tcPr marL="91440" marR="91440" marT="45720" marB="45720" anchor="ctr">
+                    <a:solidFill>
+                      <a:srgbClr val="17343C"/>
+                    </a:solidFill>
+                  </a:tcPr>
+                </a:tc>
+                <a:tc>
+                  <a:txBody>
+                    <a:bodyPr lIns="133350" tIns="85725" rIns="133350" bIns="85725">
+                      <a:noAutofit/>
+                    </a:bodyPr>
+                    <a:lstStyle/>
+                    <a:p>
+                      <a:r>
+                        <a:rPr sz="1875" b="1">
+                          <a:solidFill>
+                            <a:srgbClr val="FFFFFF"/>
+                          </a:solidFill>
+                          <a:latin typeface="Arial"/>
+                          <a:ea typeface="Arial"/>
+                          <a:cs typeface="Arial"/>
+                        </a:rPr>
+                        <a:t>Before submission next week</a:t>
+                      </a:r>
+                    </a:p>
+                  </a:txBody>
+                  <a:tcPr marL="91440" marR="91440" marT="45720" marB="45720" anchor="ctr">
+                    <a:solidFill>
+                      <a:srgbClr val="17343C"/>
+                    </a:solidFill>
+                  </a:tcPr>
+                </a:tc>
+              </a:tr>
+              <a:tr h="1019175">
+                <a:tc>
+                  <a:txBody>
+                    <a:bodyPr lIns="133350" tIns="85725" rIns="133350" bIns="85725">
+                      <a:noAutofit/>
+                    </a:bodyPr>
+                    <a:lstStyle/>
+                    <a:p>
+                      <a:r>
+                        <a:rPr sz="2250" b="0">
+                          <a:solidFill>
+                            <a:srgbClr val="17343C"/>
+                          </a:solidFill>
+                          <a:latin typeface="Arial"/>
+                          <a:ea typeface="Arial"/>
+                          <a:cs typeface="Arial"/>
+                        </a:rPr>
+                        <a:t>Sultan</a:t>
+                      </a:r>
+                    </a:p>
+                  </a:txBody>
+                  <a:tcPr marL="91440" marR="91440" marT="45720" marB="45720" anchor="ctr">
+                    <a:solidFill>
+                      <a:srgbClr val="FAFAF7"/>
+                    </a:solidFill>
+                  </a:tcPr>
+                </a:tc>
+                <a:tc>
+                  <a:txBody>
+                    <a:bodyPr lIns="133350" tIns="85725" rIns="133350" bIns="85725">
+                      <a:noAutofit/>
+                    </a:bodyPr>
+                    <a:lstStyle/>
+                    <a:p>
+                      <a:r>
+                        <a:rPr sz="2250" b="0">
+                          <a:solidFill>
+                            <a:srgbClr val="17343C"/>
+                          </a:solidFill>
+                          <a:latin typeface="Arial"/>
+                          <a:ea typeface="Arial"/>
+                          <a:cs typeface="Arial"/>
+                        </a:rPr>
+                        <a:t>Finish costs and the time plan</a:t>
+                      </a:r>
+                    </a:p>
+                    <a:p>
+                      <a:r>
+                        <a:rPr sz="2250" b="0">
+                          <a:solidFill>
+                            <a:srgbClr val="17343C"/>
+                          </a:solidFill>
+                          <a:latin typeface="Arial"/>
+                          <a:ea typeface="Arial"/>
+                          <a:cs typeface="Arial"/>
+                        </a:rPr>
+                        <a:t>Check workload against our available hours</a:t>
+                      </a:r>
+                    </a:p>
+                  </a:txBody>
+                  <a:tcPr marL="91440" marR="91440" marT="45720" marB="45720" anchor="ctr">
+                    <a:solidFill>
+                      <a:srgbClr val="FAFAF7"/>
+                    </a:solidFill>
+                  </a:tcPr>
+                </a:tc>
+              </a:tr>
+              <a:tr h="1019175">
+                <a:tc>
+                  <a:txBody>
+                    <a:bodyPr lIns="133350" tIns="85725" rIns="133350" bIns="85725">
+                      <a:noAutofit/>
+                    </a:bodyPr>
+                    <a:lstStyle/>
+                    <a:p>
+                      <a:r>
+                        <a:rPr sz="2250" b="0">
+                          <a:solidFill>
+                            <a:srgbClr val="17343C"/>
+                          </a:solidFill>
+                          <a:latin typeface="Arial"/>
+                          <a:ea typeface="Arial"/>
+                          <a:cs typeface="Arial"/>
+                        </a:rPr>
+                        <a:t>Zayed</a:t>
+                      </a:r>
+                    </a:p>
+                  </a:txBody>
+                  <a:tcPr marL="91440" marR="91440" marT="45720" marB="45720" anchor="ctr">
+                    <a:solidFill>
+                      <a:srgbClr val="F0F4F3"/>
+                    </a:solidFill>
+                  </a:tcPr>
+                </a:tc>
+                <a:tc>
+                  <a:txBody>
+                    <a:bodyPr lIns="133350" tIns="85725" rIns="133350" bIns="85725">
+                      <a:noAutofit/>
+                    </a:bodyPr>
+                    <a:lstStyle/>
+                    <a:p>
+                      <a:r>
+                        <a:rPr sz="2250" b="0">
+                          <a:solidFill>
+                            <a:srgbClr val="17343C"/>
+                          </a:solidFill>
+                          <a:latin typeface="Arial"/>
+                          <a:ea typeface="Arial"/>
+                          <a:cs typeface="Arial"/>
+                        </a:rPr>
+                        <a:t>Confirm the KU process and scenario</a:t>
+                      </a:r>
+                    </a:p>
+                    <a:p>
+                      <a:r>
+                        <a:rPr sz="2250" b="0">
+                          <a:solidFill>
+                            <a:srgbClr val="17343C"/>
+                          </a:solidFill>
+                          <a:latin typeface="Arial"/>
+                          <a:ea typeface="Arial"/>
+                          <a:cs typeface="Arial"/>
+                        </a:rPr>
+                        <a:t>Review staff needs, rules and the brand</a:t>
+                      </a:r>
+                    </a:p>
+                  </a:txBody>
+                  <a:tcPr marL="91440" marR="91440" marT="45720" marB="45720" anchor="ctr">
+                    <a:solidFill>
+                      <a:srgbClr val="F0F4F3"/>
+                    </a:solidFill>
+                  </a:tcPr>
+                </a:tc>
+              </a:tr>
+              <a:tr h="1019175">
+                <a:tc>
+                  <a:txBody>
+                    <a:bodyPr lIns="133350" tIns="85725" rIns="133350" bIns="85725">
+                      <a:noAutofit/>
+                    </a:bodyPr>
+                    <a:lstStyle/>
+                    <a:p>
+                      <a:r>
+                        <a:rPr sz="2250" b="0">
+                          <a:solidFill>
+                            <a:srgbClr val="17343C"/>
+                          </a:solidFill>
+                          <a:latin typeface="Arial"/>
+                          <a:ea typeface="Arial"/>
+                          <a:cs typeface="Arial"/>
+                        </a:rPr>
+                        <a:t>Ghith</a:t>
+                      </a:r>
+                    </a:p>
+                  </a:txBody>
+                  <a:tcPr marL="91440" marR="91440" marT="45720" marB="45720" anchor="ctr">
+                    <a:solidFill>
+                      <a:srgbClr val="FAFAF7"/>
+                    </a:solidFill>
+                  </a:tcPr>
+                </a:tc>
+                <a:tc>
+                  <a:txBody>
+                    <a:bodyPr lIns="133350" tIns="85725" rIns="133350" bIns="85725">
+                      <a:noAutofit/>
+                    </a:bodyPr>
+                    <a:lstStyle/>
+                    <a:p>
+                      <a:r>
+                        <a:rPr sz="2250" b="0">
+                          <a:solidFill>
+                            <a:srgbClr val="17343C"/>
+                          </a:solidFill>
+                          <a:latin typeface="Arial"/>
+                          <a:ea typeface="Arial"/>
+                          <a:cs typeface="Arial"/>
+                        </a:rPr>
+                        <a:t>Compare technology and AI choices</a:t>
+                      </a:r>
+                    </a:p>
+                    <a:p>
+                      <a:r>
+                        <a:rPr sz="2250" b="0">
+                          <a:solidFill>
+                            <a:srgbClr val="17343C"/>
+                          </a:solidFill>
+                          <a:latin typeface="Arial"/>
+                          <a:ea typeface="Arial"/>
+                          <a:cs typeface="Arial"/>
+                        </a:rPr>
+                        <a:t>Run a small trial if access allows</a:t>
+                      </a:r>
+                    </a:p>
+                  </a:txBody>
+                  <a:tcPr marL="91440" marR="91440" marT="45720" marB="45720" anchor="ctr">
+                    <a:solidFill>
+                      <a:srgbClr val="FAFAF7"/>
+                    </a:solidFill>
+                  </a:tcPr>
+                </a:tc>
+              </a:tr>
+            </a:tbl>
+          </a:graphicData>
+        </a:graphic>
+      </p:graphicFrame>
+      <p:sp>
+        <p:nvSpPr>
+          <p:cNvPr id="4" name="confirm">
+            <a:extLst xmlns:a="http://schemas.openxmlformats.org/drawingml/2006/main">
+              <a:ext uri="{FF2B5EF4-FFF2-40B4-BE49-F238E27FC236}">
+                <a16:creationId xmlns:a16="http://schemas.microsoft.com/office/drawing/2014/main" id="{D69A0456-FA00-4E35-B97C-710DE1BF9FB0}"/>
+              </a:ext>
+            </a:extLst>
+          </p:cNvPr>
+          <p:cNvSpPr>
+            <a:spLocks xmlns:a="http://schemas.openxmlformats.org/drawingml/2006/main" noGrp="1"/>
+          </p:cNvSpPr>
+          <p:nvPr/>
+        </p:nvSpPr>
+        <p:spPr>
+          <a:xfrm xmlns:a="http://schemas.openxmlformats.org/drawingml/2006/main">
+            <a:off x="647700" y="5600700"/>
+            <a:ext cx="10896600" cy="400050"/>
+          </a:xfrm>
+          <a:prstGeom xmlns:a="http://schemas.openxmlformats.org/drawingml/2006/main" prst="rect">
+            <a:avLst/>
+          </a:prstGeom>
+          <a:noFill xmlns:a="http://schemas.openxmlformats.org/drawingml/2006/main"/>
+          <a:ln xmlns:a="http://schemas.openxmlformats.org/drawingml/2006/main" w="0">
+            <a:noFill/>
+          </a:ln>
+        </p:spPr>
+        <p:txBody>
+          <a:bodyPr xmlns:a="http://schemas.openxmlformats.org/drawingml/2006/main" wrap="square" lIns="0" tIns="0" rIns="0" bIns="0" anchor="t">
+            <a:noAutofit/>
+          </a:bodyPr>
+          <a:lstStyle xmlns:a="http://schemas.openxmlformats.org/drawingml/2006/main"/>
+          <a:p xmlns:a="http://schemas.openxmlformats.org/drawingml/2006/main">
+            <a:pPr algn="l">
+              <a:defRPr sz="2325" b="1">
+                <a:solidFill>
+                  <a:srgbClr val="26746D"/>
+                </a:solidFill>
+                <a:latin typeface="Arial"/>
+                <a:ea typeface="Arial"/>
+                <a:cs typeface="Arial"/>
+              </a:defRPr>
+            </a:pPr>
+            <a:r>
+              <a:rPr sz="2325" b="1">
+                <a:solidFill>
+                  <a:srgbClr val="26746D"/>
+                </a:solidFill>
+                <a:latin typeface="Arial"/>
+                <a:ea typeface="Arial"/>
+                <a:cs typeface="Arial"/>
+              </a:rPr>
+              <a:t>For today’s discussion</a:t>
+            </a:r>
+          </a:p>
+        </p:txBody>
+      </p:sp>
+      <p:sp>
+        <p:nvSpPr>
+          <p:cNvPr id="5" name="doctor">
+            <a:extLst xmlns:a="http://schemas.openxmlformats.org/drawingml/2006/main">
+              <a:ext uri="{FF2B5EF4-FFF2-40B4-BE49-F238E27FC236}">
+                <a16:creationId xmlns:a16="http://schemas.microsoft.com/office/drawing/2014/main" id="{22DDA28F-E390-420F-93AE-848F202FC641}"/>
+              </a:ext>
+            </a:extLst>
+          </p:cNvPr>
+          <p:cNvSpPr>
+            <a:spLocks xmlns:a="http://schemas.openxmlformats.org/drawingml/2006/main" noGrp="1"/>
+          </p:cNvSpPr>
+          <p:nvPr/>
+        </p:nvSpPr>
+        <p:spPr>
+          <a:xfrm xmlns:a="http://schemas.openxmlformats.org/drawingml/2006/main">
+            <a:off x="647700" y="6057900"/>
+            <a:ext cx="10896600" cy="552450"/>
+          </a:xfrm>
+          <a:prstGeom xmlns:a="http://schemas.openxmlformats.org/drawingml/2006/main" prst="rect">
+            <a:avLst/>
+          </a:prstGeom>
+          <a:noFill xmlns:a="http://schemas.openxmlformats.org/drawingml/2006/main"/>
+          <a:ln xmlns:a="http://schemas.openxmlformats.org/drawingml/2006/main" w="0">
+            <a:noFill/>
+          </a:ln>
+        </p:spPr>
+        <p:txBody>
+          <a:bodyPr xmlns:a="http://schemas.openxmlformats.org/drawingml/2006/main" wrap="square" lIns="0" tIns="0" rIns="0" bIns="0" anchor="t">
+            <a:noAutofit/>
+          </a:bodyPr>
+          <a:lstStyle xmlns:a="http://schemas.openxmlformats.org/drawingml/2006/main"/>
+          <a:p xmlns:a="http://schemas.openxmlformats.org/drawingml/2006/main">
+            <a:pPr algn="l">
+              <a:defRPr sz="1875" b="0">
+                <a:solidFill>
+                  <a:srgbClr val="526264"/>
+                </a:solidFill>
+                <a:latin typeface="Arial"/>
+                <a:ea typeface="Arial"/>
+                <a:cs typeface="Arial"/>
+              </a:defRPr>
+            </a:pPr>
+            <a:r>
+              <a:rPr sz="1875" b="0">
+                <a:solidFill>
+                  <a:srgbClr val="526264"/>
+                </a:solidFill>
+                <a:latin typeface="Arial"/>
+                <a:ea typeface="Arial"/>
+                <a:cs typeface="Arial"/>
+              </a:rPr>
+              <a:t>Confirm the current KU system, the service owner, evidence access</a:t>
+            </a:r>
+          </a:p>
+          <a:p xmlns:a="http://schemas.openxmlformats.org/drawingml/2006/main">
+            <a:pPr algn="l">
+              <a:defRPr sz="1875" b="0">
+                <a:solidFill>
+                  <a:srgbClr val="526264"/>
+                </a:solidFill>
+                <a:latin typeface="Arial"/>
+                <a:ea typeface="Arial"/>
+                <a:cs typeface="Arial"/>
+              </a:defRPr>
+            </a:pPr>
+            <a:r>
+              <a:rPr sz="1875" b="0">
+                <a:solidFill>
+                  <a:srgbClr val="526264"/>
+                </a:solidFill>
+                <a:latin typeface="Arial"/>
+                <a:ea typeface="Arial"/>
+                <a:cs typeface="Arial"/>
+              </a:rPr>
+              <a:t>and the exact submission day.</a:t>
+            </a:r>
+          </a:p>
+        </p:txBody>
+      </p:sp>
+    </p:spTree>
+    <p:extLst>
+      <p:ext uri="{BB962C8B-B14F-4D97-AF65-F5344CB8AC3E}">
+        <p14:creationId xmlns:p14="http://schemas.microsoft.com/office/powerpoint/2010/main" val="765572429"/>
       </p:ext>
     </p:extLst>
   </p:cSld>
